--- a/docs/content/05-teaching-resources/slides/core/18-security-threats-and-vulnerabilities.pptx
+++ b/docs/content/05-teaching-resources/slides/core/18-security-threats-and-vulnerabilities.pptx
@@ -11,10 +11,16 @@
     <p:sldId id="259" r:id="rId10"/>
     <p:sldId id="260" r:id="rId11"/>
     <p:sldId id="261" r:id="rId12"/>
-    <p:sldId id="262" r:id="rId13"/>
+    <p:sldId id="262" r:id="rId14"/>
     <p:sldId id="263" r:id="rId15"/>
     <p:sldId id="264" r:id="rId16"/>
     <p:sldId id="265" r:id="rId17"/>
+    <p:sldId id="266" r:id="rId18"/>
+    <p:sldId id="267" r:id="rId19"/>
+    <p:sldId id="268" r:id="rId20"/>
+    <p:sldId id="269" r:id="rId21"/>
+    <p:sldId id="270" r:id="rId22"/>
+    <p:sldId id="271" r:id="rId23"/>
   </p:sldIdLst>
   <p:sldSz cx="12191695" cy="6858000" type="screen4x3"/>
   <p:notesSz cx="6858000" cy="9144000"/>
@@ -511,7 +517,22 @@
           <a:lstStyle/>
           <a:p>
             <a:r>
-              <a:t>Give students a few minutes to answer on mini whiteboards or paper, then reveal the answers on the next slide.</a:t>
+              <a:t>Answers:</a:t>
+            </a:r>
+          </a:p>
+          <a:p>
+            <a:r>
+              <a:t>1. Inserting database commands through input so the code runs them.</a:t>
+            </a:r>
+          </a:p>
+          <a:p>
+            <a:r>
+              <a:t>2. Missing authentication or input validation.</a:t>
+            </a:r>
+          </a:p>
+          <a:p>
+            <a:r>
+              <a:t>3. Intercepting communication between two parties.</a:t>
             </a:r>
           </a:p>
         </p:txBody>
@@ -581,7 +602,22 @@
           <a:lstStyle/>
           <a:p>
             <a:r>
-              <a:t>Talk through any answers the class found difficult.</a:t>
+              <a:t>Answers:</a:t>
+            </a:r>
+          </a:p>
+          <a:p>
+            <a:r>
+              <a:t>1. Parameterised queries.</a:t>
+            </a:r>
+          </a:p>
+          <a:p>
+            <a:r>
+              <a:t>2. As salted hashes.</a:t>
+            </a:r>
+          </a:p>
+          <a:p>
+            <a:r>
+              <a:t>3. E.g. authentication, API keys, rate limits, validation.</a:t>
             </a:r>
           </a:p>
         </p:txBody>
@@ -651,7 +687,22 @@
           <a:lstStyle/>
           <a:p>
             <a:r>
-              <a:t>Use a small SQLite example so students can see the injection working before fixing it.</a:t>
+              <a:t>Answers:</a:t>
+            </a:r>
+          </a:p>
+          <a:p>
+            <a:r>
+              <a:t>1. A flaw exploited before a patch exists.</a:t>
+            </a:r>
+          </a:p>
+          <a:p>
+            <a:r>
+              <a:t>2. E.g. confirmation boxes, training.</a:t>
+            </a:r>
+          </a:p>
+          <a:p>
+            <a:r>
+              <a:t>3. Anyone who can see the repository can use them.</a:t>
             </a:r>
           </a:p>
         </p:txBody>
@@ -677,6 +728,216 @@
 </file>
 
 <file path=ppt/notesSlides/notesSlide4.xml><?xml version="1.0" encoding="utf-8"?>
+<p:notes xmlns:a="http://schemas.openxmlformats.org/drawingml/2006/main" xmlns:p="http://schemas.openxmlformats.org/presentationml/2006/main" xmlns:r="http://schemas.openxmlformats.org/officeDocument/2006/relationships">
+  <p:cSld>
+    <p:spTree>
+      <p:nvGrpSpPr>
+        <p:cNvPr id="1" name=""/>
+        <p:cNvGrpSpPr/>
+        <p:nvPr/>
+      </p:nvGrpSpPr>
+      <p:grpSpPr>
+        <a:xfrm>
+          <a:off x="0" y="0"/>
+          <a:ext cx="0" cy="0"/>
+          <a:chOff x="0" y="0"/>
+          <a:chExt cx="0" cy="0"/>
+        </a:xfrm>
+      </p:grpSpPr>
+      <p:sp>
+        <p:nvSpPr>
+          <p:cNvPr id="2" name="Slide Image Placeholder 1"/>
+          <p:cNvSpPr>
+            <a:spLocks noGrp="1"/>
+          </p:cNvSpPr>
+          <p:nvPr>
+            <p:ph type="sldImg" idx="2"/>
+          </p:nvPr>
+        </p:nvSpPr>
+        <p:spPr/>
+      </p:sp>
+      <p:sp>
+        <p:nvSpPr>
+          <p:cNvPr id="3" name="Notes Placeholder 2"/>
+          <p:cNvSpPr>
+            <a:spLocks noGrp="1"/>
+          </p:cNvSpPr>
+          <p:nvPr>
+            <p:ph type="body" idx="3" sz="quarter"/>
+          </p:nvPr>
+        </p:nvSpPr>
+        <p:spPr/>
+        <p:txBody>
+          <a:bodyPr/>
+          <a:lstStyle/>
+          <a:p>
+            <a:r>
+              <a:t>Give students a few minutes to answer on mini whiteboards or paper, then reveal the answers on the next slide.</a:t>
+            </a:r>
+          </a:p>
+        </p:txBody>
+      </p:sp>
+      <p:sp>
+        <p:nvSpPr>
+          <p:cNvPr id="4" name="Slide Number Placeholder 3"/>
+          <p:cNvSpPr>
+            <a:spLocks noGrp="1"/>
+          </p:cNvSpPr>
+          <p:nvPr>
+            <p:ph type="sldNum" idx="5" sz="quarter"/>
+          </p:nvPr>
+        </p:nvSpPr>
+        <p:spPr/>
+      </p:sp>
+    </p:spTree>
+  </p:cSld>
+  <p:clrMapOvr>
+    <a:masterClrMapping/>
+  </p:clrMapOvr>
+</p:notes>
+</file>
+
+<file path=ppt/notesSlides/notesSlide5.xml><?xml version="1.0" encoding="utf-8"?>
+<p:notes xmlns:a="http://schemas.openxmlformats.org/drawingml/2006/main" xmlns:p="http://schemas.openxmlformats.org/presentationml/2006/main" xmlns:r="http://schemas.openxmlformats.org/officeDocument/2006/relationships">
+  <p:cSld>
+    <p:spTree>
+      <p:nvGrpSpPr>
+        <p:cNvPr id="1" name=""/>
+        <p:cNvGrpSpPr/>
+        <p:nvPr/>
+      </p:nvGrpSpPr>
+      <p:grpSpPr>
+        <a:xfrm>
+          <a:off x="0" y="0"/>
+          <a:ext cx="0" cy="0"/>
+          <a:chOff x="0" y="0"/>
+          <a:chExt cx="0" cy="0"/>
+        </a:xfrm>
+      </p:grpSpPr>
+      <p:sp>
+        <p:nvSpPr>
+          <p:cNvPr id="2" name="Slide Image Placeholder 1"/>
+          <p:cNvSpPr>
+            <a:spLocks noGrp="1"/>
+          </p:cNvSpPr>
+          <p:nvPr>
+            <p:ph type="sldImg" idx="2"/>
+          </p:nvPr>
+        </p:nvSpPr>
+        <p:spPr/>
+      </p:sp>
+      <p:sp>
+        <p:nvSpPr>
+          <p:cNvPr id="3" name="Notes Placeholder 2"/>
+          <p:cNvSpPr>
+            <a:spLocks noGrp="1"/>
+          </p:cNvSpPr>
+          <p:nvPr>
+            <p:ph type="body" idx="3" sz="quarter"/>
+          </p:nvPr>
+        </p:nvSpPr>
+        <p:spPr/>
+        <p:txBody>
+          <a:bodyPr/>
+          <a:lstStyle/>
+          <a:p>
+            <a:r>
+              <a:t>Talk through any answers the class found difficult.</a:t>
+            </a:r>
+          </a:p>
+        </p:txBody>
+      </p:sp>
+      <p:sp>
+        <p:nvSpPr>
+          <p:cNvPr id="4" name="Slide Number Placeholder 3"/>
+          <p:cNvSpPr>
+            <a:spLocks noGrp="1"/>
+          </p:cNvSpPr>
+          <p:nvPr>
+            <p:ph type="sldNum" idx="5" sz="quarter"/>
+          </p:nvPr>
+        </p:nvSpPr>
+        <p:spPr/>
+      </p:sp>
+    </p:spTree>
+  </p:cSld>
+  <p:clrMapOvr>
+    <a:masterClrMapping/>
+  </p:clrMapOvr>
+</p:notes>
+</file>
+
+<file path=ppt/notesSlides/notesSlide6.xml><?xml version="1.0" encoding="utf-8"?>
+<p:notes xmlns:a="http://schemas.openxmlformats.org/drawingml/2006/main" xmlns:p="http://schemas.openxmlformats.org/presentationml/2006/main" xmlns:r="http://schemas.openxmlformats.org/officeDocument/2006/relationships">
+  <p:cSld>
+    <p:spTree>
+      <p:nvGrpSpPr>
+        <p:cNvPr id="1" name=""/>
+        <p:cNvGrpSpPr/>
+        <p:nvPr/>
+      </p:nvGrpSpPr>
+      <p:grpSpPr>
+        <a:xfrm>
+          <a:off x="0" y="0"/>
+          <a:ext cx="0" cy="0"/>
+          <a:chOff x="0" y="0"/>
+          <a:chExt cx="0" cy="0"/>
+        </a:xfrm>
+      </p:grpSpPr>
+      <p:sp>
+        <p:nvSpPr>
+          <p:cNvPr id="2" name="Slide Image Placeholder 1"/>
+          <p:cNvSpPr>
+            <a:spLocks noGrp="1"/>
+          </p:cNvSpPr>
+          <p:nvPr>
+            <p:ph type="sldImg" idx="2"/>
+          </p:nvPr>
+        </p:nvSpPr>
+        <p:spPr/>
+      </p:sp>
+      <p:sp>
+        <p:nvSpPr>
+          <p:cNvPr id="3" name="Notes Placeholder 2"/>
+          <p:cNvSpPr>
+            <a:spLocks noGrp="1"/>
+          </p:cNvSpPr>
+          <p:nvPr>
+            <p:ph type="body" idx="3" sz="quarter"/>
+          </p:nvPr>
+        </p:nvSpPr>
+        <p:spPr/>
+        <p:txBody>
+          <a:bodyPr/>
+          <a:lstStyle/>
+          <a:p>
+            <a:r>
+              <a:t>Use a small SQLite example so students can see the injection working before fixing it.</a:t>
+            </a:r>
+          </a:p>
+        </p:txBody>
+      </p:sp>
+      <p:sp>
+        <p:nvSpPr>
+          <p:cNvPr id="4" name="Slide Number Placeholder 3"/>
+          <p:cNvSpPr>
+            <a:spLocks noGrp="1"/>
+          </p:cNvSpPr>
+          <p:nvPr>
+            <p:ph type="sldNum" idx="5" sz="quarter"/>
+          </p:nvPr>
+        </p:nvSpPr>
+        <p:spPr/>
+      </p:sp>
+    </p:spTree>
+  </p:cSld>
+  <p:clrMapOvr>
+    <a:masterClrMapping/>
+  </p:clrMapOvr>
+</p:notes>
+</file>
+
+<file path=ppt/notesSlides/notesSlide7.xml><?xml version="1.0" encoding="utf-8"?>
 <p:notes xmlns:a="http://schemas.openxmlformats.org/drawingml/2006/main" xmlns:p="http://schemas.openxmlformats.org/presentationml/2006/main" xmlns:r="http://schemas.openxmlformats.org/officeDocument/2006/relationships">
   <p:cSld>
     <p:spTree>
@@ -4052,6 +4313,3320 @@
     <p:bg>
       <p:bgPr>
         <a:solidFill>
+          <a:srgbClr val="FFFFFF"/>
+        </a:solidFill>
+        <a:effectLst/>
+      </p:bgPr>
+    </p:bg>
+    <p:spTree>
+      <p:nvGrpSpPr>
+        <p:cNvPr id="1" name=""/>
+        <p:cNvGrpSpPr/>
+        <p:nvPr/>
+      </p:nvGrpSpPr>
+      <p:grpSpPr/>
+      <p:sp>
+        <p:nvSpPr>
+          <p:cNvPr id="2" name="TextBox 1"/>
+          <p:cNvSpPr txBox="1"/>
+          <p:nvPr/>
+        </p:nvSpPr>
+        <p:spPr>
+          <a:xfrm>
+            <a:off x="548640" y="320040"/>
+            <a:ext cx="11094415" cy="274320"/>
+          </a:xfrm>
+          <a:prstGeom prst="rect">
+            <a:avLst/>
+          </a:prstGeom>
+          <a:noFill/>
+        </p:spPr>
+        <p:txBody>
+          <a:bodyPr wrap="square" anchor="t" lIns="0" rIns="0" tIns="0" bIns="0"/>
+          <a:lstStyle/>
+          <a:p>
+            <a:pPr algn="l"/>
+            <a:r>
+              <a:rPr sz="1100" b="1" i="0">
+                <a:solidFill>
+                  <a:srgbClr val="54595D"/>
+                </a:solidFill>
+                <a:latin typeface="Calibri"/>
+              </a:rPr>
+              <a:t>CORE COMPONENT  ·  Core Paper 2</a:t>
+            </a:r>
+          </a:p>
+        </p:txBody>
+      </p:sp>
+      <p:sp>
+        <p:nvSpPr>
+          <p:cNvPr id="3" name="TextBox 2"/>
+          <p:cNvSpPr txBox="1"/>
+          <p:nvPr/>
+        </p:nvSpPr>
+        <p:spPr>
+          <a:xfrm>
+            <a:off x="548640" y="566928"/>
+            <a:ext cx="11094415" cy="822960"/>
+          </a:xfrm>
+          <a:prstGeom prst="rect">
+            <a:avLst/>
+          </a:prstGeom>
+          <a:noFill/>
+        </p:spPr>
+        <p:txBody>
+          <a:bodyPr wrap="square" anchor="ctr" lIns="0" rIns="0" tIns="0" bIns="0"/>
+          <a:lstStyle/>
+          <a:p>
+            <a:pPr algn="l"/>
+            <a:r>
+              <a:rPr sz="3200" b="1" i="0">
+                <a:solidFill>
+                  <a:srgbClr val="03306E"/>
+                </a:solidFill>
+                <a:latin typeface="Cambria"/>
+              </a:rPr>
+              <a:t>Human and physical risks</a:t>
+            </a:r>
+          </a:p>
+        </p:txBody>
+      </p:sp>
+      <p:sp>
+        <p:nvSpPr>
+          <p:cNvPr id="4" name="TextBox 3"/>
+          <p:cNvSpPr txBox="1"/>
+          <p:nvPr/>
+        </p:nvSpPr>
+        <p:spPr>
+          <a:xfrm>
+            <a:off x="548640" y="6446520"/>
+            <a:ext cx="8229600" cy="274320"/>
+          </a:xfrm>
+          <a:prstGeom prst="rect">
+            <a:avLst/>
+          </a:prstGeom>
+          <a:noFill/>
+        </p:spPr>
+        <p:txBody>
+          <a:bodyPr wrap="square" anchor="t" lIns="0" rIns="0" tIns="0" bIns="0"/>
+          <a:lstStyle/>
+          <a:p>
+            <a:pPr algn="l"/>
+            <a:r>
+              <a:rPr sz="1000" b="0" i="0">
+                <a:solidFill>
+                  <a:srgbClr val="54595D"/>
+                </a:solidFill>
+                <a:latin typeface="Calibri"/>
+              </a:rPr>
+              <a:t>Digital Software Development T Level  ·  Security Threats and Vulnerabilities</a:t>
+            </a:r>
+          </a:p>
+        </p:txBody>
+      </p:sp>
+      <p:sp>
+        <p:nvSpPr>
+          <p:cNvPr id="5" name="TextBox 4"/>
+          <p:cNvSpPr txBox="1"/>
+          <p:nvPr/>
+        </p:nvSpPr>
+        <p:spPr>
+          <a:xfrm>
+            <a:off x="10728655" y="6446520"/>
+            <a:ext cx="914400" cy="274320"/>
+          </a:xfrm>
+          <a:prstGeom prst="rect">
+            <a:avLst/>
+          </a:prstGeom>
+          <a:noFill/>
+        </p:spPr>
+        <p:txBody>
+          <a:bodyPr wrap="square" anchor="t" lIns="0" rIns="0" tIns="0" bIns="0"/>
+          <a:lstStyle/>
+          <a:p>
+            <a:pPr algn="r"/>
+            <a:r>
+              <a:rPr sz="1000" b="0" i="0">
+                <a:solidFill>
+                  <a:srgbClr val="54595D"/>
+                </a:solidFill>
+                <a:latin typeface="Calibri"/>
+              </a:rPr>
+              <a:t>10</a:t>
+            </a:r>
+          </a:p>
+        </p:txBody>
+      </p:sp>
+      <p:sp>
+        <p:nvSpPr>
+          <p:cNvPr id="6" name="TextBox 5"/>
+          <p:cNvSpPr txBox="1"/>
+          <p:nvPr/>
+        </p:nvSpPr>
+        <p:spPr>
+          <a:xfrm>
+            <a:off x="548640" y="1554480"/>
+            <a:ext cx="6720840" cy="4617720"/>
+          </a:xfrm>
+          <a:prstGeom prst="rect">
+            <a:avLst/>
+          </a:prstGeom>
+          <a:noFill/>
+        </p:spPr>
+        <p:txBody>
+          <a:bodyPr wrap="square" lIns="0" rIns="0" tIns="0" bIns="0">
+            <a:spAutoFit/>
+          </a:bodyPr>
+          <a:lstStyle/>
+          <a:p>
+            <a:pPr>
+              <a:spcAft>
+                <a:spcPts val="1320"/>
+              </a:spcAft>
+            </a:pPr>
+            <a:r>
+              <a:rPr sz="2200" b="0">
+                <a:solidFill>
+                  <a:srgbClr val="202122"/>
+                </a:solidFill>
+                <a:latin typeface="Calibri"/>
+              </a:rPr>
+              <a:t>People and places create risk too.</a:t>
+            </a:r>
+          </a:p>
+          <a:p>
+            <a:pPr>
+              <a:spcAft>
+                <a:spcPts val="1320"/>
+              </a:spcAft>
+            </a:pPr>
+            <a:r>
+              <a:rPr sz="2200" b="0">
+                <a:solidFill>
+                  <a:srgbClr val="202122"/>
+                </a:solidFill>
+                <a:latin typeface="Calibri"/>
+              </a:rPr>
+              <a:t>Human error, such as deleting the wrong data, is reduced by confirmation boxes and training. Malicious employees are dealt with by removing access quickly. Disguised criminals are stopped by ID checks. Poor cyber hygiene, such as unlocked screens or reused passwords, is fixed with training and password managers.</a:t>
+            </a:r>
+          </a:p>
+          <a:p>
+            <a:pPr>
+              <a:spcAft>
+                <a:spcPts val="1320"/>
+              </a:spcAft>
+            </a:pPr>
+            <a:r>
+              <a:rPr sz="2200" b="0">
+                <a:solidFill>
+                  <a:srgbClr val="202122"/>
+                </a:solidFill>
+                <a:latin typeface="Calibri"/>
+              </a:rPr>
+              <a:t>Vulnerabilities include weak encryption, poor password policy, no MFA, out-of-date software with known or zero-day flaws, poor physical access control, shoulder surfing and natural disasters.</a:t>
+            </a:r>
+          </a:p>
+        </p:txBody>
+      </p:sp>
+      <p:sp>
+        <p:nvSpPr>
+          <p:cNvPr id="7" name="Rounded Rectangle 6"/>
+          <p:cNvSpPr/>
+          <p:nvPr/>
+        </p:nvSpPr>
+        <p:spPr>
+          <a:xfrm>
+            <a:off x="7772400" y="1554480"/>
+            <a:ext cx="3867912" cy="4526280"/>
+          </a:xfrm>
+          <a:prstGeom prst="roundRect">
+            <a:avLst>
+              <a:gd name="adj" fmla="val 8000"/>
+            </a:avLst>
+          </a:prstGeom>
+          <a:solidFill>
+            <a:srgbClr val="03306E"/>
+          </a:solidFill>
+          <a:ln>
+            <a:noFill/>
+          </a:ln>
+          <a:effectLst/>
+        </p:spPr>
+        <p:style>
+          <a:lnRef idx="1">
+            <a:schemeClr val="accent1"/>
+          </a:lnRef>
+          <a:fillRef idx="3">
+            <a:schemeClr val="accent1"/>
+          </a:fillRef>
+          <a:effectRef idx="2">
+            <a:schemeClr val="accent1"/>
+          </a:effectRef>
+          <a:fontRef idx="minor">
+            <a:schemeClr val="lt1"/>
+          </a:fontRef>
+        </p:style>
+        <p:txBody>
+          <a:bodyPr rtlCol="0" anchor="ctr"/>
+          <a:lstStyle/>
+          <a:p/>
+        </p:txBody>
+      </p:sp>
+      <p:sp>
+        <p:nvSpPr>
+          <p:cNvPr id="8" name="Oval 7"/>
+          <p:cNvSpPr/>
+          <p:nvPr/>
+        </p:nvSpPr>
+        <p:spPr>
+          <a:xfrm>
+            <a:off x="8046720" y="1828800"/>
+            <a:ext cx="548640" cy="548640"/>
+          </a:xfrm>
+          <a:prstGeom prst="ellipse">
+            <a:avLst/>
+          </a:prstGeom>
+          <a:solidFill>
+            <a:srgbClr val="F2B705"/>
+          </a:solidFill>
+          <a:ln>
+            <a:noFill/>
+          </a:ln>
+          <a:effectLst/>
+        </p:spPr>
+        <p:style>
+          <a:lnRef idx="1">
+            <a:schemeClr val="accent1"/>
+          </a:lnRef>
+          <a:fillRef idx="3">
+            <a:schemeClr val="accent1"/>
+          </a:fillRef>
+          <a:effectRef idx="2">
+            <a:schemeClr val="accent1"/>
+          </a:effectRef>
+          <a:fontRef idx="minor">
+            <a:schemeClr val="lt1"/>
+          </a:fontRef>
+        </p:style>
+        <p:txBody>
+          <a:bodyPr rtlCol="0" anchor="ctr" lIns="0" rIns="0" tIns="0" bIns="0"/>
+          <a:lstStyle/>
+          <a:p>
+            <a:pPr algn="ctr"/>
+            <a:r>
+              <a:rPr sz="1300" b="1">
+                <a:solidFill>
+                  <a:srgbClr val="202122"/>
+                </a:solidFill>
+                <a:latin typeface="Calibri"/>
+              </a:rPr>
+              <a:t>e.g.</a:t>
+            </a:r>
+          </a:p>
+        </p:txBody>
+      </p:sp>
+      <p:sp>
+        <p:nvSpPr>
+          <p:cNvPr id="9" name="TextBox 8"/>
+          <p:cNvSpPr txBox="1"/>
+          <p:nvPr/>
+        </p:nvSpPr>
+        <p:spPr>
+          <a:xfrm>
+            <a:off x="8046720" y="2560320"/>
+            <a:ext cx="3291840" cy="365760"/>
+          </a:xfrm>
+          <a:prstGeom prst="rect">
+            <a:avLst/>
+          </a:prstGeom>
+          <a:noFill/>
+        </p:spPr>
+        <p:txBody>
+          <a:bodyPr wrap="square" anchor="t" lIns="0" rIns="0" tIns="0" bIns="0"/>
+          <a:lstStyle/>
+          <a:p>
+            <a:pPr algn="l"/>
+            <a:r>
+              <a:rPr sz="1300" b="1" i="0">
+                <a:solidFill>
+                  <a:srgbClr val="A9C8F0"/>
+                </a:solidFill>
+                <a:latin typeface="Calibri"/>
+              </a:rPr>
+              <a:t>EXAMPLE</a:t>
+            </a:r>
+          </a:p>
+        </p:txBody>
+      </p:sp>
+      <p:sp>
+        <p:nvSpPr>
+          <p:cNvPr id="10" name="TextBox 9"/>
+          <p:cNvSpPr txBox="1"/>
+          <p:nvPr/>
+        </p:nvSpPr>
+        <p:spPr>
+          <a:xfrm>
+            <a:off x="8046720" y="2971800"/>
+            <a:ext cx="3291840" cy="2971800"/>
+          </a:xfrm>
+          <a:prstGeom prst="rect">
+            <a:avLst/>
+          </a:prstGeom>
+          <a:noFill/>
+        </p:spPr>
+        <p:txBody>
+          <a:bodyPr wrap="square" anchor="t" lIns="0" rIns="0" tIns="0" bIns="0"/>
+          <a:lstStyle/>
+          <a:p>
+            <a:pPr algn="l"/>
+            <a:r>
+              <a:rPr sz="1900" b="0" i="0">
+                <a:solidFill>
+                  <a:srgbClr val="FFFFFF"/>
+                </a:solidFill>
+                <a:latin typeface="Cambria"/>
+              </a:rPr>
+              <a:t>A developer who commits an API key to a public code repository has made a human error that attackers can exploit within minutes.</a:t>
+            </a:r>
+          </a:p>
+        </p:txBody>
+      </p:sp>
+    </p:spTree>
+  </p:cSld>
+  <p:clrMapOvr>
+    <a:masterClrMapping/>
+  </p:clrMapOvr>
+</p:sld>
+</file>
+
+<file path=ppt/slides/slide11.xml><?xml version="1.0" encoding="utf-8"?>
+<p:sld xmlns:a="http://schemas.openxmlformats.org/drawingml/2006/main" xmlns:p="http://schemas.openxmlformats.org/presentationml/2006/main" xmlns:r="http://schemas.openxmlformats.org/officeDocument/2006/relationships">
+  <p:cSld>
+    <p:bg>
+      <p:bgPr>
+        <a:solidFill>
+          <a:srgbClr val="FFFFFF"/>
+        </a:solidFill>
+        <a:effectLst/>
+      </p:bgPr>
+    </p:bg>
+    <p:spTree>
+      <p:nvGrpSpPr>
+        <p:cNvPr id="1" name=""/>
+        <p:cNvGrpSpPr/>
+        <p:nvPr/>
+      </p:nvGrpSpPr>
+      <p:grpSpPr/>
+      <p:sp>
+        <p:nvSpPr>
+          <p:cNvPr id="2" name="TextBox 1"/>
+          <p:cNvSpPr txBox="1"/>
+          <p:nvPr/>
+        </p:nvSpPr>
+        <p:spPr>
+          <a:xfrm>
+            <a:off x="548640" y="320040"/>
+            <a:ext cx="11094415" cy="274320"/>
+          </a:xfrm>
+          <a:prstGeom prst="rect">
+            <a:avLst/>
+          </a:prstGeom>
+          <a:noFill/>
+        </p:spPr>
+        <p:txBody>
+          <a:bodyPr wrap="square" anchor="t" lIns="0" rIns="0" tIns="0" bIns="0"/>
+          <a:lstStyle/>
+          <a:p>
+            <a:pPr algn="l"/>
+            <a:r>
+              <a:rPr sz="1100" b="1" i="0">
+                <a:solidFill>
+                  <a:srgbClr val="54595D"/>
+                </a:solidFill>
+                <a:latin typeface="Calibri"/>
+              </a:rPr>
+              <a:t>CORE COMPONENT  ·  Core Paper 2</a:t>
+            </a:r>
+          </a:p>
+        </p:txBody>
+      </p:sp>
+      <p:sp>
+        <p:nvSpPr>
+          <p:cNvPr id="3" name="TextBox 2"/>
+          <p:cNvSpPr txBox="1"/>
+          <p:nvPr/>
+        </p:nvSpPr>
+        <p:spPr>
+          <a:xfrm>
+            <a:off x="548640" y="566928"/>
+            <a:ext cx="11094415" cy="822960"/>
+          </a:xfrm>
+          <a:prstGeom prst="rect">
+            <a:avLst/>
+          </a:prstGeom>
+          <a:noFill/>
+        </p:spPr>
+        <p:txBody>
+          <a:bodyPr wrap="square" anchor="ctr" lIns="0" rIns="0" tIns="0" bIns="0"/>
+          <a:lstStyle/>
+          <a:p>
+            <a:pPr algn="l"/>
+            <a:r>
+              <a:rPr sz="3200" b="1" i="0">
+                <a:solidFill>
+                  <a:srgbClr val="03306E"/>
+                </a:solidFill>
+                <a:latin typeface="Cambria"/>
+              </a:rPr>
+              <a:t>Human and physical risks</a:t>
+            </a:r>
+          </a:p>
+        </p:txBody>
+      </p:sp>
+      <p:sp>
+        <p:nvSpPr>
+          <p:cNvPr id="4" name="TextBox 3"/>
+          <p:cNvSpPr txBox="1"/>
+          <p:nvPr/>
+        </p:nvSpPr>
+        <p:spPr>
+          <a:xfrm>
+            <a:off x="548640" y="6446520"/>
+            <a:ext cx="8229600" cy="274320"/>
+          </a:xfrm>
+          <a:prstGeom prst="rect">
+            <a:avLst/>
+          </a:prstGeom>
+          <a:noFill/>
+        </p:spPr>
+        <p:txBody>
+          <a:bodyPr wrap="square" anchor="t" lIns="0" rIns="0" tIns="0" bIns="0"/>
+          <a:lstStyle/>
+          <a:p>
+            <a:pPr algn="l"/>
+            <a:r>
+              <a:rPr sz="1000" b="0" i="0">
+                <a:solidFill>
+                  <a:srgbClr val="54595D"/>
+                </a:solidFill>
+                <a:latin typeface="Calibri"/>
+              </a:rPr>
+              <a:t>Digital Software Development T Level  ·  Security Threats and Vulnerabilities</a:t>
+            </a:r>
+          </a:p>
+        </p:txBody>
+      </p:sp>
+      <p:sp>
+        <p:nvSpPr>
+          <p:cNvPr id="5" name="TextBox 4"/>
+          <p:cNvSpPr txBox="1"/>
+          <p:nvPr/>
+        </p:nvSpPr>
+        <p:spPr>
+          <a:xfrm>
+            <a:off x="10728655" y="6446520"/>
+            <a:ext cx="914400" cy="274320"/>
+          </a:xfrm>
+          <a:prstGeom prst="rect">
+            <a:avLst/>
+          </a:prstGeom>
+          <a:noFill/>
+        </p:spPr>
+        <p:txBody>
+          <a:bodyPr wrap="square" anchor="t" lIns="0" rIns="0" tIns="0" bIns="0"/>
+          <a:lstStyle/>
+          <a:p>
+            <a:pPr algn="r"/>
+            <a:r>
+              <a:rPr sz="1000" b="0" i="0">
+                <a:solidFill>
+                  <a:srgbClr val="54595D"/>
+                </a:solidFill>
+                <a:latin typeface="Calibri"/>
+              </a:rPr>
+              <a:t>11</a:t>
+            </a:r>
+          </a:p>
+        </p:txBody>
+      </p:sp>
+      <p:sp>
+        <p:nvSpPr>
+          <p:cNvPr id="6" name="Rounded Rectangle 5"/>
+          <p:cNvSpPr/>
+          <p:nvPr/>
+        </p:nvSpPr>
+        <p:spPr>
+          <a:xfrm>
+            <a:off x="548640" y="1600200"/>
+            <a:ext cx="5364327" cy="640080"/>
+          </a:xfrm>
+          <a:prstGeom prst="roundRect">
+            <a:avLst>
+              <a:gd name="adj" fmla="val 15000"/>
+            </a:avLst>
+          </a:prstGeom>
+          <a:solidFill>
+            <a:srgbClr val="03306E"/>
+          </a:solidFill>
+          <a:ln>
+            <a:noFill/>
+          </a:ln>
+          <a:effectLst/>
+        </p:spPr>
+        <p:style>
+          <a:lnRef idx="1">
+            <a:schemeClr val="accent1"/>
+          </a:lnRef>
+          <a:fillRef idx="3">
+            <a:schemeClr val="accent1"/>
+          </a:fillRef>
+          <a:effectRef idx="2">
+            <a:schemeClr val="accent1"/>
+          </a:effectRef>
+          <a:fontRef idx="minor">
+            <a:schemeClr val="lt1"/>
+          </a:fontRef>
+        </p:style>
+        <p:txBody>
+          <a:bodyPr rtlCol="0" anchor="ctr"/>
+          <a:lstStyle/>
+          <a:p/>
+        </p:txBody>
+      </p:sp>
+      <p:sp>
+        <p:nvSpPr>
+          <p:cNvPr id="7" name="TextBox 6"/>
+          <p:cNvSpPr txBox="1"/>
+          <p:nvPr/>
+        </p:nvSpPr>
+        <p:spPr>
+          <a:xfrm>
+            <a:off x="777240" y="1600200"/>
+            <a:ext cx="4907127" cy="640080"/>
+          </a:xfrm>
+          <a:prstGeom prst="rect">
+            <a:avLst/>
+          </a:prstGeom>
+          <a:noFill/>
+        </p:spPr>
+        <p:txBody>
+          <a:bodyPr wrap="square" anchor="ctr" lIns="0" rIns="0" tIns="0" bIns="0"/>
+          <a:lstStyle/>
+          <a:p>
+            <a:pPr algn="l"/>
+            <a:r>
+              <a:rPr sz="2000" b="1" i="0">
+                <a:solidFill>
+                  <a:srgbClr val="FFFFFF"/>
+                </a:solidFill>
+                <a:latin typeface="Calibri"/>
+              </a:rPr>
+              <a:t>Human threats</a:t>
+            </a:r>
+          </a:p>
+        </p:txBody>
+      </p:sp>
+      <p:sp>
+        <p:nvSpPr>
+          <p:cNvPr id="8" name="Rounded Rectangle 7"/>
+          <p:cNvSpPr/>
+          <p:nvPr/>
+        </p:nvSpPr>
+        <p:spPr>
+          <a:xfrm>
+            <a:off x="548640" y="2377440"/>
+            <a:ext cx="5364327" cy="3794760"/>
+          </a:xfrm>
+          <a:prstGeom prst="roundRect">
+            <a:avLst>
+              <a:gd name="adj" fmla="val 4000"/>
+            </a:avLst>
+          </a:prstGeom>
+          <a:solidFill>
+            <a:srgbClr val="EAF3FF"/>
+          </a:solidFill>
+          <a:ln>
+            <a:noFill/>
+          </a:ln>
+          <a:effectLst/>
+        </p:spPr>
+        <p:style>
+          <a:lnRef idx="1">
+            <a:schemeClr val="accent1"/>
+          </a:lnRef>
+          <a:fillRef idx="3">
+            <a:schemeClr val="accent1"/>
+          </a:fillRef>
+          <a:effectRef idx="2">
+            <a:schemeClr val="accent1"/>
+          </a:effectRef>
+          <a:fontRef idx="minor">
+            <a:schemeClr val="lt1"/>
+          </a:fontRef>
+        </p:style>
+        <p:txBody>
+          <a:bodyPr rtlCol="0" anchor="ctr"/>
+          <a:lstStyle/>
+          <a:p/>
+        </p:txBody>
+      </p:sp>
+      <p:sp>
+        <p:nvSpPr>
+          <p:cNvPr id="9" name="TextBox 8"/>
+          <p:cNvSpPr txBox="1"/>
+          <p:nvPr/>
+        </p:nvSpPr>
+        <p:spPr>
+          <a:xfrm>
+            <a:off x="822959" y="2606040"/>
+            <a:ext cx="4815687" cy="3337560"/>
+          </a:xfrm>
+          <a:prstGeom prst="rect">
+            <a:avLst/>
+          </a:prstGeom>
+          <a:noFill/>
+        </p:spPr>
+        <p:txBody>
+          <a:bodyPr wrap="square" lIns="0" rIns="0" tIns="0" bIns="0">
+            <a:spAutoFit/>
+          </a:bodyPr>
+          <a:lstStyle/>
+          <a:p>
+            <a:pPr marL="274320" indent="-274320">
+              <a:spcAft>
+                <a:spcPts val="990"/>
+              </a:spcAft>
+              <a:buClr>
+                <a:srgbClr val="0645AD"/>
+              </a:buClr>
+              <a:buFont typeface="Arial"/>
+              <a:buChar char="•"/>
+            </a:pPr>
+            <a:r>
+              <a:rPr sz="2200" b="1">
+                <a:solidFill>
+                  <a:srgbClr val="202122"/>
+                </a:solidFill>
+                <a:latin typeface="Calibri"/>
+              </a:rPr>
+              <a:t>Human error:</a:t>
+            </a:r>
+            <a:r>
+              <a:rPr sz="2200" b="0">
+                <a:solidFill>
+                  <a:srgbClr val="202122"/>
+                </a:solidFill>
+                <a:latin typeface="Calibri"/>
+              </a:rPr>
+              <a:t> confirmation boxes, training</a:t>
+            </a:r>
+          </a:p>
+          <a:p>
+            <a:pPr marL="274320" indent="-274320">
+              <a:spcAft>
+                <a:spcPts val="990"/>
+              </a:spcAft>
+              <a:buClr>
+                <a:srgbClr val="0645AD"/>
+              </a:buClr>
+              <a:buFont typeface="Arial"/>
+              <a:buChar char="•"/>
+            </a:pPr>
+            <a:r>
+              <a:rPr sz="2200" b="1">
+                <a:solidFill>
+                  <a:srgbClr val="202122"/>
+                </a:solidFill>
+                <a:latin typeface="Calibri"/>
+              </a:rPr>
+              <a:t>Malicious employees:</a:t>
+            </a:r>
+            <a:r>
+              <a:rPr sz="2200" b="0">
+                <a:solidFill>
+                  <a:srgbClr val="202122"/>
+                </a:solidFill>
+                <a:latin typeface="Calibri"/>
+              </a:rPr>
+              <a:t> remove access fast</a:t>
+            </a:r>
+          </a:p>
+          <a:p>
+            <a:pPr marL="274320" indent="-274320">
+              <a:spcAft>
+                <a:spcPts val="990"/>
+              </a:spcAft>
+              <a:buClr>
+                <a:srgbClr val="0645AD"/>
+              </a:buClr>
+              <a:buFont typeface="Arial"/>
+              <a:buChar char="•"/>
+            </a:pPr>
+            <a:r>
+              <a:rPr sz="2200" b="1">
+                <a:solidFill>
+                  <a:srgbClr val="202122"/>
+                </a:solidFill>
+                <a:latin typeface="Calibri"/>
+              </a:rPr>
+              <a:t>Disguised criminals:</a:t>
+            </a:r>
+            <a:r>
+              <a:rPr sz="2200" b="0">
+                <a:solidFill>
+                  <a:srgbClr val="202122"/>
+                </a:solidFill>
+                <a:latin typeface="Calibri"/>
+              </a:rPr>
+              <a:t> ID checks, escorts</a:t>
+            </a:r>
+          </a:p>
+          <a:p>
+            <a:pPr marL="274320" indent="-274320">
+              <a:spcAft>
+                <a:spcPts val="990"/>
+              </a:spcAft>
+              <a:buClr>
+                <a:srgbClr val="0645AD"/>
+              </a:buClr>
+              <a:buFont typeface="Arial"/>
+              <a:buChar char="•"/>
+            </a:pPr>
+            <a:r>
+              <a:rPr sz="2200" b="1">
+                <a:solidFill>
+                  <a:srgbClr val="202122"/>
+                </a:solidFill>
+                <a:latin typeface="Calibri"/>
+              </a:rPr>
+              <a:t>Poor cyber hygiene:</a:t>
+            </a:r>
+            <a:r>
+              <a:rPr sz="2200" b="0">
+                <a:solidFill>
+                  <a:srgbClr val="202122"/>
+                </a:solidFill>
+                <a:latin typeface="Calibri"/>
+              </a:rPr>
+              <a:t> lock screens, password managers</a:t>
+            </a:r>
+          </a:p>
+        </p:txBody>
+      </p:sp>
+      <p:sp>
+        <p:nvSpPr>
+          <p:cNvPr id="10" name="Rounded Rectangle 9"/>
+          <p:cNvSpPr/>
+          <p:nvPr/>
+        </p:nvSpPr>
+        <p:spPr>
+          <a:xfrm>
+            <a:off x="6278727" y="1600200"/>
+            <a:ext cx="5364327" cy="640080"/>
+          </a:xfrm>
+          <a:prstGeom prst="roundRect">
+            <a:avLst>
+              <a:gd name="adj" fmla="val 15000"/>
+            </a:avLst>
+          </a:prstGeom>
+          <a:solidFill>
+            <a:srgbClr val="0645AD"/>
+          </a:solidFill>
+          <a:ln>
+            <a:noFill/>
+          </a:ln>
+          <a:effectLst/>
+        </p:spPr>
+        <p:style>
+          <a:lnRef idx="1">
+            <a:schemeClr val="accent1"/>
+          </a:lnRef>
+          <a:fillRef idx="3">
+            <a:schemeClr val="accent1"/>
+          </a:fillRef>
+          <a:effectRef idx="2">
+            <a:schemeClr val="accent1"/>
+          </a:effectRef>
+          <a:fontRef idx="minor">
+            <a:schemeClr val="lt1"/>
+          </a:fontRef>
+        </p:style>
+        <p:txBody>
+          <a:bodyPr rtlCol="0" anchor="ctr"/>
+          <a:lstStyle/>
+          <a:p/>
+        </p:txBody>
+      </p:sp>
+      <p:sp>
+        <p:nvSpPr>
+          <p:cNvPr id="11" name="TextBox 10"/>
+          <p:cNvSpPr txBox="1"/>
+          <p:nvPr/>
+        </p:nvSpPr>
+        <p:spPr>
+          <a:xfrm>
+            <a:off x="6507327" y="1600200"/>
+            <a:ext cx="4907127" cy="640080"/>
+          </a:xfrm>
+          <a:prstGeom prst="rect">
+            <a:avLst/>
+          </a:prstGeom>
+          <a:noFill/>
+        </p:spPr>
+        <p:txBody>
+          <a:bodyPr wrap="square" anchor="ctr" lIns="0" rIns="0" tIns="0" bIns="0"/>
+          <a:lstStyle/>
+          <a:p>
+            <a:pPr algn="l"/>
+            <a:r>
+              <a:rPr sz="2000" b="1" i="0">
+                <a:solidFill>
+                  <a:srgbClr val="FFFFFF"/>
+                </a:solidFill>
+                <a:latin typeface="Calibri"/>
+              </a:rPr>
+              <a:t>Vulnerabilities</a:t>
+            </a:r>
+          </a:p>
+        </p:txBody>
+      </p:sp>
+      <p:sp>
+        <p:nvSpPr>
+          <p:cNvPr id="12" name="Rounded Rectangle 11"/>
+          <p:cNvSpPr/>
+          <p:nvPr/>
+        </p:nvSpPr>
+        <p:spPr>
+          <a:xfrm>
+            <a:off x="6278727" y="2377440"/>
+            <a:ext cx="5364327" cy="3794760"/>
+          </a:xfrm>
+          <a:prstGeom prst="roundRect">
+            <a:avLst>
+              <a:gd name="adj" fmla="val 4000"/>
+            </a:avLst>
+          </a:prstGeom>
+          <a:solidFill>
+            <a:srgbClr val="EAF3FF"/>
+          </a:solidFill>
+          <a:ln>
+            <a:noFill/>
+          </a:ln>
+          <a:effectLst/>
+        </p:spPr>
+        <p:style>
+          <a:lnRef idx="1">
+            <a:schemeClr val="accent1"/>
+          </a:lnRef>
+          <a:fillRef idx="3">
+            <a:schemeClr val="accent1"/>
+          </a:fillRef>
+          <a:effectRef idx="2">
+            <a:schemeClr val="accent1"/>
+          </a:effectRef>
+          <a:fontRef idx="minor">
+            <a:schemeClr val="lt1"/>
+          </a:fontRef>
+        </p:style>
+        <p:txBody>
+          <a:bodyPr rtlCol="0" anchor="ctr"/>
+          <a:lstStyle/>
+          <a:p/>
+        </p:txBody>
+      </p:sp>
+      <p:sp>
+        <p:nvSpPr>
+          <p:cNvPr id="13" name="TextBox 12"/>
+          <p:cNvSpPr txBox="1"/>
+          <p:nvPr/>
+        </p:nvSpPr>
+        <p:spPr>
+          <a:xfrm>
+            <a:off x="6553047" y="2606040"/>
+            <a:ext cx="4815687" cy="3337560"/>
+          </a:xfrm>
+          <a:prstGeom prst="rect">
+            <a:avLst/>
+          </a:prstGeom>
+          <a:noFill/>
+        </p:spPr>
+        <p:txBody>
+          <a:bodyPr wrap="square" lIns="0" rIns="0" tIns="0" bIns="0">
+            <a:spAutoFit/>
+          </a:bodyPr>
+          <a:lstStyle/>
+          <a:p>
+            <a:pPr marL="274320" indent="-274320">
+              <a:spcAft>
+                <a:spcPts val="990"/>
+              </a:spcAft>
+              <a:buClr>
+                <a:srgbClr val="0645AD"/>
+              </a:buClr>
+              <a:buFont typeface="Arial"/>
+              <a:buChar char="•"/>
+            </a:pPr>
+            <a:r>
+              <a:rPr sz="2200" b="0">
+                <a:solidFill>
+                  <a:srgbClr val="202122"/>
+                </a:solidFill>
+                <a:latin typeface="Calibri"/>
+              </a:rPr>
+              <a:t>Weak encryption, poor password policy, no MFA</a:t>
+            </a:r>
+          </a:p>
+          <a:p>
+            <a:pPr marL="274320" indent="-274320">
+              <a:spcAft>
+                <a:spcPts val="990"/>
+              </a:spcAft>
+              <a:buClr>
+                <a:srgbClr val="0645AD"/>
+              </a:buClr>
+              <a:buFont typeface="Arial"/>
+              <a:buChar char="•"/>
+            </a:pPr>
+            <a:r>
+              <a:rPr sz="2200" b="0">
+                <a:solidFill>
+                  <a:srgbClr val="202122"/>
+                </a:solidFill>
+                <a:latin typeface="Calibri"/>
+              </a:rPr>
+              <a:t>Out-of-date software and firmware, zero-days</a:t>
+            </a:r>
+          </a:p>
+          <a:p>
+            <a:pPr marL="274320" indent="-274320">
+              <a:spcAft>
+                <a:spcPts val="990"/>
+              </a:spcAft>
+              <a:buClr>
+                <a:srgbClr val="0645AD"/>
+              </a:buClr>
+              <a:buFont typeface="Arial"/>
+              <a:buChar char="•"/>
+            </a:pPr>
+            <a:r>
+              <a:rPr sz="2200" b="0">
+                <a:solidFill>
+                  <a:srgbClr val="202122"/>
+                </a:solidFill>
+                <a:latin typeface="Calibri"/>
+              </a:rPr>
+              <a:t>Poor physical access control, shoulder surfing</a:t>
+            </a:r>
+          </a:p>
+          <a:p>
+            <a:pPr marL="274320" indent="-274320">
+              <a:spcAft>
+                <a:spcPts val="990"/>
+              </a:spcAft>
+              <a:buClr>
+                <a:srgbClr val="0645AD"/>
+              </a:buClr>
+              <a:buFont typeface="Arial"/>
+              <a:buChar char="•"/>
+            </a:pPr>
+            <a:r>
+              <a:rPr sz="2200" b="0">
+                <a:solidFill>
+                  <a:srgbClr val="202122"/>
+                </a:solidFill>
+                <a:latin typeface="Calibri"/>
+              </a:rPr>
+              <a:t>Natural disasters</a:t>
+            </a:r>
+          </a:p>
+        </p:txBody>
+      </p:sp>
+    </p:spTree>
+  </p:cSld>
+  <p:clrMapOvr>
+    <a:masterClrMapping/>
+  </p:clrMapOvr>
+</p:sld>
+</file>
+
+<file path=ppt/slides/slide12.xml><?xml version="1.0" encoding="utf-8"?>
+<p:sld xmlns:a="http://schemas.openxmlformats.org/drawingml/2006/main" xmlns:p="http://schemas.openxmlformats.org/presentationml/2006/main" xmlns:r="http://schemas.openxmlformats.org/officeDocument/2006/relationships">
+  <p:cSld>
+    <p:bg>
+      <p:bgPr>
+        <a:solidFill>
+          <a:srgbClr val="FFFFFF"/>
+        </a:solidFill>
+        <a:effectLst/>
+      </p:bgPr>
+    </p:bg>
+    <p:spTree>
+      <p:nvGrpSpPr>
+        <p:cNvPr id="1" name=""/>
+        <p:cNvGrpSpPr/>
+        <p:nvPr/>
+      </p:nvGrpSpPr>
+      <p:grpSpPr/>
+      <p:sp>
+        <p:nvSpPr>
+          <p:cNvPr id="2" name="TextBox 1"/>
+          <p:cNvSpPr txBox="1"/>
+          <p:nvPr/>
+        </p:nvSpPr>
+        <p:spPr>
+          <a:xfrm>
+            <a:off x="548640" y="320040"/>
+            <a:ext cx="11094415" cy="274320"/>
+          </a:xfrm>
+          <a:prstGeom prst="rect">
+            <a:avLst/>
+          </a:prstGeom>
+          <a:noFill/>
+        </p:spPr>
+        <p:txBody>
+          <a:bodyPr wrap="square" anchor="t" lIns="0" rIns="0" tIns="0" bIns="0"/>
+          <a:lstStyle/>
+          <a:p>
+            <a:pPr algn="l"/>
+            <a:r>
+              <a:rPr sz="1100" b="1" i="0">
+                <a:solidFill>
+                  <a:srgbClr val="54595D"/>
+                </a:solidFill>
+                <a:latin typeface="Calibri"/>
+              </a:rPr>
+              <a:t>CORE COMPONENT  ·  Core Paper 2</a:t>
+            </a:r>
+          </a:p>
+        </p:txBody>
+      </p:sp>
+      <p:sp>
+        <p:nvSpPr>
+          <p:cNvPr id="3" name="TextBox 2"/>
+          <p:cNvSpPr txBox="1"/>
+          <p:nvPr/>
+        </p:nvSpPr>
+        <p:spPr>
+          <a:xfrm>
+            <a:off x="548640" y="566928"/>
+            <a:ext cx="11094415" cy="822960"/>
+          </a:xfrm>
+          <a:prstGeom prst="rect">
+            <a:avLst/>
+          </a:prstGeom>
+          <a:noFill/>
+        </p:spPr>
+        <p:txBody>
+          <a:bodyPr wrap="square" anchor="ctr" lIns="0" rIns="0" tIns="0" bIns="0"/>
+          <a:lstStyle/>
+          <a:p>
+            <a:pPr algn="l"/>
+            <a:r>
+              <a:rPr sz="3200" b="1" i="0">
+                <a:solidFill>
+                  <a:srgbClr val="03306E"/>
+                </a:solidFill>
+                <a:latin typeface="Cambria"/>
+              </a:rPr>
+              <a:t>Quick check: Human and physical risks</a:t>
+            </a:r>
+          </a:p>
+        </p:txBody>
+      </p:sp>
+      <p:sp>
+        <p:nvSpPr>
+          <p:cNvPr id="4" name="TextBox 3"/>
+          <p:cNvSpPr txBox="1"/>
+          <p:nvPr/>
+        </p:nvSpPr>
+        <p:spPr>
+          <a:xfrm>
+            <a:off x="548640" y="6446520"/>
+            <a:ext cx="8229600" cy="274320"/>
+          </a:xfrm>
+          <a:prstGeom prst="rect">
+            <a:avLst/>
+          </a:prstGeom>
+          <a:noFill/>
+        </p:spPr>
+        <p:txBody>
+          <a:bodyPr wrap="square" anchor="t" lIns="0" rIns="0" tIns="0" bIns="0"/>
+          <a:lstStyle/>
+          <a:p>
+            <a:pPr algn="l"/>
+            <a:r>
+              <a:rPr sz="1000" b="0" i="0">
+                <a:solidFill>
+                  <a:srgbClr val="54595D"/>
+                </a:solidFill>
+                <a:latin typeface="Calibri"/>
+              </a:rPr>
+              <a:t>Digital Software Development T Level  ·  Security Threats and Vulnerabilities</a:t>
+            </a:r>
+          </a:p>
+        </p:txBody>
+      </p:sp>
+      <p:sp>
+        <p:nvSpPr>
+          <p:cNvPr id="5" name="TextBox 4"/>
+          <p:cNvSpPr txBox="1"/>
+          <p:nvPr/>
+        </p:nvSpPr>
+        <p:spPr>
+          <a:xfrm>
+            <a:off x="10728655" y="6446520"/>
+            <a:ext cx="914400" cy="274320"/>
+          </a:xfrm>
+          <a:prstGeom prst="rect">
+            <a:avLst/>
+          </a:prstGeom>
+          <a:noFill/>
+        </p:spPr>
+        <p:txBody>
+          <a:bodyPr wrap="square" anchor="t" lIns="0" rIns="0" tIns="0" bIns="0"/>
+          <a:lstStyle/>
+          <a:p>
+            <a:pPr algn="r"/>
+            <a:r>
+              <a:rPr sz="1000" b="0" i="0">
+                <a:solidFill>
+                  <a:srgbClr val="54595D"/>
+                </a:solidFill>
+                <a:latin typeface="Calibri"/>
+              </a:rPr>
+              <a:t>12</a:t>
+            </a:r>
+          </a:p>
+        </p:txBody>
+      </p:sp>
+      <p:sp>
+        <p:nvSpPr>
+          <p:cNvPr id="6" name="Oval 5"/>
+          <p:cNvSpPr/>
+          <p:nvPr/>
+        </p:nvSpPr>
+        <p:spPr>
+          <a:xfrm>
+            <a:off x="548640" y="1691640"/>
+            <a:ext cx="502920" cy="502920"/>
+          </a:xfrm>
+          <a:prstGeom prst="ellipse">
+            <a:avLst/>
+          </a:prstGeom>
+          <a:solidFill>
+            <a:srgbClr val="F2B705"/>
+          </a:solidFill>
+          <a:ln>
+            <a:noFill/>
+          </a:ln>
+          <a:effectLst/>
+        </p:spPr>
+        <p:style>
+          <a:lnRef idx="1">
+            <a:schemeClr val="accent1"/>
+          </a:lnRef>
+          <a:fillRef idx="3">
+            <a:schemeClr val="accent1"/>
+          </a:fillRef>
+          <a:effectRef idx="2">
+            <a:schemeClr val="accent1"/>
+          </a:effectRef>
+          <a:fontRef idx="minor">
+            <a:schemeClr val="lt1"/>
+          </a:fontRef>
+        </p:style>
+        <p:txBody>
+          <a:bodyPr rtlCol="0" anchor="ctr" lIns="0" rIns="0" tIns="0" bIns="0"/>
+          <a:lstStyle/>
+          <a:p>
+            <a:pPr algn="ctr"/>
+            <a:r>
+              <a:rPr sz="1600" b="1">
+                <a:solidFill>
+                  <a:srgbClr val="202122"/>
+                </a:solidFill>
+                <a:latin typeface="Calibri"/>
+              </a:rPr>
+              <a:t>1</a:t>
+            </a:r>
+          </a:p>
+        </p:txBody>
+      </p:sp>
+      <p:sp>
+        <p:nvSpPr>
+          <p:cNvPr id="7" name="TextBox 6"/>
+          <p:cNvSpPr txBox="1"/>
+          <p:nvPr/>
+        </p:nvSpPr>
+        <p:spPr>
+          <a:xfrm>
+            <a:off x="1371600" y="1645920"/>
+            <a:ext cx="10271455" cy="1188720"/>
+          </a:xfrm>
+          <a:prstGeom prst="rect">
+            <a:avLst/>
+          </a:prstGeom>
+          <a:noFill/>
+        </p:spPr>
+        <p:txBody>
+          <a:bodyPr wrap="square" anchor="t" lIns="0" rIns="0" tIns="0" bIns="0"/>
+          <a:lstStyle/>
+          <a:p>
+            <a:pPr algn="l"/>
+            <a:r>
+              <a:rPr sz="2400" b="0" i="0">
+                <a:solidFill>
+                  <a:srgbClr val="202122"/>
+                </a:solidFill>
+                <a:latin typeface="Calibri"/>
+              </a:rPr>
+              <a:t>What is a zero-day?</a:t>
+            </a:r>
+          </a:p>
+        </p:txBody>
+      </p:sp>
+      <p:sp>
+        <p:nvSpPr>
+          <p:cNvPr id="8" name="Oval 7"/>
+          <p:cNvSpPr/>
+          <p:nvPr/>
+        </p:nvSpPr>
+        <p:spPr>
+          <a:xfrm>
+            <a:off x="548640" y="3108960"/>
+            <a:ext cx="502920" cy="502920"/>
+          </a:xfrm>
+          <a:prstGeom prst="ellipse">
+            <a:avLst/>
+          </a:prstGeom>
+          <a:solidFill>
+            <a:srgbClr val="F2B705"/>
+          </a:solidFill>
+          <a:ln>
+            <a:noFill/>
+          </a:ln>
+          <a:effectLst/>
+        </p:spPr>
+        <p:style>
+          <a:lnRef idx="1">
+            <a:schemeClr val="accent1"/>
+          </a:lnRef>
+          <a:fillRef idx="3">
+            <a:schemeClr val="accent1"/>
+          </a:fillRef>
+          <a:effectRef idx="2">
+            <a:schemeClr val="accent1"/>
+          </a:effectRef>
+          <a:fontRef idx="minor">
+            <a:schemeClr val="lt1"/>
+          </a:fontRef>
+        </p:style>
+        <p:txBody>
+          <a:bodyPr rtlCol="0" anchor="ctr" lIns="0" rIns="0" tIns="0" bIns="0"/>
+          <a:lstStyle/>
+          <a:p>
+            <a:pPr algn="ctr"/>
+            <a:r>
+              <a:rPr sz="1600" b="1">
+                <a:solidFill>
+                  <a:srgbClr val="202122"/>
+                </a:solidFill>
+                <a:latin typeface="Calibri"/>
+              </a:rPr>
+              <a:t>2</a:t>
+            </a:r>
+          </a:p>
+        </p:txBody>
+      </p:sp>
+      <p:sp>
+        <p:nvSpPr>
+          <p:cNvPr id="9" name="TextBox 8"/>
+          <p:cNvSpPr txBox="1"/>
+          <p:nvPr/>
+        </p:nvSpPr>
+        <p:spPr>
+          <a:xfrm>
+            <a:off x="1371600" y="3063240"/>
+            <a:ext cx="10271455" cy="1188720"/>
+          </a:xfrm>
+          <a:prstGeom prst="rect">
+            <a:avLst/>
+          </a:prstGeom>
+          <a:noFill/>
+        </p:spPr>
+        <p:txBody>
+          <a:bodyPr wrap="square" anchor="t" lIns="0" rIns="0" tIns="0" bIns="0"/>
+          <a:lstStyle/>
+          <a:p>
+            <a:pPr algn="l"/>
+            <a:r>
+              <a:rPr sz="2400" b="0" i="0">
+                <a:solidFill>
+                  <a:srgbClr val="202122"/>
+                </a:solidFill>
+                <a:latin typeface="Calibri"/>
+              </a:rPr>
+              <a:t>How can human error be reduced?</a:t>
+            </a:r>
+          </a:p>
+        </p:txBody>
+      </p:sp>
+      <p:sp>
+        <p:nvSpPr>
+          <p:cNvPr id="10" name="Oval 9"/>
+          <p:cNvSpPr/>
+          <p:nvPr/>
+        </p:nvSpPr>
+        <p:spPr>
+          <a:xfrm>
+            <a:off x="548640" y="4526280"/>
+            <a:ext cx="502920" cy="502920"/>
+          </a:xfrm>
+          <a:prstGeom prst="ellipse">
+            <a:avLst/>
+          </a:prstGeom>
+          <a:solidFill>
+            <a:srgbClr val="F2B705"/>
+          </a:solidFill>
+          <a:ln>
+            <a:noFill/>
+          </a:ln>
+          <a:effectLst/>
+        </p:spPr>
+        <p:style>
+          <a:lnRef idx="1">
+            <a:schemeClr val="accent1"/>
+          </a:lnRef>
+          <a:fillRef idx="3">
+            <a:schemeClr val="accent1"/>
+          </a:fillRef>
+          <a:effectRef idx="2">
+            <a:schemeClr val="accent1"/>
+          </a:effectRef>
+          <a:fontRef idx="minor">
+            <a:schemeClr val="lt1"/>
+          </a:fontRef>
+        </p:style>
+        <p:txBody>
+          <a:bodyPr rtlCol="0" anchor="ctr" lIns="0" rIns="0" tIns="0" bIns="0"/>
+          <a:lstStyle/>
+          <a:p>
+            <a:pPr algn="ctr"/>
+            <a:r>
+              <a:rPr sz="1600" b="1">
+                <a:solidFill>
+                  <a:srgbClr val="202122"/>
+                </a:solidFill>
+                <a:latin typeface="Calibri"/>
+              </a:rPr>
+              <a:t>3</a:t>
+            </a:r>
+          </a:p>
+        </p:txBody>
+      </p:sp>
+      <p:sp>
+        <p:nvSpPr>
+          <p:cNvPr id="11" name="TextBox 10"/>
+          <p:cNvSpPr txBox="1"/>
+          <p:nvPr/>
+        </p:nvSpPr>
+        <p:spPr>
+          <a:xfrm>
+            <a:off x="1371600" y="4480560"/>
+            <a:ext cx="10271455" cy="1188720"/>
+          </a:xfrm>
+          <a:prstGeom prst="rect">
+            <a:avLst/>
+          </a:prstGeom>
+          <a:noFill/>
+        </p:spPr>
+        <p:txBody>
+          <a:bodyPr wrap="square" anchor="t" lIns="0" rIns="0" tIns="0" bIns="0"/>
+          <a:lstStyle/>
+          <a:p>
+            <a:pPr algn="l"/>
+            <a:r>
+              <a:rPr sz="2400" b="0" i="0">
+                <a:solidFill>
+                  <a:srgbClr val="202122"/>
+                </a:solidFill>
+                <a:latin typeface="Calibri"/>
+              </a:rPr>
+              <a:t>Why shouldn't secrets be committed to repositories?</a:t>
+            </a:r>
+          </a:p>
+        </p:txBody>
+      </p:sp>
+      <p:sp>
+        <p:nvSpPr>
+          <p:cNvPr id="12" name="TextBox 11"/>
+          <p:cNvSpPr txBox="1"/>
+          <p:nvPr/>
+        </p:nvSpPr>
+        <p:spPr>
+          <a:xfrm>
+            <a:off x="548640" y="5852160"/>
+            <a:ext cx="11094415" cy="365760"/>
+          </a:xfrm>
+          <a:prstGeom prst="rect">
+            <a:avLst/>
+          </a:prstGeom>
+          <a:noFill/>
+        </p:spPr>
+        <p:txBody>
+          <a:bodyPr wrap="square" anchor="t" lIns="0" rIns="0" tIns="0" bIns="0"/>
+          <a:lstStyle/>
+          <a:p>
+            <a:pPr algn="l"/>
+            <a:r>
+              <a:rPr sz="1300" b="0" i="1">
+                <a:solidFill>
+                  <a:srgbClr val="54595D"/>
+                </a:solidFill>
+                <a:latin typeface="Calibri"/>
+              </a:rPr>
+              <a:t>Answer on mini whiteboards or in your book. Answers are in the speaker notes.</a:t>
+            </a:r>
+          </a:p>
+        </p:txBody>
+      </p:sp>
+    </p:spTree>
+  </p:cSld>
+  <p:clrMapOvr>
+    <a:masterClrMapping/>
+  </p:clrMapOvr>
+</p:sld>
+</file>
+
+<file path=ppt/slides/slide13.xml><?xml version="1.0" encoding="utf-8"?>
+<p:sld xmlns:a="http://schemas.openxmlformats.org/drawingml/2006/main" xmlns:p="http://schemas.openxmlformats.org/presentationml/2006/main" xmlns:r="http://schemas.openxmlformats.org/officeDocument/2006/relationships">
+  <p:cSld>
+    <p:bg>
+      <p:bgPr>
+        <a:solidFill>
+          <a:srgbClr val="FFFFFF"/>
+        </a:solidFill>
+        <a:effectLst/>
+      </p:bgPr>
+    </p:bg>
+    <p:spTree>
+      <p:nvGrpSpPr>
+        <p:cNvPr id="1" name=""/>
+        <p:cNvGrpSpPr/>
+        <p:nvPr/>
+      </p:nvGrpSpPr>
+      <p:grpSpPr/>
+      <p:sp>
+        <p:nvSpPr>
+          <p:cNvPr id="2" name="TextBox 1"/>
+          <p:cNvSpPr txBox="1"/>
+          <p:nvPr/>
+        </p:nvSpPr>
+        <p:spPr>
+          <a:xfrm>
+            <a:off x="548640" y="320040"/>
+            <a:ext cx="11094415" cy="274320"/>
+          </a:xfrm>
+          <a:prstGeom prst="rect">
+            <a:avLst/>
+          </a:prstGeom>
+          <a:noFill/>
+        </p:spPr>
+        <p:txBody>
+          <a:bodyPr wrap="square" anchor="t" lIns="0" rIns="0" tIns="0" bIns="0"/>
+          <a:lstStyle/>
+          <a:p>
+            <a:pPr algn="l"/>
+            <a:r>
+              <a:rPr sz="1100" b="1" i="0">
+                <a:solidFill>
+                  <a:srgbClr val="54595D"/>
+                </a:solidFill>
+                <a:latin typeface="Calibri"/>
+              </a:rPr>
+              <a:t>CORE COMPONENT  ·  Core Paper 2</a:t>
+            </a:r>
+          </a:p>
+        </p:txBody>
+      </p:sp>
+      <p:sp>
+        <p:nvSpPr>
+          <p:cNvPr id="3" name="TextBox 2"/>
+          <p:cNvSpPr txBox="1"/>
+          <p:nvPr/>
+        </p:nvSpPr>
+        <p:spPr>
+          <a:xfrm>
+            <a:off x="548640" y="566928"/>
+            <a:ext cx="11094415" cy="822960"/>
+          </a:xfrm>
+          <a:prstGeom prst="rect">
+            <a:avLst/>
+          </a:prstGeom>
+          <a:noFill/>
+        </p:spPr>
+        <p:txBody>
+          <a:bodyPr wrap="square" anchor="ctr" lIns="0" rIns="0" tIns="0" bIns="0"/>
+          <a:lstStyle/>
+          <a:p>
+            <a:pPr algn="l"/>
+            <a:r>
+              <a:rPr sz="3200" b="1" i="0">
+                <a:solidFill>
+                  <a:srgbClr val="03306E"/>
+                </a:solidFill>
+                <a:latin typeface="Cambria"/>
+              </a:rPr>
+              <a:t>Check your understanding</a:t>
+            </a:r>
+          </a:p>
+        </p:txBody>
+      </p:sp>
+      <p:sp>
+        <p:nvSpPr>
+          <p:cNvPr id="4" name="TextBox 3"/>
+          <p:cNvSpPr txBox="1"/>
+          <p:nvPr/>
+        </p:nvSpPr>
+        <p:spPr>
+          <a:xfrm>
+            <a:off x="548640" y="6446520"/>
+            <a:ext cx="8229600" cy="274320"/>
+          </a:xfrm>
+          <a:prstGeom prst="rect">
+            <a:avLst/>
+          </a:prstGeom>
+          <a:noFill/>
+        </p:spPr>
+        <p:txBody>
+          <a:bodyPr wrap="square" anchor="t" lIns="0" rIns="0" tIns="0" bIns="0"/>
+          <a:lstStyle/>
+          <a:p>
+            <a:pPr algn="l"/>
+            <a:r>
+              <a:rPr sz="1000" b="0" i="0">
+                <a:solidFill>
+                  <a:srgbClr val="54595D"/>
+                </a:solidFill>
+                <a:latin typeface="Calibri"/>
+              </a:rPr>
+              <a:t>Digital Software Development T Level  ·  Security Threats and Vulnerabilities</a:t>
+            </a:r>
+          </a:p>
+        </p:txBody>
+      </p:sp>
+      <p:sp>
+        <p:nvSpPr>
+          <p:cNvPr id="5" name="TextBox 4"/>
+          <p:cNvSpPr txBox="1"/>
+          <p:nvPr/>
+        </p:nvSpPr>
+        <p:spPr>
+          <a:xfrm>
+            <a:off x="10728655" y="6446520"/>
+            <a:ext cx="914400" cy="274320"/>
+          </a:xfrm>
+          <a:prstGeom prst="rect">
+            <a:avLst/>
+          </a:prstGeom>
+          <a:noFill/>
+        </p:spPr>
+        <p:txBody>
+          <a:bodyPr wrap="square" anchor="t" lIns="0" rIns="0" tIns="0" bIns="0"/>
+          <a:lstStyle/>
+          <a:p>
+            <a:pPr algn="r"/>
+            <a:r>
+              <a:rPr sz="1000" b="0" i="0">
+                <a:solidFill>
+                  <a:srgbClr val="54595D"/>
+                </a:solidFill>
+                <a:latin typeface="Calibri"/>
+              </a:rPr>
+              <a:t>13</a:t>
+            </a:r>
+          </a:p>
+        </p:txBody>
+      </p:sp>
+      <p:sp>
+        <p:nvSpPr>
+          <p:cNvPr id="6" name="Oval 5"/>
+          <p:cNvSpPr/>
+          <p:nvPr/>
+        </p:nvSpPr>
+        <p:spPr>
+          <a:xfrm>
+            <a:off x="548640" y="1618488"/>
+            <a:ext cx="411480" cy="411480"/>
+          </a:xfrm>
+          <a:prstGeom prst="ellipse">
+            <a:avLst/>
+          </a:prstGeom>
+          <a:solidFill>
+            <a:srgbClr val="F2B705"/>
+          </a:solidFill>
+          <a:ln>
+            <a:noFill/>
+          </a:ln>
+          <a:effectLst/>
+        </p:spPr>
+        <p:style>
+          <a:lnRef idx="1">
+            <a:schemeClr val="accent1"/>
+          </a:lnRef>
+          <a:fillRef idx="3">
+            <a:schemeClr val="accent1"/>
+          </a:fillRef>
+          <a:effectRef idx="2">
+            <a:schemeClr val="accent1"/>
+          </a:effectRef>
+          <a:fontRef idx="minor">
+            <a:schemeClr val="lt1"/>
+          </a:fontRef>
+        </p:style>
+        <p:txBody>
+          <a:bodyPr rtlCol="0" anchor="ctr" lIns="0" rIns="0" tIns="0" bIns="0"/>
+          <a:lstStyle/>
+          <a:p>
+            <a:pPr algn="ctr"/>
+            <a:r>
+              <a:rPr sz="1400" b="1">
+                <a:solidFill>
+                  <a:srgbClr val="202122"/>
+                </a:solidFill>
+                <a:latin typeface="Calibri"/>
+              </a:rPr>
+              <a:t>1</a:t>
+            </a:r>
+          </a:p>
+        </p:txBody>
+      </p:sp>
+      <p:sp>
+        <p:nvSpPr>
+          <p:cNvPr id="7" name="TextBox 6"/>
+          <p:cNvSpPr txBox="1"/>
+          <p:nvPr/>
+        </p:nvSpPr>
+        <p:spPr>
+          <a:xfrm>
+            <a:off x="1234440" y="1600200"/>
+            <a:ext cx="10408615" cy="1030986"/>
+          </a:xfrm>
+          <a:prstGeom prst="rect">
+            <a:avLst/>
+          </a:prstGeom>
+          <a:noFill/>
+        </p:spPr>
+        <p:txBody>
+          <a:bodyPr wrap="square" anchor="t" lIns="0" rIns="0" tIns="0" bIns="0"/>
+          <a:lstStyle/>
+          <a:p>
+            <a:pPr algn="l"/>
+            <a:r>
+              <a:rPr sz="2200" b="0" i="0">
+                <a:solidFill>
+                  <a:srgbClr val="202122"/>
+                </a:solidFill>
+                <a:latin typeface="Calibri"/>
+              </a:rPr>
+              <a:t>How do you prevent SQL injection?</a:t>
+            </a:r>
+          </a:p>
+        </p:txBody>
+      </p:sp>
+      <p:sp>
+        <p:nvSpPr>
+          <p:cNvPr id="8" name="Oval 7"/>
+          <p:cNvSpPr/>
+          <p:nvPr/>
+        </p:nvSpPr>
+        <p:spPr>
+          <a:xfrm>
+            <a:off x="548640" y="2814066"/>
+            <a:ext cx="411480" cy="411480"/>
+          </a:xfrm>
+          <a:prstGeom prst="ellipse">
+            <a:avLst/>
+          </a:prstGeom>
+          <a:solidFill>
+            <a:srgbClr val="F2B705"/>
+          </a:solidFill>
+          <a:ln>
+            <a:noFill/>
+          </a:ln>
+          <a:effectLst/>
+        </p:spPr>
+        <p:style>
+          <a:lnRef idx="1">
+            <a:schemeClr val="accent1"/>
+          </a:lnRef>
+          <a:fillRef idx="3">
+            <a:schemeClr val="accent1"/>
+          </a:fillRef>
+          <a:effectRef idx="2">
+            <a:schemeClr val="accent1"/>
+          </a:effectRef>
+          <a:fontRef idx="minor">
+            <a:schemeClr val="lt1"/>
+          </a:fontRef>
+        </p:style>
+        <p:txBody>
+          <a:bodyPr rtlCol="0" anchor="ctr" lIns="0" rIns="0" tIns="0" bIns="0"/>
+          <a:lstStyle/>
+          <a:p>
+            <a:pPr algn="ctr"/>
+            <a:r>
+              <a:rPr sz="1400" b="1">
+                <a:solidFill>
+                  <a:srgbClr val="202122"/>
+                </a:solidFill>
+                <a:latin typeface="Calibri"/>
+              </a:rPr>
+              <a:t>2</a:t>
+            </a:r>
+          </a:p>
+        </p:txBody>
+      </p:sp>
+      <p:sp>
+        <p:nvSpPr>
+          <p:cNvPr id="9" name="TextBox 8"/>
+          <p:cNvSpPr txBox="1"/>
+          <p:nvPr/>
+        </p:nvSpPr>
+        <p:spPr>
+          <a:xfrm>
+            <a:off x="1234440" y="2795778"/>
+            <a:ext cx="10408615" cy="1030986"/>
+          </a:xfrm>
+          <a:prstGeom prst="rect">
+            <a:avLst/>
+          </a:prstGeom>
+          <a:noFill/>
+        </p:spPr>
+        <p:txBody>
+          <a:bodyPr wrap="square" anchor="t" lIns="0" rIns="0" tIns="0" bIns="0"/>
+          <a:lstStyle/>
+          <a:p>
+            <a:pPr algn="l"/>
+            <a:r>
+              <a:rPr sz="2200" b="0" i="0">
+                <a:solidFill>
+                  <a:srgbClr val="202122"/>
+                </a:solidFill>
+                <a:latin typeface="Calibri"/>
+              </a:rPr>
+              <a:t>What is spear phishing?</a:t>
+            </a:r>
+          </a:p>
+        </p:txBody>
+      </p:sp>
+      <p:sp>
+        <p:nvSpPr>
+          <p:cNvPr id="10" name="Oval 9"/>
+          <p:cNvSpPr/>
+          <p:nvPr/>
+        </p:nvSpPr>
+        <p:spPr>
+          <a:xfrm>
+            <a:off x="548640" y="4009644"/>
+            <a:ext cx="411480" cy="411480"/>
+          </a:xfrm>
+          <a:prstGeom prst="ellipse">
+            <a:avLst/>
+          </a:prstGeom>
+          <a:solidFill>
+            <a:srgbClr val="F2B705"/>
+          </a:solidFill>
+          <a:ln>
+            <a:noFill/>
+          </a:ln>
+          <a:effectLst/>
+        </p:spPr>
+        <p:style>
+          <a:lnRef idx="1">
+            <a:schemeClr val="accent1"/>
+          </a:lnRef>
+          <a:fillRef idx="3">
+            <a:schemeClr val="accent1"/>
+          </a:fillRef>
+          <a:effectRef idx="2">
+            <a:schemeClr val="accent1"/>
+          </a:effectRef>
+          <a:fontRef idx="minor">
+            <a:schemeClr val="lt1"/>
+          </a:fontRef>
+        </p:style>
+        <p:txBody>
+          <a:bodyPr rtlCol="0" anchor="ctr" lIns="0" rIns="0" tIns="0" bIns="0"/>
+          <a:lstStyle/>
+          <a:p>
+            <a:pPr algn="ctr"/>
+            <a:r>
+              <a:rPr sz="1400" b="1">
+                <a:solidFill>
+                  <a:srgbClr val="202122"/>
+                </a:solidFill>
+                <a:latin typeface="Calibri"/>
+              </a:rPr>
+              <a:t>3</a:t>
+            </a:r>
+          </a:p>
+        </p:txBody>
+      </p:sp>
+      <p:sp>
+        <p:nvSpPr>
+          <p:cNvPr id="11" name="TextBox 10"/>
+          <p:cNvSpPr txBox="1"/>
+          <p:nvPr/>
+        </p:nvSpPr>
+        <p:spPr>
+          <a:xfrm>
+            <a:off x="1234440" y="3991356"/>
+            <a:ext cx="10408615" cy="1030986"/>
+          </a:xfrm>
+          <a:prstGeom prst="rect">
+            <a:avLst/>
+          </a:prstGeom>
+          <a:noFill/>
+        </p:spPr>
+        <p:txBody>
+          <a:bodyPr wrap="square" anchor="t" lIns="0" rIns="0" tIns="0" bIns="0"/>
+          <a:lstStyle/>
+          <a:p>
+            <a:pPr algn="l"/>
+            <a:r>
+              <a:rPr sz="2200" b="0" i="0">
+                <a:solidFill>
+                  <a:srgbClr val="202122"/>
+                </a:solidFill>
+                <a:latin typeface="Calibri"/>
+              </a:rPr>
+              <a:t>What makes an API insecure?</a:t>
+            </a:r>
+          </a:p>
+        </p:txBody>
+      </p:sp>
+      <p:sp>
+        <p:nvSpPr>
+          <p:cNvPr id="12" name="Oval 11"/>
+          <p:cNvSpPr/>
+          <p:nvPr/>
+        </p:nvSpPr>
+        <p:spPr>
+          <a:xfrm>
+            <a:off x="548640" y="5205221"/>
+            <a:ext cx="411480" cy="411480"/>
+          </a:xfrm>
+          <a:prstGeom prst="ellipse">
+            <a:avLst/>
+          </a:prstGeom>
+          <a:solidFill>
+            <a:srgbClr val="F2B705"/>
+          </a:solidFill>
+          <a:ln>
+            <a:noFill/>
+          </a:ln>
+          <a:effectLst/>
+        </p:spPr>
+        <p:style>
+          <a:lnRef idx="1">
+            <a:schemeClr val="accent1"/>
+          </a:lnRef>
+          <a:fillRef idx="3">
+            <a:schemeClr val="accent1"/>
+          </a:fillRef>
+          <a:effectRef idx="2">
+            <a:schemeClr val="accent1"/>
+          </a:effectRef>
+          <a:fontRef idx="minor">
+            <a:schemeClr val="lt1"/>
+          </a:fontRef>
+        </p:style>
+        <p:txBody>
+          <a:bodyPr rtlCol="0" anchor="ctr" lIns="0" rIns="0" tIns="0" bIns="0"/>
+          <a:lstStyle/>
+          <a:p>
+            <a:pPr algn="ctr"/>
+            <a:r>
+              <a:rPr sz="1400" b="1">
+                <a:solidFill>
+                  <a:srgbClr val="202122"/>
+                </a:solidFill>
+                <a:latin typeface="Calibri"/>
+              </a:rPr>
+              <a:t>4</a:t>
+            </a:r>
+          </a:p>
+        </p:txBody>
+      </p:sp>
+      <p:sp>
+        <p:nvSpPr>
+          <p:cNvPr id="13" name="TextBox 12"/>
+          <p:cNvSpPr txBox="1"/>
+          <p:nvPr/>
+        </p:nvSpPr>
+        <p:spPr>
+          <a:xfrm>
+            <a:off x="1234440" y="5186933"/>
+            <a:ext cx="10408615" cy="1030986"/>
+          </a:xfrm>
+          <a:prstGeom prst="rect">
+            <a:avLst/>
+          </a:prstGeom>
+          <a:noFill/>
+        </p:spPr>
+        <p:txBody>
+          <a:bodyPr wrap="square" anchor="t" lIns="0" rIns="0" tIns="0" bIns="0"/>
+          <a:lstStyle/>
+          <a:p>
+            <a:pPr algn="l"/>
+            <a:r>
+              <a:rPr sz="2200" b="0" i="0">
+                <a:solidFill>
+                  <a:srgbClr val="202122"/>
+                </a:solidFill>
+                <a:latin typeface="Calibri"/>
+              </a:rPr>
+              <a:t>What is a zero-day?</a:t>
+            </a:r>
+          </a:p>
+        </p:txBody>
+      </p:sp>
+    </p:spTree>
+  </p:cSld>
+  <p:clrMapOvr>
+    <a:masterClrMapping/>
+  </p:clrMapOvr>
+</p:sld>
+</file>
+
+<file path=ppt/slides/slide14.xml><?xml version="1.0" encoding="utf-8"?>
+<p:sld xmlns:a="http://schemas.openxmlformats.org/drawingml/2006/main" xmlns:p="http://schemas.openxmlformats.org/presentationml/2006/main" xmlns:r="http://schemas.openxmlformats.org/officeDocument/2006/relationships">
+  <p:cSld>
+    <p:bg>
+      <p:bgPr>
+        <a:solidFill>
+          <a:srgbClr val="FFFFFF"/>
+        </a:solidFill>
+        <a:effectLst/>
+      </p:bgPr>
+    </p:bg>
+    <p:spTree>
+      <p:nvGrpSpPr>
+        <p:cNvPr id="1" name=""/>
+        <p:cNvGrpSpPr/>
+        <p:nvPr/>
+      </p:nvGrpSpPr>
+      <p:grpSpPr/>
+      <p:sp>
+        <p:nvSpPr>
+          <p:cNvPr id="2" name="TextBox 1"/>
+          <p:cNvSpPr txBox="1"/>
+          <p:nvPr/>
+        </p:nvSpPr>
+        <p:spPr>
+          <a:xfrm>
+            <a:off x="548640" y="320040"/>
+            <a:ext cx="11094415" cy="274320"/>
+          </a:xfrm>
+          <a:prstGeom prst="rect">
+            <a:avLst/>
+          </a:prstGeom>
+          <a:noFill/>
+        </p:spPr>
+        <p:txBody>
+          <a:bodyPr wrap="square" anchor="t" lIns="0" rIns="0" tIns="0" bIns="0"/>
+          <a:lstStyle/>
+          <a:p>
+            <a:pPr algn="l"/>
+            <a:r>
+              <a:rPr sz="1100" b="1" i="0">
+                <a:solidFill>
+                  <a:srgbClr val="54595D"/>
+                </a:solidFill>
+                <a:latin typeface="Calibri"/>
+              </a:rPr>
+              <a:t>CORE COMPONENT  ·  Core Paper 2</a:t>
+            </a:r>
+          </a:p>
+        </p:txBody>
+      </p:sp>
+      <p:sp>
+        <p:nvSpPr>
+          <p:cNvPr id="3" name="TextBox 2"/>
+          <p:cNvSpPr txBox="1"/>
+          <p:nvPr/>
+        </p:nvSpPr>
+        <p:spPr>
+          <a:xfrm>
+            <a:off x="548640" y="566928"/>
+            <a:ext cx="11094415" cy="822960"/>
+          </a:xfrm>
+          <a:prstGeom prst="rect">
+            <a:avLst/>
+          </a:prstGeom>
+          <a:noFill/>
+        </p:spPr>
+        <p:txBody>
+          <a:bodyPr wrap="square" anchor="ctr" lIns="0" rIns="0" tIns="0" bIns="0"/>
+          <a:lstStyle/>
+          <a:p>
+            <a:pPr algn="l"/>
+            <a:r>
+              <a:rPr sz="3200" b="1" i="0">
+                <a:solidFill>
+                  <a:srgbClr val="03306E"/>
+                </a:solidFill>
+                <a:latin typeface="Cambria"/>
+              </a:rPr>
+              <a:t>Answers</a:t>
+            </a:r>
+          </a:p>
+        </p:txBody>
+      </p:sp>
+      <p:sp>
+        <p:nvSpPr>
+          <p:cNvPr id="4" name="TextBox 3"/>
+          <p:cNvSpPr txBox="1"/>
+          <p:nvPr/>
+        </p:nvSpPr>
+        <p:spPr>
+          <a:xfrm>
+            <a:off x="548640" y="6446520"/>
+            <a:ext cx="8229600" cy="274320"/>
+          </a:xfrm>
+          <a:prstGeom prst="rect">
+            <a:avLst/>
+          </a:prstGeom>
+          <a:noFill/>
+        </p:spPr>
+        <p:txBody>
+          <a:bodyPr wrap="square" anchor="t" lIns="0" rIns="0" tIns="0" bIns="0"/>
+          <a:lstStyle/>
+          <a:p>
+            <a:pPr algn="l"/>
+            <a:r>
+              <a:rPr sz="1000" b="0" i="0">
+                <a:solidFill>
+                  <a:srgbClr val="54595D"/>
+                </a:solidFill>
+                <a:latin typeface="Calibri"/>
+              </a:rPr>
+              <a:t>Digital Software Development T Level  ·  Security Threats and Vulnerabilities</a:t>
+            </a:r>
+          </a:p>
+        </p:txBody>
+      </p:sp>
+      <p:sp>
+        <p:nvSpPr>
+          <p:cNvPr id="5" name="TextBox 4"/>
+          <p:cNvSpPr txBox="1"/>
+          <p:nvPr/>
+        </p:nvSpPr>
+        <p:spPr>
+          <a:xfrm>
+            <a:off x="10728655" y="6446520"/>
+            <a:ext cx="914400" cy="274320"/>
+          </a:xfrm>
+          <a:prstGeom prst="rect">
+            <a:avLst/>
+          </a:prstGeom>
+          <a:noFill/>
+        </p:spPr>
+        <p:txBody>
+          <a:bodyPr wrap="square" anchor="t" lIns="0" rIns="0" tIns="0" bIns="0"/>
+          <a:lstStyle/>
+          <a:p>
+            <a:pPr algn="r"/>
+            <a:r>
+              <a:rPr sz="1000" b="0" i="0">
+                <a:solidFill>
+                  <a:srgbClr val="54595D"/>
+                </a:solidFill>
+                <a:latin typeface="Calibri"/>
+              </a:rPr>
+              <a:t>14</a:t>
+            </a:r>
+          </a:p>
+        </p:txBody>
+      </p:sp>
+      <p:sp>
+        <p:nvSpPr>
+          <p:cNvPr id="6" name="Oval 5"/>
+          <p:cNvSpPr/>
+          <p:nvPr/>
+        </p:nvSpPr>
+        <p:spPr>
+          <a:xfrm>
+            <a:off x="548640" y="1618488"/>
+            <a:ext cx="411480" cy="411480"/>
+          </a:xfrm>
+          <a:prstGeom prst="ellipse">
+            <a:avLst/>
+          </a:prstGeom>
+          <a:solidFill>
+            <a:srgbClr val="F2B705"/>
+          </a:solidFill>
+          <a:ln>
+            <a:noFill/>
+          </a:ln>
+          <a:effectLst/>
+        </p:spPr>
+        <p:style>
+          <a:lnRef idx="1">
+            <a:schemeClr val="accent1"/>
+          </a:lnRef>
+          <a:fillRef idx="3">
+            <a:schemeClr val="accent1"/>
+          </a:fillRef>
+          <a:effectRef idx="2">
+            <a:schemeClr val="accent1"/>
+          </a:effectRef>
+          <a:fontRef idx="minor">
+            <a:schemeClr val="lt1"/>
+          </a:fontRef>
+        </p:style>
+        <p:txBody>
+          <a:bodyPr rtlCol="0" anchor="ctr" lIns="0" rIns="0" tIns="0" bIns="0"/>
+          <a:lstStyle/>
+          <a:p>
+            <a:pPr algn="ctr"/>
+            <a:r>
+              <a:rPr sz="1400" b="1">
+                <a:solidFill>
+                  <a:srgbClr val="202122"/>
+                </a:solidFill>
+                <a:latin typeface="Calibri"/>
+              </a:rPr>
+              <a:t>1</a:t>
+            </a:r>
+          </a:p>
+        </p:txBody>
+      </p:sp>
+      <p:sp>
+        <p:nvSpPr>
+          <p:cNvPr id="7" name="TextBox 6"/>
+          <p:cNvSpPr txBox="1"/>
+          <p:nvPr/>
+        </p:nvSpPr>
+        <p:spPr>
+          <a:xfrm>
+            <a:off x="1234440" y="1600200"/>
+            <a:ext cx="10408615" cy="1030986"/>
+          </a:xfrm>
+          <a:prstGeom prst="rect">
+            <a:avLst/>
+          </a:prstGeom>
+          <a:noFill/>
+        </p:spPr>
+        <p:txBody>
+          <a:bodyPr wrap="square" anchor="t" lIns="0" rIns="0" tIns="0" bIns="0"/>
+          <a:lstStyle/>
+          <a:p>
+            <a:pPr algn="l"/>
+            <a:r>
+              <a:rPr sz="1800" b="0" i="0">
+                <a:solidFill>
+                  <a:srgbClr val="54595D"/>
+                </a:solidFill>
+                <a:latin typeface="Calibri"/>
+              </a:rPr>
+              <a:t>How do you prevent SQL injection?</a:t>
+            </a:r>
+          </a:p>
+          <a:p>
+            <a:r>
+              <a:rPr sz="1800" b="1">
+                <a:solidFill>
+                  <a:srgbClr val="03306E"/>
+                </a:solidFill>
+                <a:latin typeface="Calibri"/>
+              </a:rPr>
+              <a:t>Use parameterised queries instead of building SQL from user input.</a:t>
+            </a:r>
+          </a:p>
+        </p:txBody>
+      </p:sp>
+      <p:sp>
+        <p:nvSpPr>
+          <p:cNvPr id="8" name="Oval 7"/>
+          <p:cNvSpPr/>
+          <p:nvPr/>
+        </p:nvSpPr>
+        <p:spPr>
+          <a:xfrm>
+            <a:off x="548640" y="2814066"/>
+            <a:ext cx="411480" cy="411480"/>
+          </a:xfrm>
+          <a:prstGeom prst="ellipse">
+            <a:avLst/>
+          </a:prstGeom>
+          <a:solidFill>
+            <a:srgbClr val="F2B705"/>
+          </a:solidFill>
+          <a:ln>
+            <a:noFill/>
+          </a:ln>
+          <a:effectLst/>
+        </p:spPr>
+        <p:style>
+          <a:lnRef idx="1">
+            <a:schemeClr val="accent1"/>
+          </a:lnRef>
+          <a:fillRef idx="3">
+            <a:schemeClr val="accent1"/>
+          </a:fillRef>
+          <a:effectRef idx="2">
+            <a:schemeClr val="accent1"/>
+          </a:effectRef>
+          <a:fontRef idx="minor">
+            <a:schemeClr val="lt1"/>
+          </a:fontRef>
+        </p:style>
+        <p:txBody>
+          <a:bodyPr rtlCol="0" anchor="ctr" lIns="0" rIns="0" tIns="0" bIns="0"/>
+          <a:lstStyle/>
+          <a:p>
+            <a:pPr algn="ctr"/>
+            <a:r>
+              <a:rPr sz="1400" b="1">
+                <a:solidFill>
+                  <a:srgbClr val="202122"/>
+                </a:solidFill>
+                <a:latin typeface="Calibri"/>
+              </a:rPr>
+              <a:t>2</a:t>
+            </a:r>
+          </a:p>
+        </p:txBody>
+      </p:sp>
+      <p:sp>
+        <p:nvSpPr>
+          <p:cNvPr id="9" name="TextBox 8"/>
+          <p:cNvSpPr txBox="1"/>
+          <p:nvPr/>
+        </p:nvSpPr>
+        <p:spPr>
+          <a:xfrm>
+            <a:off x="1234440" y="2795778"/>
+            <a:ext cx="10408615" cy="1030986"/>
+          </a:xfrm>
+          <a:prstGeom prst="rect">
+            <a:avLst/>
+          </a:prstGeom>
+          <a:noFill/>
+        </p:spPr>
+        <p:txBody>
+          <a:bodyPr wrap="square" anchor="t" lIns="0" rIns="0" tIns="0" bIns="0"/>
+          <a:lstStyle/>
+          <a:p>
+            <a:pPr algn="l"/>
+            <a:r>
+              <a:rPr sz="1800" b="0" i="0">
+                <a:solidFill>
+                  <a:srgbClr val="54595D"/>
+                </a:solidFill>
+                <a:latin typeface="Calibri"/>
+              </a:rPr>
+              <a:t>What is spear phishing?</a:t>
+            </a:r>
+          </a:p>
+          <a:p>
+            <a:r>
+              <a:rPr sz="1800" b="1">
+                <a:solidFill>
+                  <a:srgbClr val="03306E"/>
+                </a:solidFill>
+                <a:latin typeface="Calibri"/>
+              </a:rPr>
+              <a:t>A phishing attack targeted at a specific person or organisation.</a:t>
+            </a:r>
+          </a:p>
+        </p:txBody>
+      </p:sp>
+      <p:sp>
+        <p:nvSpPr>
+          <p:cNvPr id="10" name="Oval 9"/>
+          <p:cNvSpPr/>
+          <p:nvPr/>
+        </p:nvSpPr>
+        <p:spPr>
+          <a:xfrm>
+            <a:off x="548640" y="4009644"/>
+            <a:ext cx="411480" cy="411480"/>
+          </a:xfrm>
+          <a:prstGeom prst="ellipse">
+            <a:avLst/>
+          </a:prstGeom>
+          <a:solidFill>
+            <a:srgbClr val="F2B705"/>
+          </a:solidFill>
+          <a:ln>
+            <a:noFill/>
+          </a:ln>
+          <a:effectLst/>
+        </p:spPr>
+        <p:style>
+          <a:lnRef idx="1">
+            <a:schemeClr val="accent1"/>
+          </a:lnRef>
+          <a:fillRef idx="3">
+            <a:schemeClr val="accent1"/>
+          </a:fillRef>
+          <a:effectRef idx="2">
+            <a:schemeClr val="accent1"/>
+          </a:effectRef>
+          <a:fontRef idx="minor">
+            <a:schemeClr val="lt1"/>
+          </a:fontRef>
+        </p:style>
+        <p:txBody>
+          <a:bodyPr rtlCol="0" anchor="ctr" lIns="0" rIns="0" tIns="0" bIns="0"/>
+          <a:lstStyle/>
+          <a:p>
+            <a:pPr algn="ctr"/>
+            <a:r>
+              <a:rPr sz="1400" b="1">
+                <a:solidFill>
+                  <a:srgbClr val="202122"/>
+                </a:solidFill>
+                <a:latin typeface="Calibri"/>
+              </a:rPr>
+              <a:t>3</a:t>
+            </a:r>
+          </a:p>
+        </p:txBody>
+      </p:sp>
+      <p:sp>
+        <p:nvSpPr>
+          <p:cNvPr id="11" name="TextBox 10"/>
+          <p:cNvSpPr txBox="1"/>
+          <p:nvPr/>
+        </p:nvSpPr>
+        <p:spPr>
+          <a:xfrm>
+            <a:off x="1234440" y="3991356"/>
+            <a:ext cx="10408615" cy="1030986"/>
+          </a:xfrm>
+          <a:prstGeom prst="rect">
+            <a:avLst/>
+          </a:prstGeom>
+          <a:noFill/>
+        </p:spPr>
+        <p:txBody>
+          <a:bodyPr wrap="square" anchor="t" lIns="0" rIns="0" tIns="0" bIns="0"/>
+          <a:lstStyle/>
+          <a:p>
+            <a:pPr algn="l"/>
+            <a:r>
+              <a:rPr sz="1800" b="0" i="0">
+                <a:solidFill>
+                  <a:srgbClr val="54595D"/>
+                </a:solidFill>
+                <a:latin typeface="Calibri"/>
+              </a:rPr>
+              <a:t>What makes an API insecure?</a:t>
+            </a:r>
+          </a:p>
+          <a:p>
+            <a:r>
+              <a:rPr sz="1800" b="1">
+                <a:solidFill>
+                  <a:srgbClr val="03306E"/>
+                </a:solidFill>
+                <a:latin typeface="Calibri"/>
+              </a:rPr>
+              <a:t>Weak or no authentication or input validation.</a:t>
+            </a:r>
+          </a:p>
+        </p:txBody>
+      </p:sp>
+      <p:sp>
+        <p:nvSpPr>
+          <p:cNvPr id="12" name="Oval 11"/>
+          <p:cNvSpPr/>
+          <p:nvPr/>
+        </p:nvSpPr>
+        <p:spPr>
+          <a:xfrm>
+            <a:off x="548640" y="5205221"/>
+            <a:ext cx="411480" cy="411480"/>
+          </a:xfrm>
+          <a:prstGeom prst="ellipse">
+            <a:avLst/>
+          </a:prstGeom>
+          <a:solidFill>
+            <a:srgbClr val="F2B705"/>
+          </a:solidFill>
+          <a:ln>
+            <a:noFill/>
+          </a:ln>
+          <a:effectLst/>
+        </p:spPr>
+        <p:style>
+          <a:lnRef idx="1">
+            <a:schemeClr val="accent1"/>
+          </a:lnRef>
+          <a:fillRef idx="3">
+            <a:schemeClr val="accent1"/>
+          </a:fillRef>
+          <a:effectRef idx="2">
+            <a:schemeClr val="accent1"/>
+          </a:effectRef>
+          <a:fontRef idx="minor">
+            <a:schemeClr val="lt1"/>
+          </a:fontRef>
+        </p:style>
+        <p:txBody>
+          <a:bodyPr rtlCol="0" anchor="ctr" lIns="0" rIns="0" tIns="0" bIns="0"/>
+          <a:lstStyle/>
+          <a:p>
+            <a:pPr algn="ctr"/>
+            <a:r>
+              <a:rPr sz="1400" b="1">
+                <a:solidFill>
+                  <a:srgbClr val="202122"/>
+                </a:solidFill>
+                <a:latin typeface="Calibri"/>
+              </a:rPr>
+              <a:t>4</a:t>
+            </a:r>
+          </a:p>
+        </p:txBody>
+      </p:sp>
+      <p:sp>
+        <p:nvSpPr>
+          <p:cNvPr id="13" name="TextBox 12"/>
+          <p:cNvSpPr txBox="1"/>
+          <p:nvPr/>
+        </p:nvSpPr>
+        <p:spPr>
+          <a:xfrm>
+            <a:off x="1234440" y="5186933"/>
+            <a:ext cx="10408615" cy="1030986"/>
+          </a:xfrm>
+          <a:prstGeom prst="rect">
+            <a:avLst/>
+          </a:prstGeom>
+          <a:noFill/>
+        </p:spPr>
+        <p:txBody>
+          <a:bodyPr wrap="square" anchor="t" lIns="0" rIns="0" tIns="0" bIns="0"/>
+          <a:lstStyle/>
+          <a:p>
+            <a:pPr algn="l"/>
+            <a:r>
+              <a:rPr sz="1800" b="0" i="0">
+                <a:solidFill>
+                  <a:srgbClr val="54595D"/>
+                </a:solidFill>
+                <a:latin typeface="Calibri"/>
+              </a:rPr>
+              <a:t>What is a zero-day?</a:t>
+            </a:r>
+          </a:p>
+          <a:p>
+            <a:r>
+              <a:rPr sz="1800" b="1">
+                <a:solidFill>
+                  <a:srgbClr val="03306E"/>
+                </a:solidFill>
+                <a:latin typeface="Calibri"/>
+              </a:rPr>
+              <a:t>A flaw exploited before a patch exists.</a:t>
+            </a:r>
+          </a:p>
+        </p:txBody>
+      </p:sp>
+    </p:spTree>
+  </p:cSld>
+  <p:clrMapOvr>
+    <a:masterClrMapping/>
+  </p:clrMapOvr>
+</p:sld>
+</file>
+
+<file path=ppt/slides/slide15.xml><?xml version="1.0" encoding="utf-8"?>
+<p:sld xmlns:a="http://schemas.openxmlformats.org/drawingml/2006/main" xmlns:p="http://schemas.openxmlformats.org/presentationml/2006/main" xmlns:r="http://schemas.openxmlformats.org/officeDocument/2006/relationships">
+  <p:cSld>
+    <p:bg>
+      <p:bgPr>
+        <a:solidFill>
+          <a:srgbClr val="FFFFFF"/>
+        </a:solidFill>
+        <a:effectLst/>
+      </p:bgPr>
+    </p:bg>
+    <p:spTree>
+      <p:nvGrpSpPr>
+        <p:cNvPr id="1" name=""/>
+        <p:cNvGrpSpPr/>
+        <p:nvPr/>
+      </p:nvGrpSpPr>
+      <p:grpSpPr/>
+      <p:sp>
+        <p:nvSpPr>
+          <p:cNvPr id="2" name="TextBox 1"/>
+          <p:cNvSpPr txBox="1"/>
+          <p:nvPr/>
+        </p:nvSpPr>
+        <p:spPr>
+          <a:xfrm>
+            <a:off x="548640" y="320040"/>
+            <a:ext cx="11094415" cy="274320"/>
+          </a:xfrm>
+          <a:prstGeom prst="rect">
+            <a:avLst/>
+          </a:prstGeom>
+          <a:noFill/>
+        </p:spPr>
+        <p:txBody>
+          <a:bodyPr wrap="square" anchor="t" lIns="0" rIns="0" tIns="0" bIns="0"/>
+          <a:lstStyle/>
+          <a:p>
+            <a:pPr algn="l"/>
+            <a:r>
+              <a:rPr sz="1100" b="1" i="0">
+                <a:solidFill>
+                  <a:srgbClr val="54595D"/>
+                </a:solidFill>
+                <a:latin typeface="Calibri"/>
+              </a:rPr>
+              <a:t>CORE COMPONENT  ·  Core Paper 2</a:t>
+            </a:r>
+          </a:p>
+        </p:txBody>
+      </p:sp>
+      <p:sp>
+        <p:nvSpPr>
+          <p:cNvPr id="3" name="TextBox 2"/>
+          <p:cNvSpPr txBox="1"/>
+          <p:nvPr/>
+        </p:nvSpPr>
+        <p:spPr>
+          <a:xfrm>
+            <a:off x="548640" y="566928"/>
+            <a:ext cx="11094415" cy="822960"/>
+          </a:xfrm>
+          <a:prstGeom prst="rect">
+            <a:avLst/>
+          </a:prstGeom>
+          <a:noFill/>
+        </p:spPr>
+        <p:txBody>
+          <a:bodyPr wrap="square" anchor="ctr" lIns="0" rIns="0" tIns="0" bIns="0"/>
+          <a:lstStyle/>
+          <a:p>
+            <a:pPr algn="l"/>
+            <a:r>
+              <a:rPr sz="3200" b="1" i="0">
+                <a:solidFill>
+                  <a:srgbClr val="03306E"/>
+                </a:solidFill>
+                <a:latin typeface="Cambria"/>
+              </a:rPr>
+              <a:t>Activity: Secure the login</a:t>
+            </a:r>
+          </a:p>
+        </p:txBody>
+      </p:sp>
+      <p:sp>
+        <p:nvSpPr>
+          <p:cNvPr id="4" name="TextBox 3"/>
+          <p:cNvSpPr txBox="1"/>
+          <p:nvPr/>
+        </p:nvSpPr>
+        <p:spPr>
+          <a:xfrm>
+            <a:off x="548640" y="6446520"/>
+            <a:ext cx="8229600" cy="274320"/>
+          </a:xfrm>
+          <a:prstGeom prst="rect">
+            <a:avLst/>
+          </a:prstGeom>
+          <a:noFill/>
+        </p:spPr>
+        <p:txBody>
+          <a:bodyPr wrap="square" anchor="t" lIns="0" rIns="0" tIns="0" bIns="0"/>
+          <a:lstStyle/>
+          <a:p>
+            <a:pPr algn="l"/>
+            <a:r>
+              <a:rPr sz="1000" b="0" i="0">
+                <a:solidFill>
+                  <a:srgbClr val="54595D"/>
+                </a:solidFill>
+                <a:latin typeface="Calibri"/>
+              </a:rPr>
+              <a:t>Digital Software Development T Level  ·  Security Threats and Vulnerabilities</a:t>
+            </a:r>
+          </a:p>
+        </p:txBody>
+      </p:sp>
+      <p:sp>
+        <p:nvSpPr>
+          <p:cNvPr id="5" name="TextBox 4"/>
+          <p:cNvSpPr txBox="1"/>
+          <p:nvPr/>
+        </p:nvSpPr>
+        <p:spPr>
+          <a:xfrm>
+            <a:off x="10728655" y="6446520"/>
+            <a:ext cx="914400" cy="274320"/>
+          </a:xfrm>
+          <a:prstGeom prst="rect">
+            <a:avLst/>
+          </a:prstGeom>
+          <a:noFill/>
+        </p:spPr>
+        <p:txBody>
+          <a:bodyPr wrap="square" anchor="t" lIns="0" rIns="0" tIns="0" bIns="0"/>
+          <a:lstStyle/>
+          <a:p>
+            <a:pPr algn="r"/>
+            <a:r>
+              <a:rPr sz="1000" b="0" i="0">
+                <a:solidFill>
+                  <a:srgbClr val="54595D"/>
+                </a:solidFill>
+                <a:latin typeface="Calibri"/>
+              </a:rPr>
+              <a:t>15</a:t>
+            </a:r>
+          </a:p>
+        </p:txBody>
+      </p:sp>
+      <p:sp>
+        <p:nvSpPr>
+          <p:cNvPr id="6" name="Rounded Rectangle 5"/>
+          <p:cNvSpPr/>
+          <p:nvPr/>
+        </p:nvSpPr>
+        <p:spPr>
+          <a:xfrm>
+            <a:off x="548640" y="1508760"/>
+            <a:ext cx="2011680" cy="457200"/>
+          </a:xfrm>
+          <a:prstGeom prst="roundRect">
+            <a:avLst>
+              <a:gd name="adj" fmla="val 50000"/>
+            </a:avLst>
+          </a:prstGeom>
+          <a:solidFill>
+            <a:srgbClr val="F2B705"/>
+          </a:solidFill>
+          <a:ln>
+            <a:noFill/>
+          </a:ln>
+          <a:effectLst/>
+        </p:spPr>
+        <p:style>
+          <a:lnRef idx="1">
+            <a:schemeClr val="accent1"/>
+          </a:lnRef>
+          <a:fillRef idx="3">
+            <a:schemeClr val="accent1"/>
+          </a:fillRef>
+          <a:effectRef idx="2">
+            <a:schemeClr val="accent1"/>
+          </a:effectRef>
+          <a:fontRef idx="minor">
+            <a:schemeClr val="lt1"/>
+          </a:fontRef>
+        </p:style>
+        <p:txBody>
+          <a:bodyPr rtlCol="0" anchor="ctr"/>
+          <a:lstStyle/>
+          <a:p/>
+        </p:txBody>
+      </p:sp>
+      <p:sp>
+        <p:nvSpPr>
+          <p:cNvPr id="7" name="TextBox 6"/>
+          <p:cNvSpPr txBox="1"/>
+          <p:nvPr/>
+        </p:nvSpPr>
+        <p:spPr>
+          <a:xfrm>
+            <a:off x="548640" y="1508760"/>
+            <a:ext cx="2011680" cy="457200"/>
+          </a:xfrm>
+          <a:prstGeom prst="rect">
+            <a:avLst/>
+          </a:prstGeom>
+          <a:noFill/>
+        </p:spPr>
+        <p:txBody>
+          <a:bodyPr wrap="square" anchor="ctr" lIns="0" rIns="0" tIns="0" bIns="0"/>
+          <a:lstStyle/>
+          <a:p>
+            <a:pPr algn="ctr"/>
+            <a:r>
+              <a:rPr sz="1400" b="1" i="0">
+                <a:solidFill>
+                  <a:srgbClr val="202122"/>
+                </a:solidFill>
+                <a:latin typeface="Calibri"/>
+              </a:rPr>
+              <a:t>30 minutes</a:t>
+            </a:r>
+          </a:p>
+        </p:txBody>
+      </p:sp>
+      <p:sp>
+        <p:nvSpPr>
+          <p:cNvPr id="8" name="TextBox 7"/>
+          <p:cNvSpPr txBox="1"/>
+          <p:nvPr/>
+        </p:nvSpPr>
+        <p:spPr>
+          <a:xfrm>
+            <a:off x="2743200" y="1508760"/>
+            <a:ext cx="4754880" cy="457200"/>
+          </a:xfrm>
+          <a:prstGeom prst="rect">
+            <a:avLst/>
+          </a:prstGeom>
+          <a:noFill/>
+        </p:spPr>
+        <p:txBody>
+          <a:bodyPr wrap="square" anchor="ctr" lIns="0" rIns="0" tIns="0" bIns="0"/>
+          <a:lstStyle/>
+          <a:p>
+            <a:pPr algn="l"/>
+            <a:r>
+              <a:rPr sz="1400" b="0" i="1">
+                <a:solidFill>
+                  <a:srgbClr val="54595D"/>
+                </a:solidFill>
+                <a:latin typeface="Calibri"/>
+              </a:rPr>
+              <a:t>Pairs</a:t>
+            </a:r>
+          </a:p>
+        </p:txBody>
+      </p:sp>
+      <p:sp>
+        <p:nvSpPr>
+          <p:cNvPr id="9" name="Oval 8"/>
+          <p:cNvSpPr/>
+          <p:nvPr/>
+        </p:nvSpPr>
+        <p:spPr>
+          <a:xfrm>
+            <a:off x="548640" y="2482596"/>
+            <a:ext cx="384048" cy="384048"/>
+          </a:xfrm>
+          <a:prstGeom prst="ellipse">
+            <a:avLst/>
+          </a:prstGeom>
+          <a:solidFill>
+            <a:srgbClr val="0645AD"/>
+          </a:solidFill>
+          <a:ln>
+            <a:noFill/>
+          </a:ln>
+          <a:effectLst/>
+        </p:spPr>
+        <p:style>
+          <a:lnRef idx="1">
+            <a:schemeClr val="accent1"/>
+          </a:lnRef>
+          <a:fillRef idx="3">
+            <a:schemeClr val="accent1"/>
+          </a:fillRef>
+          <a:effectRef idx="2">
+            <a:schemeClr val="accent1"/>
+          </a:effectRef>
+          <a:fontRef idx="minor">
+            <a:schemeClr val="lt1"/>
+          </a:fontRef>
+        </p:style>
+        <p:txBody>
+          <a:bodyPr rtlCol="0" anchor="ctr" lIns="0" rIns="0" tIns="0" bIns="0"/>
+          <a:lstStyle/>
+          <a:p>
+            <a:pPr algn="ctr"/>
+            <a:r>
+              <a:rPr sz="1300" b="1">
+                <a:solidFill>
+                  <a:srgbClr val="FFFFFF"/>
+                </a:solidFill>
+                <a:latin typeface="Calibri"/>
+              </a:rPr>
+              <a:t>1</a:t>
+            </a:r>
+          </a:p>
+        </p:txBody>
+      </p:sp>
+      <p:sp>
+        <p:nvSpPr>
+          <p:cNvPr id="10" name="TextBox 9"/>
+          <p:cNvSpPr txBox="1"/>
+          <p:nvPr/>
+        </p:nvSpPr>
+        <p:spPr>
+          <a:xfrm>
+            <a:off x="1143000" y="2240280"/>
+            <a:ext cx="5943600" cy="868680"/>
+          </a:xfrm>
+          <a:prstGeom prst="rect">
+            <a:avLst/>
+          </a:prstGeom>
+          <a:noFill/>
+        </p:spPr>
+        <p:txBody>
+          <a:bodyPr wrap="square" anchor="ctr" lIns="0" rIns="0" tIns="0" bIns="0"/>
+          <a:lstStyle/>
+          <a:p>
+            <a:pPr algn="l"/>
+            <a:r>
+              <a:rPr sz="1700" b="0" i="0">
+                <a:solidFill>
+                  <a:srgbClr val="202122"/>
+                </a:solidFill>
+                <a:latin typeface="Calibri"/>
+              </a:rPr>
+              <a:t>Review the vulnerable login code from your teacher.</a:t>
+            </a:r>
+          </a:p>
+        </p:txBody>
+      </p:sp>
+      <p:sp>
+        <p:nvSpPr>
+          <p:cNvPr id="11" name="Oval 10"/>
+          <p:cNvSpPr/>
+          <p:nvPr/>
+        </p:nvSpPr>
+        <p:spPr>
+          <a:xfrm>
+            <a:off x="548640" y="3461004"/>
+            <a:ext cx="384048" cy="384048"/>
+          </a:xfrm>
+          <a:prstGeom prst="ellipse">
+            <a:avLst/>
+          </a:prstGeom>
+          <a:solidFill>
+            <a:srgbClr val="0645AD"/>
+          </a:solidFill>
+          <a:ln>
+            <a:noFill/>
+          </a:ln>
+          <a:effectLst/>
+        </p:spPr>
+        <p:style>
+          <a:lnRef idx="1">
+            <a:schemeClr val="accent1"/>
+          </a:lnRef>
+          <a:fillRef idx="3">
+            <a:schemeClr val="accent1"/>
+          </a:fillRef>
+          <a:effectRef idx="2">
+            <a:schemeClr val="accent1"/>
+          </a:effectRef>
+          <a:fontRef idx="minor">
+            <a:schemeClr val="lt1"/>
+          </a:fontRef>
+        </p:style>
+        <p:txBody>
+          <a:bodyPr rtlCol="0" anchor="ctr" lIns="0" rIns="0" tIns="0" bIns="0"/>
+          <a:lstStyle/>
+          <a:p>
+            <a:pPr algn="ctr"/>
+            <a:r>
+              <a:rPr sz="1300" b="1">
+                <a:solidFill>
+                  <a:srgbClr val="FFFFFF"/>
+                </a:solidFill>
+                <a:latin typeface="Calibri"/>
+              </a:rPr>
+              <a:t>2</a:t>
+            </a:r>
+          </a:p>
+        </p:txBody>
+      </p:sp>
+      <p:sp>
+        <p:nvSpPr>
+          <p:cNvPr id="12" name="TextBox 11"/>
+          <p:cNvSpPr txBox="1"/>
+          <p:nvPr/>
+        </p:nvSpPr>
+        <p:spPr>
+          <a:xfrm>
+            <a:off x="1143000" y="3218688"/>
+            <a:ext cx="5943600" cy="868680"/>
+          </a:xfrm>
+          <a:prstGeom prst="rect">
+            <a:avLst/>
+          </a:prstGeom>
+          <a:noFill/>
+        </p:spPr>
+        <p:txBody>
+          <a:bodyPr wrap="square" anchor="ctr" lIns="0" rIns="0" tIns="0" bIns="0"/>
+          <a:lstStyle/>
+          <a:p>
+            <a:pPr algn="l"/>
+            <a:r>
+              <a:rPr sz="1700" b="0" i="0">
+                <a:solidFill>
+                  <a:srgbClr val="202122"/>
+                </a:solidFill>
+                <a:latin typeface="Calibri"/>
+              </a:rPr>
+              <a:t>Identify every security weakness.</a:t>
+            </a:r>
+          </a:p>
+        </p:txBody>
+      </p:sp>
+      <p:sp>
+        <p:nvSpPr>
+          <p:cNvPr id="13" name="Oval 12"/>
+          <p:cNvSpPr/>
+          <p:nvPr/>
+        </p:nvSpPr>
+        <p:spPr>
+          <a:xfrm>
+            <a:off x="548640" y="4439412"/>
+            <a:ext cx="384048" cy="384048"/>
+          </a:xfrm>
+          <a:prstGeom prst="ellipse">
+            <a:avLst/>
+          </a:prstGeom>
+          <a:solidFill>
+            <a:srgbClr val="0645AD"/>
+          </a:solidFill>
+          <a:ln>
+            <a:noFill/>
+          </a:ln>
+          <a:effectLst/>
+        </p:spPr>
+        <p:style>
+          <a:lnRef idx="1">
+            <a:schemeClr val="accent1"/>
+          </a:lnRef>
+          <a:fillRef idx="3">
+            <a:schemeClr val="accent1"/>
+          </a:fillRef>
+          <a:effectRef idx="2">
+            <a:schemeClr val="accent1"/>
+          </a:effectRef>
+          <a:fontRef idx="minor">
+            <a:schemeClr val="lt1"/>
+          </a:fontRef>
+        </p:style>
+        <p:txBody>
+          <a:bodyPr rtlCol="0" anchor="ctr" lIns="0" rIns="0" tIns="0" bIns="0"/>
+          <a:lstStyle/>
+          <a:p>
+            <a:pPr algn="ctr"/>
+            <a:r>
+              <a:rPr sz="1300" b="1">
+                <a:solidFill>
+                  <a:srgbClr val="FFFFFF"/>
+                </a:solidFill>
+                <a:latin typeface="Calibri"/>
+              </a:rPr>
+              <a:t>3</a:t>
+            </a:r>
+          </a:p>
+        </p:txBody>
+      </p:sp>
+      <p:sp>
+        <p:nvSpPr>
+          <p:cNvPr id="14" name="TextBox 13"/>
+          <p:cNvSpPr txBox="1"/>
+          <p:nvPr/>
+        </p:nvSpPr>
+        <p:spPr>
+          <a:xfrm>
+            <a:off x="1143000" y="4197096"/>
+            <a:ext cx="5943600" cy="868680"/>
+          </a:xfrm>
+          <a:prstGeom prst="rect">
+            <a:avLst/>
+          </a:prstGeom>
+          <a:noFill/>
+        </p:spPr>
+        <p:txBody>
+          <a:bodyPr wrap="square" anchor="ctr" lIns="0" rIns="0" tIns="0" bIns="0"/>
+          <a:lstStyle/>
+          <a:p>
+            <a:pPr algn="l"/>
+            <a:r>
+              <a:rPr sz="1700" b="0" i="0">
+                <a:solidFill>
+                  <a:srgbClr val="202122"/>
+                </a:solidFill>
+                <a:latin typeface="Calibri"/>
+              </a:rPr>
+              <a:t>Rewrite it using parameterised queries, hashing and lockout.</a:t>
+            </a:r>
+          </a:p>
+        </p:txBody>
+      </p:sp>
+      <p:sp>
+        <p:nvSpPr>
+          <p:cNvPr id="15" name="Oval 14"/>
+          <p:cNvSpPr/>
+          <p:nvPr/>
+        </p:nvSpPr>
+        <p:spPr>
+          <a:xfrm>
+            <a:off x="548640" y="5417820"/>
+            <a:ext cx="384048" cy="384048"/>
+          </a:xfrm>
+          <a:prstGeom prst="ellipse">
+            <a:avLst/>
+          </a:prstGeom>
+          <a:solidFill>
+            <a:srgbClr val="0645AD"/>
+          </a:solidFill>
+          <a:ln>
+            <a:noFill/>
+          </a:ln>
+          <a:effectLst/>
+        </p:spPr>
+        <p:style>
+          <a:lnRef idx="1">
+            <a:schemeClr val="accent1"/>
+          </a:lnRef>
+          <a:fillRef idx="3">
+            <a:schemeClr val="accent1"/>
+          </a:fillRef>
+          <a:effectRef idx="2">
+            <a:schemeClr val="accent1"/>
+          </a:effectRef>
+          <a:fontRef idx="minor">
+            <a:schemeClr val="lt1"/>
+          </a:fontRef>
+        </p:style>
+        <p:txBody>
+          <a:bodyPr rtlCol="0" anchor="ctr" lIns="0" rIns="0" tIns="0" bIns="0"/>
+          <a:lstStyle/>
+          <a:p>
+            <a:pPr algn="ctr"/>
+            <a:r>
+              <a:rPr sz="1300" b="1">
+                <a:solidFill>
+                  <a:srgbClr val="FFFFFF"/>
+                </a:solidFill>
+                <a:latin typeface="Calibri"/>
+              </a:rPr>
+              <a:t>4</a:t>
+            </a:r>
+          </a:p>
+        </p:txBody>
+      </p:sp>
+      <p:sp>
+        <p:nvSpPr>
+          <p:cNvPr id="16" name="TextBox 15"/>
+          <p:cNvSpPr txBox="1"/>
+          <p:nvPr/>
+        </p:nvSpPr>
+        <p:spPr>
+          <a:xfrm>
+            <a:off x="1143000" y="5175504"/>
+            <a:ext cx="5943600" cy="868680"/>
+          </a:xfrm>
+          <a:prstGeom prst="rect">
+            <a:avLst/>
+          </a:prstGeom>
+          <a:noFill/>
+        </p:spPr>
+        <p:txBody>
+          <a:bodyPr wrap="square" anchor="ctr" lIns="0" rIns="0" tIns="0" bIns="0"/>
+          <a:lstStyle/>
+          <a:p>
+            <a:pPr algn="l"/>
+            <a:r>
+              <a:rPr sz="1700" b="0" i="0">
+                <a:solidFill>
+                  <a:srgbClr val="202122"/>
+                </a:solidFill>
+                <a:latin typeface="Calibri"/>
+              </a:rPr>
+              <a:t>Explain each fix in one sentence.</a:t>
+            </a:r>
+          </a:p>
+        </p:txBody>
+      </p:sp>
+      <p:sp>
+        <p:nvSpPr>
+          <p:cNvPr id="17" name="Rounded Rectangle 16"/>
+          <p:cNvSpPr/>
+          <p:nvPr/>
+        </p:nvSpPr>
+        <p:spPr>
+          <a:xfrm>
+            <a:off x="7772400" y="1508760"/>
+            <a:ext cx="3867912" cy="4572000"/>
+          </a:xfrm>
+          <a:prstGeom prst="roundRect">
+            <a:avLst>
+              <a:gd name="adj" fmla="val 8000"/>
+            </a:avLst>
+          </a:prstGeom>
+          <a:solidFill>
+            <a:srgbClr val="EAF3FF"/>
+          </a:solidFill>
+          <a:ln>
+            <a:noFill/>
+          </a:ln>
+          <a:effectLst/>
+        </p:spPr>
+        <p:style>
+          <a:lnRef idx="1">
+            <a:schemeClr val="accent1"/>
+          </a:lnRef>
+          <a:fillRef idx="3">
+            <a:schemeClr val="accent1"/>
+          </a:fillRef>
+          <a:effectRef idx="2">
+            <a:schemeClr val="accent1"/>
+          </a:effectRef>
+          <a:fontRef idx="minor">
+            <a:schemeClr val="lt1"/>
+          </a:fontRef>
+        </p:style>
+        <p:txBody>
+          <a:bodyPr rtlCol="0" anchor="ctr"/>
+          <a:lstStyle/>
+          <a:p/>
+        </p:txBody>
+      </p:sp>
+      <p:sp>
+        <p:nvSpPr>
+          <p:cNvPr id="18" name="TextBox 17"/>
+          <p:cNvSpPr txBox="1"/>
+          <p:nvPr/>
+        </p:nvSpPr>
+        <p:spPr>
+          <a:xfrm>
+            <a:off x="8046720" y="1737360"/>
+            <a:ext cx="3291840" cy="365760"/>
+          </a:xfrm>
+          <a:prstGeom prst="rect">
+            <a:avLst/>
+          </a:prstGeom>
+          <a:noFill/>
+        </p:spPr>
+        <p:txBody>
+          <a:bodyPr wrap="square" anchor="t" lIns="0" rIns="0" tIns="0" bIns="0"/>
+          <a:lstStyle/>
+          <a:p>
+            <a:pPr algn="l"/>
+            <a:r>
+              <a:rPr sz="1300" b="1" i="0">
+                <a:solidFill>
+                  <a:srgbClr val="0645AD"/>
+                </a:solidFill>
+                <a:latin typeface="Calibri"/>
+              </a:rPr>
+              <a:t>SUCCESS CRITERIA</a:t>
+            </a:r>
+          </a:p>
+        </p:txBody>
+      </p:sp>
+      <p:sp>
+        <p:nvSpPr>
+          <p:cNvPr id="19" name="TextBox 18"/>
+          <p:cNvSpPr txBox="1"/>
+          <p:nvPr/>
+        </p:nvSpPr>
+        <p:spPr>
+          <a:xfrm>
+            <a:off x="8046720" y="2240280"/>
+            <a:ext cx="3337560" cy="3657600"/>
+          </a:xfrm>
+          <a:prstGeom prst="rect">
+            <a:avLst/>
+          </a:prstGeom>
+          <a:noFill/>
+        </p:spPr>
+        <p:txBody>
+          <a:bodyPr wrap="square" lIns="0" rIns="0" tIns="0" bIns="0">
+            <a:spAutoFit/>
+          </a:bodyPr>
+          <a:lstStyle/>
+          <a:p>
+            <a:pPr marL="274320" indent="-274320">
+              <a:spcAft>
+                <a:spcPts val="810"/>
+              </a:spcAft>
+              <a:buClr>
+                <a:srgbClr val="0645AD"/>
+              </a:buClr>
+              <a:buFont typeface="Arial"/>
+              <a:buChar char="•"/>
+            </a:pPr>
+            <a:r>
+              <a:rPr sz="1800" b="0">
+                <a:solidFill>
+                  <a:srgbClr val="202122"/>
+                </a:solidFill>
+                <a:latin typeface="Calibri"/>
+              </a:rPr>
+              <a:t>SQL injection fixed</a:t>
+            </a:r>
+          </a:p>
+          <a:p>
+            <a:pPr marL="274320" indent="-274320">
+              <a:spcAft>
+                <a:spcPts val="810"/>
+              </a:spcAft>
+              <a:buClr>
+                <a:srgbClr val="0645AD"/>
+              </a:buClr>
+              <a:buFont typeface="Arial"/>
+              <a:buChar char="•"/>
+            </a:pPr>
+            <a:r>
+              <a:rPr sz="1800" b="0">
+                <a:solidFill>
+                  <a:srgbClr val="202122"/>
+                </a:solidFill>
+                <a:latin typeface="Calibri"/>
+              </a:rPr>
+              <a:t>Passwords never stored in plain text</a:t>
+            </a:r>
+          </a:p>
+          <a:p>
+            <a:pPr marL="274320" indent="-274320">
+              <a:spcAft>
+                <a:spcPts val="810"/>
+              </a:spcAft>
+              <a:buClr>
+                <a:srgbClr val="0645AD"/>
+              </a:buClr>
+              <a:buFont typeface="Arial"/>
+              <a:buChar char="•"/>
+            </a:pPr>
+            <a:r>
+              <a:rPr sz="1800" b="0">
+                <a:solidFill>
+                  <a:srgbClr val="202122"/>
+                </a:solidFill>
+                <a:latin typeface="Calibri"/>
+              </a:rPr>
+              <a:t>Lockout after repeated failures</a:t>
+            </a:r>
+          </a:p>
+        </p:txBody>
+      </p:sp>
+    </p:spTree>
+  </p:cSld>
+  <p:clrMapOvr>
+    <a:masterClrMapping/>
+  </p:clrMapOvr>
+</p:sld>
+</file>
+
+<file path=ppt/slides/slide16.xml><?xml version="1.0" encoding="utf-8"?>
+<p:sld xmlns:a="http://schemas.openxmlformats.org/drawingml/2006/main" xmlns:p="http://schemas.openxmlformats.org/presentationml/2006/main" xmlns:r="http://schemas.openxmlformats.org/officeDocument/2006/relationships">
+  <p:cSld>
+    <p:bg>
+      <p:bgPr>
+        <a:solidFill>
           <a:srgbClr val="03306E"/>
         </a:solidFill>
         <a:effectLst/>
@@ -5989,22 +9564,102 @@
       </p:sp>
       <p:sp>
         <p:nvSpPr>
-          <p:cNvPr id="6" name="Rounded Rectangle 5"/>
+          <p:cNvPr id="6" name="TextBox 5"/>
+          <p:cNvSpPr txBox="1"/>
+          <p:nvPr/>
+        </p:nvSpPr>
+        <p:spPr>
+          <a:xfrm>
+            <a:off x="548640" y="1554480"/>
+            <a:ext cx="6720840" cy="4617720"/>
+          </a:xfrm>
+          <a:prstGeom prst="rect">
+            <a:avLst/>
+          </a:prstGeom>
+          <a:noFill/>
+        </p:spPr>
+        <p:txBody>
+          <a:bodyPr wrap="square" lIns="0" rIns="0" tIns="0" bIns="0">
+            <a:spAutoFit/>
+          </a:bodyPr>
+          <a:lstStyle/>
+          <a:p>
+            <a:pPr>
+              <a:spcAft>
+                <a:spcPts val="1320"/>
+              </a:spcAft>
+            </a:pPr>
+            <a:r>
+              <a:rPr sz="2200" b="0">
+                <a:solidFill>
+                  <a:srgbClr val="202122"/>
+                </a:solidFill>
+                <a:latin typeface="Calibri"/>
+              </a:rPr>
+              <a:t>Many attacks target software directly.</a:t>
+            </a:r>
+          </a:p>
+          <a:p>
+            <a:pPr>
+              <a:spcAft>
+                <a:spcPts val="1320"/>
+              </a:spcAft>
+            </a:pPr>
+            <a:r>
+              <a:rPr sz="2200" b="1">
+                <a:solidFill>
+                  <a:srgbClr val="202122"/>
+                </a:solidFill>
+                <a:latin typeface="Calibri"/>
+              </a:rPr>
+              <a:t>SQL injection:</a:t>
+            </a:r>
+            <a:r>
+              <a:rPr sz="2200" b="0">
+                <a:solidFill>
+                  <a:srgbClr val="202122"/>
+                </a:solidFill>
+                <a:latin typeface="Calibri"/>
+              </a:rPr>
+              <a:t> an attacker types database commands into an input box, and badly written code runs them. Cross-site scripting: malicious scripts are injected into web pages other users see. Buffer overflow: input longer than expected overwrites memory. Brute force: trying every password.</a:t>
+            </a:r>
+          </a:p>
+          <a:p>
+            <a:pPr>
+              <a:spcAft>
+                <a:spcPts val="1320"/>
+              </a:spcAft>
+            </a:pPr>
+            <a:r>
+              <a:rPr sz="2200" b="0">
+                <a:solidFill>
+                  <a:srgbClr val="202122"/>
+                </a:solidFill>
+                <a:latin typeface="Calibri"/>
+              </a:rPr>
+              <a:t>Insecure APIs lack proper authentication or input checks. Man-in-the-middle attacks intercept traffic. Malware, DDoS attacks from botnets, and social engineering such as phishing are also common.</a:t>
+            </a:r>
+          </a:p>
+        </p:txBody>
+      </p:sp>
+      <p:sp>
+        <p:nvSpPr>
+          <p:cNvPr id="7" name="Rounded Rectangle 6"/>
           <p:cNvSpPr/>
           <p:nvPr/>
         </p:nvSpPr>
         <p:spPr>
           <a:xfrm>
-            <a:off x="548640" y="1600200"/>
-            <a:ext cx="3515258" cy="2148840"/>
+            <a:off x="7772400" y="1554480"/>
+            <a:ext cx="3867912" cy="4526280"/>
           </a:xfrm>
           <a:prstGeom prst="roundRect">
             <a:avLst>
-              <a:gd name="adj" fmla="val 6000"/>
+              <a:gd name="adj" fmla="val 8000"/>
             </a:avLst>
           </a:prstGeom>
           <a:solidFill>
-            <a:srgbClr val="EAF3FF"/>
+            <a:srgbClr val="03306E"/>
           </a:solidFill>
           <a:ln>
             <a:noFill/>
@@ -6033,14 +9688,14 @@
       </p:sp>
       <p:sp>
         <p:nvSpPr>
-          <p:cNvPr id="7" name="Oval 6"/>
+          <p:cNvPr id="8" name="Oval 7"/>
           <p:cNvSpPr/>
           <p:nvPr/>
         </p:nvSpPr>
         <p:spPr>
           <a:xfrm>
-            <a:off x="777240" y="1828800"/>
-            <a:ext cx="457200" cy="457200"/>
+            <a:off x="8046720" y="1828800"/>
+            <a:ext cx="548640" cy="548640"/>
           </a:xfrm>
           <a:prstGeom prst="ellipse">
             <a:avLst/>
@@ -6073,46 +9728,13 @@
           <a:p>
             <a:pPr algn="ctr"/>
             <a:r>
-              <a:rPr sz="1500" b="1">
+              <a:rPr sz="1300" b="1">
                 <a:solidFill>
                   <a:srgbClr val="202122"/>
                 </a:solidFill>
                 <a:latin typeface="Calibri"/>
               </a:rPr>
-              <a:t>1</a:t>
-            </a:r>
-          </a:p>
-        </p:txBody>
-      </p:sp>
-      <p:sp>
-        <p:nvSpPr>
-          <p:cNvPr id="8" name="TextBox 7"/>
-          <p:cNvSpPr txBox="1"/>
-          <p:nvPr/>
-        </p:nvSpPr>
-        <p:spPr>
-          <a:xfrm>
-            <a:off x="1371600" y="1801368"/>
-            <a:ext cx="2509418" cy="512064"/>
-          </a:xfrm>
-          <a:prstGeom prst="rect">
-            <a:avLst/>
-          </a:prstGeom>
-          <a:noFill/>
-        </p:spPr>
-        <p:txBody>
-          <a:bodyPr wrap="square" anchor="ctr" lIns="0" rIns="0" tIns="0" bIns="0"/>
-          <a:lstStyle/>
-          <a:p>
-            <a:pPr algn="l"/>
-            <a:r>
-              <a:rPr sz="1600" b="1" i="0">
-                <a:solidFill>
-                  <a:srgbClr val="03306E"/>
-                </a:solidFill>
-                <a:latin typeface="Calibri"/>
-              </a:rPr>
-              <a:t>Botnets and DoS / DDoS</a:t>
+              <a:t>e.g.</a:t>
             </a:r>
           </a:p>
         </p:txBody>
@@ -6125,8 +9747,8 @@
         </p:nvSpPr>
         <p:spPr>
           <a:xfrm>
-            <a:off x="777240" y="2468880"/>
-            <a:ext cx="3058058" cy="1143000"/>
+            <a:off x="8046720" y="2560320"/>
+            <a:ext cx="3291840" cy="365760"/>
           </a:xfrm>
           <a:prstGeom prst="rect">
             <a:avLst/>
@@ -6139,828 +9761,46 @@
           <a:p>
             <a:pPr algn="l"/>
             <a:r>
-              <a:rPr sz="2000" b="0" i="0">
-                <a:solidFill>
-                  <a:srgbClr val="202122"/>
-                </a:solidFill>
-                <a:latin typeface="Calibri"/>
-              </a:rPr>
-              <a:t>Floods of traffic that take services down.</a:t>
-            </a:r>
-          </a:p>
-        </p:txBody>
-      </p:sp>
-      <p:sp>
-        <p:nvSpPr>
-          <p:cNvPr id="10" name="Rounded Rectangle 9"/>
-          <p:cNvSpPr/>
-          <p:nvPr/>
-        </p:nvSpPr>
-        <p:spPr>
-          <a:xfrm>
-            <a:off x="4338218" y="1600200"/>
-            <a:ext cx="3515258" cy="2148840"/>
-          </a:xfrm>
-          <a:prstGeom prst="roundRect">
-            <a:avLst>
-              <a:gd name="adj" fmla="val 6000"/>
-            </a:avLst>
-          </a:prstGeom>
-          <a:solidFill>
-            <a:srgbClr val="EAF3FF"/>
-          </a:solidFill>
-          <a:ln>
-            <a:noFill/>
-          </a:ln>
-          <a:effectLst/>
-        </p:spPr>
-        <p:style>
-          <a:lnRef idx="1">
-            <a:schemeClr val="accent1"/>
-          </a:lnRef>
-          <a:fillRef idx="3">
-            <a:schemeClr val="accent1"/>
-          </a:fillRef>
-          <a:effectRef idx="2">
-            <a:schemeClr val="accent1"/>
-          </a:effectRef>
-          <a:fontRef idx="minor">
-            <a:schemeClr val="lt1"/>
-          </a:fontRef>
-        </p:style>
-        <p:txBody>
-          <a:bodyPr rtlCol="0" anchor="ctr"/>
-          <a:lstStyle/>
-          <a:p/>
-        </p:txBody>
-      </p:sp>
-      <p:sp>
-        <p:nvSpPr>
-          <p:cNvPr id="11" name="Oval 10"/>
-          <p:cNvSpPr/>
-          <p:nvPr/>
-        </p:nvSpPr>
-        <p:spPr>
-          <a:xfrm>
-            <a:off x="4566818" y="1828800"/>
-            <a:ext cx="457200" cy="457200"/>
-          </a:xfrm>
-          <a:prstGeom prst="ellipse">
-            <a:avLst/>
-          </a:prstGeom>
-          <a:solidFill>
-            <a:srgbClr val="F2B705"/>
-          </a:solidFill>
-          <a:ln>
-            <a:noFill/>
-          </a:ln>
-          <a:effectLst/>
-        </p:spPr>
-        <p:style>
-          <a:lnRef idx="1">
-            <a:schemeClr val="accent1"/>
-          </a:lnRef>
-          <a:fillRef idx="3">
-            <a:schemeClr val="accent1"/>
-          </a:fillRef>
-          <a:effectRef idx="2">
-            <a:schemeClr val="accent1"/>
-          </a:effectRef>
-          <a:fontRef idx="minor">
-            <a:schemeClr val="lt1"/>
-          </a:fontRef>
-        </p:style>
-        <p:txBody>
-          <a:bodyPr rtlCol="0" anchor="ctr" lIns="0" rIns="0" tIns="0" bIns="0"/>
-          <a:lstStyle/>
-          <a:p>
-            <a:pPr algn="ctr"/>
-            <a:r>
-              <a:rPr sz="1500" b="1">
-                <a:solidFill>
-                  <a:srgbClr val="202122"/>
-                </a:solidFill>
-                <a:latin typeface="Calibri"/>
-              </a:rPr>
-              <a:t>2</a:t>
-            </a:r>
-          </a:p>
-        </p:txBody>
-      </p:sp>
-      <p:sp>
-        <p:nvSpPr>
-          <p:cNvPr id="12" name="TextBox 11"/>
+              <a:rPr sz="1300" b="1" i="0">
+                <a:solidFill>
+                  <a:srgbClr val="A9C8F0"/>
+                </a:solidFill>
+                <a:latin typeface="Calibri"/>
+              </a:rPr>
+              <a:t>EXAMPLE</a:t>
+            </a:r>
+          </a:p>
+        </p:txBody>
+      </p:sp>
+      <p:sp>
+        <p:nvSpPr>
+          <p:cNvPr id="10" name="TextBox 9"/>
           <p:cNvSpPr txBox="1"/>
           <p:nvPr/>
         </p:nvSpPr>
         <p:spPr>
           <a:xfrm>
-            <a:off x="5161178" y="1801368"/>
-            <a:ext cx="2509418" cy="512064"/>
-          </a:xfrm>
-          <a:prstGeom prst="rect">
-            <a:avLst/>
-          </a:prstGeom>
-          <a:noFill/>
-        </p:spPr>
-        <p:txBody>
-          <a:bodyPr wrap="square" anchor="ctr" lIns="0" rIns="0" tIns="0" bIns="0"/>
+            <a:off x="8046720" y="2971800"/>
+            <a:ext cx="3291840" cy="2971800"/>
+          </a:xfrm>
+          <a:prstGeom prst="rect">
+            <a:avLst/>
+          </a:prstGeom>
+          <a:noFill/>
+        </p:spPr>
+        <p:txBody>
+          <a:bodyPr wrap="square" anchor="t" lIns="0" rIns="0" tIns="0" bIns="0"/>
           <a:lstStyle/>
           <a:p>
             <a:pPr algn="l"/>
             <a:r>
-              <a:rPr sz="1900" b="1" i="0">
-                <a:solidFill>
-                  <a:srgbClr val="03306E"/>
-                </a:solidFill>
-                <a:latin typeface="Calibri"/>
-              </a:rPr>
-              <a:t>Hacking techniques</a:t>
-            </a:r>
-          </a:p>
-        </p:txBody>
-      </p:sp>
-      <p:sp>
-        <p:nvSpPr>
-          <p:cNvPr id="13" name="TextBox 12"/>
-          <p:cNvSpPr txBox="1"/>
-          <p:nvPr/>
-        </p:nvSpPr>
-        <p:spPr>
-          <a:xfrm>
-            <a:off x="4566818" y="2468880"/>
-            <a:ext cx="3058058" cy="1143000"/>
-          </a:xfrm>
-          <a:prstGeom prst="rect">
-            <a:avLst/>
-          </a:prstGeom>
-          <a:noFill/>
-        </p:spPr>
-        <p:txBody>
-          <a:bodyPr wrap="square" anchor="t" lIns="0" rIns="0" tIns="0" bIns="0"/>
-          <a:lstStyle/>
-          <a:p>
-            <a:pPr algn="l"/>
-            <a:r>
-              <a:rPr sz="2000" b="0" i="0">
-                <a:solidFill>
-                  <a:srgbClr val="202122"/>
-                </a:solidFill>
-                <a:latin typeface="Calibri"/>
-              </a:rPr>
-              <a:t>Brute force, cross-site scripting, SQL injection, buffer overflow.</a:t>
-            </a:r>
-          </a:p>
-        </p:txBody>
-      </p:sp>
-      <p:sp>
-        <p:nvSpPr>
-          <p:cNvPr id="14" name="Rounded Rectangle 13"/>
-          <p:cNvSpPr/>
-          <p:nvPr/>
-        </p:nvSpPr>
-        <p:spPr>
-          <a:xfrm>
-            <a:off x="8127796" y="1600200"/>
-            <a:ext cx="3515258" cy="2148840"/>
-          </a:xfrm>
-          <a:prstGeom prst="roundRect">
-            <a:avLst>
-              <a:gd name="adj" fmla="val 6000"/>
-            </a:avLst>
-          </a:prstGeom>
-          <a:solidFill>
-            <a:srgbClr val="EAF3FF"/>
-          </a:solidFill>
-          <a:ln>
-            <a:noFill/>
-          </a:ln>
-          <a:effectLst/>
-        </p:spPr>
-        <p:style>
-          <a:lnRef idx="1">
-            <a:schemeClr val="accent1"/>
-          </a:lnRef>
-          <a:fillRef idx="3">
-            <a:schemeClr val="accent1"/>
-          </a:fillRef>
-          <a:effectRef idx="2">
-            <a:schemeClr val="accent1"/>
-          </a:effectRef>
-          <a:fontRef idx="minor">
-            <a:schemeClr val="lt1"/>
-          </a:fontRef>
-        </p:style>
-        <p:txBody>
-          <a:bodyPr rtlCol="0" anchor="ctr"/>
-          <a:lstStyle/>
-          <a:p/>
-        </p:txBody>
-      </p:sp>
-      <p:sp>
-        <p:nvSpPr>
-          <p:cNvPr id="15" name="Oval 14"/>
-          <p:cNvSpPr/>
-          <p:nvPr/>
-        </p:nvSpPr>
-        <p:spPr>
-          <a:xfrm>
-            <a:off x="8356396" y="1828800"/>
-            <a:ext cx="457200" cy="457200"/>
-          </a:xfrm>
-          <a:prstGeom prst="ellipse">
-            <a:avLst/>
-          </a:prstGeom>
-          <a:solidFill>
-            <a:srgbClr val="F2B705"/>
-          </a:solidFill>
-          <a:ln>
-            <a:noFill/>
-          </a:ln>
-          <a:effectLst/>
-        </p:spPr>
-        <p:style>
-          <a:lnRef idx="1">
-            <a:schemeClr val="accent1"/>
-          </a:lnRef>
-          <a:fillRef idx="3">
-            <a:schemeClr val="accent1"/>
-          </a:fillRef>
-          <a:effectRef idx="2">
-            <a:schemeClr val="accent1"/>
-          </a:effectRef>
-          <a:fontRef idx="minor">
-            <a:schemeClr val="lt1"/>
-          </a:fontRef>
-        </p:style>
-        <p:txBody>
-          <a:bodyPr rtlCol="0" anchor="ctr" lIns="0" rIns="0" tIns="0" bIns="0"/>
-          <a:lstStyle/>
-          <a:p>
-            <a:pPr algn="ctr"/>
-            <a:r>
-              <a:rPr sz="1500" b="1">
-                <a:solidFill>
-                  <a:srgbClr val="202122"/>
-                </a:solidFill>
-                <a:latin typeface="Calibri"/>
-              </a:rPr>
-              <a:t>3</a:t>
-            </a:r>
-          </a:p>
-        </p:txBody>
-      </p:sp>
-      <p:sp>
-        <p:nvSpPr>
-          <p:cNvPr id="16" name="TextBox 15"/>
-          <p:cNvSpPr txBox="1"/>
-          <p:nvPr/>
-        </p:nvSpPr>
-        <p:spPr>
-          <a:xfrm>
-            <a:off x="8950756" y="1801368"/>
-            <a:ext cx="2509418" cy="512064"/>
-          </a:xfrm>
-          <a:prstGeom prst="rect">
-            <a:avLst/>
-          </a:prstGeom>
-          <a:noFill/>
-        </p:spPr>
-        <p:txBody>
-          <a:bodyPr wrap="square" anchor="ctr" lIns="0" rIns="0" tIns="0" bIns="0"/>
-          <a:lstStyle/>
-          <a:p>
-            <a:pPr algn="l"/>
-            <a:r>
-              <a:rPr sz="1900" b="1" i="0">
-                <a:solidFill>
-                  <a:srgbClr val="03306E"/>
-                </a:solidFill>
-                <a:latin typeface="Calibri"/>
-              </a:rPr>
-              <a:t>Malware</a:t>
-            </a:r>
-          </a:p>
-        </p:txBody>
-      </p:sp>
-      <p:sp>
-        <p:nvSpPr>
-          <p:cNvPr id="17" name="TextBox 16"/>
-          <p:cNvSpPr txBox="1"/>
-          <p:nvPr/>
-        </p:nvSpPr>
-        <p:spPr>
-          <a:xfrm>
-            <a:off x="8356396" y="2468880"/>
-            <a:ext cx="3058058" cy="1143000"/>
-          </a:xfrm>
-          <a:prstGeom prst="rect">
-            <a:avLst/>
-          </a:prstGeom>
-          <a:noFill/>
-        </p:spPr>
-        <p:txBody>
-          <a:bodyPr wrap="square" anchor="t" lIns="0" rIns="0" tIns="0" bIns="0"/>
-          <a:lstStyle/>
-          <a:p>
-            <a:pPr algn="l"/>
-            <a:r>
-              <a:rPr sz="2000" b="0" i="0">
-                <a:solidFill>
-                  <a:srgbClr val="202122"/>
-                </a:solidFill>
-                <a:latin typeface="Calibri"/>
-              </a:rPr>
-              <a:t>Viruses, worms, keyloggers, ransomware, spyware, remote access trojans.</a:t>
-            </a:r>
-          </a:p>
-        </p:txBody>
-      </p:sp>
-      <p:sp>
-        <p:nvSpPr>
-          <p:cNvPr id="18" name="Rounded Rectangle 17"/>
-          <p:cNvSpPr/>
-          <p:nvPr/>
-        </p:nvSpPr>
-        <p:spPr>
-          <a:xfrm>
-            <a:off x="548640" y="4023360"/>
-            <a:ext cx="3515258" cy="2148840"/>
-          </a:xfrm>
-          <a:prstGeom prst="roundRect">
-            <a:avLst>
-              <a:gd name="adj" fmla="val 6000"/>
-            </a:avLst>
-          </a:prstGeom>
-          <a:solidFill>
-            <a:srgbClr val="EAF3FF"/>
-          </a:solidFill>
-          <a:ln>
-            <a:noFill/>
-          </a:ln>
-          <a:effectLst/>
-        </p:spPr>
-        <p:style>
-          <a:lnRef idx="1">
-            <a:schemeClr val="accent1"/>
-          </a:lnRef>
-          <a:fillRef idx="3">
-            <a:schemeClr val="accent1"/>
-          </a:fillRef>
-          <a:effectRef idx="2">
-            <a:schemeClr val="accent1"/>
-          </a:effectRef>
-          <a:fontRef idx="minor">
-            <a:schemeClr val="lt1"/>
-          </a:fontRef>
-        </p:style>
-        <p:txBody>
-          <a:bodyPr rtlCol="0" anchor="ctr"/>
-          <a:lstStyle/>
-          <a:p/>
-        </p:txBody>
-      </p:sp>
-      <p:sp>
-        <p:nvSpPr>
-          <p:cNvPr id="19" name="Oval 18"/>
-          <p:cNvSpPr/>
-          <p:nvPr/>
-        </p:nvSpPr>
-        <p:spPr>
-          <a:xfrm>
-            <a:off x="777240" y="4251960"/>
-            <a:ext cx="457200" cy="457200"/>
-          </a:xfrm>
-          <a:prstGeom prst="ellipse">
-            <a:avLst/>
-          </a:prstGeom>
-          <a:solidFill>
-            <a:srgbClr val="F2B705"/>
-          </a:solidFill>
-          <a:ln>
-            <a:noFill/>
-          </a:ln>
-          <a:effectLst/>
-        </p:spPr>
-        <p:style>
-          <a:lnRef idx="1">
-            <a:schemeClr val="accent1"/>
-          </a:lnRef>
-          <a:fillRef idx="3">
-            <a:schemeClr val="accent1"/>
-          </a:fillRef>
-          <a:effectRef idx="2">
-            <a:schemeClr val="accent1"/>
-          </a:effectRef>
-          <a:fontRef idx="minor">
-            <a:schemeClr val="lt1"/>
-          </a:fontRef>
-        </p:style>
-        <p:txBody>
-          <a:bodyPr rtlCol="0" anchor="ctr" lIns="0" rIns="0" tIns="0" bIns="0"/>
-          <a:lstStyle/>
-          <a:p>
-            <a:pPr algn="ctr"/>
-            <a:r>
-              <a:rPr sz="1500" b="1">
-                <a:solidFill>
-                  <a:srgbClr val="202122"/>
-                </a:solidFill>
-                <a:latin typeface="Calibri"/>
-              </a:rPr>
-              <a:t>4</a:t>
-            </a:r>
-          </a:p>
-        </p:txBody>
-      </p:sp>
-      <p:sp>
-        <p:nvSpPr>
-          <p:cNvPr id="20" name="TextBox 19"/>
-          <p:cNvSpPr txBox="1"/>
-          <p:nvPr/>
-        </p:nvSpPr>
-        <p:spPr>
-          <a:xfrm>
-            <a:off x="1371600" y="4224528"/>
-            <a:ext cx="2509418" cy="512064"/>
-          </a:xfrm>
-          <a:prstGeom prst="rect">
-            <a:avLst/>
-          </a:prstGeom>
-          <a:noFill/>
-        </p:spPr>
-        <p:txBody>
-          <a:bodyPr wrap="square" anchor="ctr" lIns="0" rIns="0" tIns="0" bIns="0"/>
-          <a:lstStyle/>
-          <a:p>
-            <a:pPr algn="l"/>
-            <a:r>
-              <a:rPr sz="1900" b="1" i="0">
-                <a:solidFill>
-                  <a:srgbClr val="03306E"/>
-                </a:solidFill>
-                <a:latin typeface="Calibri"/>
-              </a:rPr>
-              <a:t>Social engineering</a:t>
-            </a:r>
-          </a:p>
-        </p:txBody>
-      </p:sp>
-      <p:sp>
-        <p:nvSpPr>
-          <p:cNvPr id="21" name="TextBox 20"/>
-          <p:cNvSpPr txBox="1"/>
-          <p:nvPr/>
-        </p:nvSpPr>
-        <p:spPr>
-          <a:xfrm>
-            <a:off x="777240" y="4892040"/>
-            <a:ext cx="3058058" cy="1143000"/>
-          </a:xfrm>
-          <a:prstGeom prst="rect">
-            <a:avLst/>
-          </a:prstGeom>
-          <a:noFill/>
-        </p:spPr>
-        <p:txBody>
-          <a:bodyPr wrap="square" anchor="t" lIns="0" rIns="0" tIns="0" bIns="0"/>
-          <a:lstStyle/>
-          <a:p>
-            <a:pPr algn="l"/>
-            <a:r>
-              <a:rPr sz="1800" b="0" i="0">
-                <a:solidFill>
-                  <a:srgbClr val="202122"/>
-                </a:solidFill>
-                <a:latin typeface="Calibri"/>
-              </a:rPr>
-              <a:t>Phishing, spear phishing, smishing, vishing, pharming, watering holes, USB baiting.</a:t>
-            </a:r>
-          </a:p>
-        </p:txBody>
-      </p:sp>
-      <p:sp>
-        <p:nvSpPr>
-          <p:cNvPr id="22" name="Rounded Rectangle 21"/>
-          <p:cNvSpPr/>
-          <p:nvPr/>
-        </p:nvSpPr>
-        <p:spPr>
-          <a:xfrm>
-            <a:off x="4338218" y="4023360"/>
-            <a:ext cx="3515258" cy="2148840"/>
-          </a:xfrm>
-          <a:prstGeom prst="roundRect">
-            <a:avLst>
-              <a:gd name="adj" fmla="val 6000"/>
-            </a:avLst>
-          </a:prstGeom>
-          <a:solidFill>
-            <a:srgbClr val="EAF3FF"/>
-          </a:solidFill>
-          <a:ln>
-            <a:noFill/>
-          </a:ln>
-          <a:effectLst/>
-        </p:spPr>
-        <p:style>
-          <a:lnRef idx="1">
-            <a:schemeClr val="accent1"/>
-          </a:lnRef>
-          <a:fillRef idx="3">
-            <a:schemeClr val="accent1"/>
-          </a:fillRef>
-          <a:effectRef idx="2">
-            <a:schemeClr val="accent1"/>
-          </a:effectRef>
-          <a:fontRef idx="minor">
-            <a:schemeClr val="lt1"/>
-          </a:fontRef>
-        </p:style>
-        <p:txBody>
-          <a:bodyPr rtlCol="0" anchor="ctr"/>
-          <a:lstStyle/>
-          <a:p/>
-        </p:txBody>
-      </p:sp>
-      <p:sp>
-        <p:nvSpPr>
-          <p:cNvPr id="23" name="Oval 22"/>
-          <p:cNvSpPr/>
-          <p:nvPr/>
-        </p:nvSpPr>
-        <p:spPr>
-          <a:xfrm>
-            <a:off x="4566818" y="4251960"/>
-            <a:ext cx="457200" cy="457200"/>
-          </a:xfrm>
-          <a:prstGeom prst="ellipse">
-            <a:avLst/>
-          </a:prstGeom>
-          <a:solidFill>
-            <a:srgbClr val="F2B705"/>
-          </a:solidFill>
-          <a:ln>
-            <a:noFill/>
-          </a:ln>
-          <a:effectLst/>
-        </p:spPr>
-        <p:style>
-          <a:lnRef idx="1">
-            <a:schemeClr val="accent1"/>
-          </a:lnRef>
-          <a:fillRef idx="3">
-            <a:schemeClr val="accent1"/>
-          </a:fillRef>
-          <a:effectRef idx="2">
-            <a:schemeClr val="accent1"/>
-          </a:effectRef>
-          <a:fontRef idx="minor">
-            <a:schemeClr val="lt1"/>
-          </a:fontRef>
-        </p:style>
-        <p:txBody>
-          <a:bodyPr rtlCol="0" anchor="ctr" lIns="0" rIns="0" tIns="0" bIns="0"/>
-          <a:lstStyle/>
-          <a:p>
-            <a:pPr algn="ctr"/>
-            <a:r>
-              <a:rPr sz="1500" b="1">
-                <a:solidFill>
-                  <a:srgbClr val="202122"/>
-                </a:solidFill>
-                <a:latin typeface="Calibri"/>
-              </a:rPr>
-              <a:t>5</a:t>
-            </a:r>
-          </a:p>
-        </p:txBody>
-      </p:sp>
-      <p:sp>
-        <p:nvSpPr>
-          <p:cNvPr id="24" name="TextBox 23"/>
-          <p:cNvSpPr txBox="1"/>
-          <p:nvPr/>
-        </p:nvSpPr>
-        <p:spPr>
-          <a:xfrm>
-            <a:off x="5161178" y="4224528"/>
-            <a:ext cx="2509418" cy="512064"/>
-          </a:xfrm>
-          <a:prstGeom prst="rect">
-            <a:avLst/>
-          </a:prstGeom>
-          <a:noFill/>
-        </p:spPr>
-        <p:txBody>
-          <a:bodyPr wrap="square" anchor="ctr" lIns="0" rIns="0" tIns="0" bIns="0"/>
-          <a:lstStyle/>
-          <a:p>
-            <a:pPr algn="l"/>
-            <a:r>
-              <a:rPr sz="1900" b="1" i="0">
-                <a:solidFill>
-                  <a:srgbClr val="03306E"/>
-                </a:solidFill>
-                <a:latin typeface="Calibri"/>
-              </a:rPr>
-              <a:t>Insecure APIs</a:t>
-            </a:r>
-          </a:p>
-        </p:txBody>
-      </p:sp>
-      <p:sp>
-        <p:nvSpPr>
-          <p:cNvPr id="25" name="TextBox 24"/>
-          <p:cNvSpPr txBox="1"/>
-          <p:nvPr/>
-        </p:nvSpPr>
-        <p:spPr>
-          <a:xfrm>
-            <a:off x="4566818" y="4892040"/>
-            <a:ext cx="3058058" cy="1143000"/>
-          </a:xfrm>
-          <a:prstGeom prst="rect">
-            <a:avLst/>
-          </a:prstGeom>
-          <a:noFill/>
-        </p:spPr>
-        <p:txBody>
-          <a:bodyPr wrap="square" anchor="t" lIns="0" rIns="0" tIns="0" bIns="0"/>
-          <a:lstStyle/>
-          <a:p>
-            <a:pPr algn="l"/>
-            <a:r>
-              <a:rPr sz="2000" b="0" i="0">
-                <a:solidFill>
-                  <a:srgbClr val="202122"/>
-                </a:solidFill>
-                <a:latin typeface="Calibri"/>
-              </a:rPr>
-              <a:t>APIs without proper authentication or input checks.</a:t>
-            </a:r>
-          </a:p>
-        </p:txBody>
-      </p:sp>
-      <p:sp>
-        <p:nvSpPr>
-          <p:cNvPr id="26" name="Rounded Rectangle 25"/>
-          <p:cNvSpPr/>
-          <p:nvPr/>
-        </p:nvSpPr>
-        <p:spPr>
-          <a:xfrm>
-            <a:off x="8127796" y="4023360"/>
-            <a:ext cx="3515258" cy="2148840"/>
-          </a:xfrm>
-          <a:prstGeom prst="roundRect">
-            <a:avLst>
-              <a:gd name="adj" fmla="val 6000"/>
-            </a:avLst>
-          </a:prstGeom>
-          <a:solidFill>
-            <a:srgbClr val="EAF3FF"/>
-          </a:solidFill>
-          <a:ln>
-            <a:noFill/>
-          </a:ln>
-          <a:effectLst/>
-        </p:spPr>
-        <p:style>
-          <a:lnRef idx="1">
-            <a:schemeClr val="accent1"/>
-          </a:lnRef>
-          <a:fillRef idx="3">
-            <a:schemeClr val="accent1"/>
-          </a:fillRef>
-          <a:effectRef idx="2">
-            <a:schemeClr val="accent1"/>
-          </a:effectRef>
-          <a:fontRef idx="minor">
-            <a:schemeClr val="lt1"/>
-          </a:fontRef>
-        </p:style>
-        <p:txBody>
-          <a:bodyPr rtlCol="0" anchor="ctr"/>
-          <a:lstStyle/>
-          <a:p/>
-        </p:txBody>
-      </p:sp>
-      <p:sp>
-        <p:nvSpPr>
-          <p:cNvPr id="27" name="Oval 26"/>
-          <p:cNvSpPr/>
-          <p:nvPr/>
-        </p:nvSpPr>
-        <p:spPr>
-          <a:xfrm>
-            <a:off x="8356396" y="4251960"/>
-            <a:ext cx="457200" cy="457200"/>
-          </a:xfrm>
-          <a:prstGeom prst="ellipse">
-            <a:avLst/>
-          </a:prstGeom>
-          <a:solidFill>
-            <a:srgbClr val="F2B705"/>
-          </a:solidFill>
-          <a:ln>
-            <a:noFill/>
-          </a:ln>
-          <a:effectLst/>
-        </p:spPr>
-        <p:style>
-          <a:lnRef idx="1">
-            <a:schemeClr val="accent1"/>
-          </a:lnRef>
-          <a:fillRef idx="3">
-            <a:schemeClr val="accent1"/>
-          </a:fillRef>
-          <a:effectRef idx="2">
-            <a:schemeClr val="accent1"/>
-          </a:effectRef>
-          <a:fontRef idx="minor">
-            <a:schemeClr val="lt1"/>
-          </a:fontRef>
-        </p:style>
-        <p:txBody>
-          <a:bodyPr rtlCol="0" anchor="ctr" lIns="0" rIns="0" tIns="0" bIns="0"/>
-          <a:lstStyle/>
-          <a:p>
-            <a:pPr algn="ctr"/>
-            <a:r>
-              <a:rPr sz="1500" b="1">
-                <a:solidFill>
-                  <a:srgbClr val="202122"/>
-                </a:solidFill>
-                <a:latin typeface="Calibri"/>
-              </a:rPr>
-              <a:t>6</a:t>
-            </a:r>
-          </a:p>
-        </p:txBody>
-      </p:sp>
-      <p:sp>
-        <p:nvSpPr>
-          <p:cNvPr id="28" name="TextBox 27"/>
-          <p:cNvSpPr txBox="1"/>
-          <p:nvPr/>
-        </p:nvSpPr>
-        <p:spPr>
-          <a:xfrm>
-            <a:off x="8950756" y="4224528"/>
-            <a:ext cx="2509418" cy="512064"/>
-          </a:xfrm>
-          <a:prstGeom prst="rect">
-            <a:avLst/>
-          </a:prstGeom>
-          <a:noFill/>
-        </p:spPr>
-        <p:txBody>
-          <a:bodyPr wrap="square" anchor="ctr" lIns="0" rIns="0" tIns="0" bIns="0"/>
-          <a:lstStyle/>
-          <a:p>
-            <a:pPr algn="l"/>
-            <a:r>
-              <a:rPr sz="1900" b="1" i="0">
-                <a:solidFill>
-                  <a:srgbClr val="03306E"/>
-                </a:solidFill>
-                <a:latin typeface="Calibri"/>
-              </a:rPr>
-              <a:t>Interception</a:t>
-            </a:r>
-          </a:p>
-        </p:txBody>
-      </p:sp>
-      <p:sp>
-        <p:nvSpPr>
-          <p:cNvPr id="29" name="TextBox 28"/>
-          <p:cNvSpPr txBox="1"/>
-          <p:nvPr/>
-        </p:nvSpPr>
-        <p:spPr>
-          <a:xfrm>
-            <a:off x="8356396" y="4892040"/>
-            <a:ext cx="3058058" cy="1143000"/>
-          </a:xfrm>
-          <a:prstGeom prst="rect">
-            <a:avLst/>
-          </a:prstGeom>
-          <a:noFill/>
-        </p:spPr>
-        <p:txBody>
-          <a:bodyPr wrap="square" anchor="t" lIns="0" rIns="0" tIns="0" bIns="0"/>
-          <a:lstStyle/>
-          <a:p>
-            <a:pPr algn="l"/>
-            <a:r>
-              <a:rPr sz="2000" b="0" i="0">
-                <a:solidFill>
-                  <a:srgbClr val="202122"/>
-                </a:solidFill>
-                <a:latin typeface="Calibri"/>
-              </a:rPr>
-              <a:t>DNS attacks, man-in-the-middle attacks, open Wi-Fi.</a:t>
+              <a:rPr sz="1900" b="0" i="0">
+                <a:solidFill>
+                  <a:srgbClr val="FFFFFF"/>
+                </a:solidFill>
+                <a:latin typeface="Cambria"/>
+              </a:rPr>
+              <a:t>Typing ' OR '1'='1 into a login box can log an attacker in if the code builds the SQL query by joining strings together.</a:t>
             </a:r>
           </a:p>
         </p:txBody>
@@ -7052,7 +9892,7 @@
                 </a:solidFill>
                 <a:latin typeface="Cambria"/>
               </a:rPr>
-              <a:t>Developer defences</a:t>
+              <a:t>Technical threats</a:t>
             </a:r>
           </a:p>
         </p:txBody>
@@ -7119,6 +9959,1983 @@
                 <a:latin typeface="Calibri"/>
               </a:rPr>
               <a:t>5</a:t>
+            </a:r>
+          </a:p>
+        </p:txBody>
+      </p:sp>
+      <p:sp>
+        <p:nvSpPr>
+          <p:cNvPr id="6" name="Rounded Rectangle 5"/>
+          <p:cNvSpPr/>
+          <p:nvPr/>
+        </p:nvSpPr>
+        <p:spPr>
+          <a:xfrm>
+            <a:off x="548640" y="1600200"/>
+            <a:ext cx="3515258" cy="2148840"/>
+          </a:xfrm>
+          <a:prstGeom prst="roundRect">
+            <a:avLst>
+              <a:gd name="adj" fmla="val 6000"/>
+            </a:avLst>
+          </a:prstGeom>
+          <a:solidFill>
+            <a:srgbClr val="EAF3FF"/>
+          </a:solidFill>
+          <a:ln>
+            <a:noFill/>
+          </a:ln>
+          <a:effectLst/>
+        </p:spPr>
+        <p:style>
+          <a:lnRef idx="1">
+            <a:schemeClr val="accent1"/>
+          </a:lnRef>
+          <a:fillRef idx="3">
+            <a:schemeClr val="accent1"/>
+          </a:fillRef>
+          <a:effectRef idx="2">
+            <a:schemeClr val="accent1"/>
+          </a:effectRef>
+          <a:fontRef idx="minor">
+            <a:schemeClr val="lt1"/>
+          </a:fontRef>
+        </p:style>
+        <p:txBody>
+          <a:bodyPr rtlCol="0" anchor="ctr"/>
+          <a:lstStyle/>
+          <a:p/>
+        </p:txBody>
+      </p:sp>
+      <p:sp>
+        <p:nvSpPr>
+          <p:cNvPr id="7" name="Oval 6"/>
+          <p:cNvSpPr/>
+          <p:nvPr/>
+        </p:nvSpPr>
+        <p:spPr>
+          <a:xfrm>
+            <a:off x="777240" y="1828800"/>
+            <a:ext cx="457200" cy="457200"/>
+          </a:xfrm>
+          <a:prstGeom prst="ellipse">
+            <a:avLst/>
+          </a:prstGeom>
+          <a:solidFill>
+            <a:srgbClr val="F2B705"/>
+          </a:solidFill>
+          <a:ln>
+            <a:noFill/>
+          </a:ln>
+          <a:effectLst/>
+        </p:spPr>
+        <p:style>
+          <a:lnRef idx="1">
+            <a:schemeClr val="accent1"/>
+          </a:lnRef>
+          <a:fillRef idx="3">
+            <a:schemeClr val="accent1"/>
+          </a:fillRef>
+          <a:effectRef idx="2">
+            <a:schemeClr val="accent1"/>
+          </a:effectRef>
+          <a:fontRef idx="minor">
+            <a:schemeClr val="lt1"/>
+          </a:fontRef>
+        </p:style>
+        <p:txBody>
+          <a:bodyPr rtlCol="0" anchor="ctr" lIns="0" rIns="0" tIns="0" bIns="0"/>
+          <a:lstStyle/>
+          <a:p>
+            <a:pPr algn="ctr"/>
+            <a:r>
+              <a:rPr sz="1500" b="1">
+                <a:solidFill>
+                  <a:srgbClr val="202122"/>
+                </a:solidFill>
+                <a:latin typeface="Calibri"/>
+              </a:rPr>
+              <a:t>1</a:t>
+            </a:r>
+          </a:p>
+        </p:txBody>
+      </p:sp>
+      <p:sp>
+        <p:nvSpPr>
+          <p:cNvPr id="8" name="TextBox 7"/>
+          <p:cNvSpPr txBox="1"/>
+          <p:nvPr/>
+        </p:nvSpPr>
+        <p:spPr>
+          <a:xfrm>
+            <a:off x="1371600" y="1801368"/>
+            <a:ext cx="2509418" cy="512064"/>
+          </a:xfrm>
+          <a:prstGeom prst="rect">
+            <a:avLst/>
+          </a:prstGeom>
+          <a:noFill/>
+        </p:spPr>
+        <p:txBody>
+          <a:bodyPr wrap="square" anchor="ctr" lIns="0" rIns="0" tIns="0" bIns="0"/>
+          <a:lstStyle/>
+          <a:p>
+            <a:pPr algn="l"/>
+            <a:r>
+              <a:rPr sz="1600" b="1" i="0">
+                <a:solidFill>
+                  <a:srgbClr val="03306E"/>
+                </a:solidFill>
+                <a:latin typeface="Calibri"/>
+              </a:rPr>
+              <a:t>Botnets and DoS / DDoS</a:t>
+            </a:r>
+          </a:p>
+        </p:txBody>
+      </p:sp>
+      <p:sp>
+        <p:nvSpPr>
+          <p:cNvPr id="9" name="TextBox 8"/>
+          <p:cNvSpPr txBox="1"/>
+          <p:nvPr/>
+        </p:nvSpPr>
+        <p:spPr>
+          <a:xfrm>
+            <a:off x="777240" y="2468880"/>
+            <a:ext cx="3058058" cy="1143000"/>
+          </a:xfrm>
+          <a:prstGeom prst="rect">
+            <a:avLst/>
+          </a:prstGeom>
+          <a:noFill/>
+        </p:spPr>
+        <p:txBody>
+          <a:bodyPr wrap="square" anchor="t" lIns="0" rIns="0" tIns="0" bIns="0"/>
+          <a:lstStyle/>
+          <a:p>
+            <a:pPr algn="l"/>
+            <a:r>
+              <a:rPr sz="2000" b="0" i="0">
+                <a:solidFill>
+                  <a:srgbClr val="202122"/>
+                </a:solidFill>
+                <a:latin typeface="Calibri"/>
+              </a:rPr>
+              <a:t>Floods of traffic that take services down.</a:t>
+            </a:r>
+          </a:p>
+        </p:txBody>
+      </p:sp>
+      <p:sp>
+        <p:nvSpPr>
+          <p:cNvPr id="10" name="Rounded Rectangle 9"/>
+          <p:cNvSpPr/>
+          <p:nvPr/>
+        </p:nvSpPr>
+        <p:spPr>
+          <a:xfrm>
+            <a:off x="4338218" y="1600200"/>
+            <a:ext cx="3515258" cy="2148840"/>
+          </a:xfrm>
+          <a:prstGeom prst="roundRect">
+            <a:avLst>
+              <a:gd name="adj" fmla="val 6000"/>
+            </a:avLst>
+          </a:prstGeom>
+          <a:solidFill>
+            <a:srgbClr val="EAF3FF"/>
+          </a:solidFill>
+          <a:ln>
+            <a:noFill/>
+          </a:ln>
+          <a:effectLst/>
+        </p:spPr>
+        <p:style>
+          <a:lnRef idx="1">
+            <a:schemeClr val="accent1"/>
+          </a:lnRef>
+          <a:fillRef idx="3">
+            <a:schemeClr val="accent1"/>
+          </a:fillRef>
+          <a:effectRef idx="2">
+            <a:schemeClr val="accent1"/>
+          </a:effectRef>
+          <a:fontRef idx="minor">
+            <a:schemeClr val="lt1"/>
+          </a:fontRef>
+        </p:style>
+        <p:txBody>
+          <a:bodyPr rtlCol="0" anchor="ctr"/>
+          <a:lstStyle/>
+          <a:p/>
+        </p:txBody>
+      </p:sp>
+      <p:sp>
+        <p:nvSpPr>
+          <p:cNvPr id="11" name="Oval 10"/>
+          <p:cNvSpPr/>
+          <p:nvPr/>
+        </p:nvSpPr>
+        <p:spPr>
+          <a:xfrm>
+            <a:off x="4566818" y="1828800"/>
+            <a:ext cx="457200" cy="457200"/>
+          </a:xfrm>
+          <a:prstGeom prst="ellipse">
+            <a:avLst/>
+          </a:prstGeom>
+          <a:solidFill>
+            <a:srgbClr val="F2B705"/>
+          </a:solidFill>
+          <a:ln>
+            <a:noFill/>
+          </a:ln>
+          <a:effectLst/>
+        </p:spPr>
+        <p:style>
+          <a:lnRef idx="1">
+            <a:schemeClr val="accent1"/>
+          </a:lnRef>
+          <a:fillRef idx="3">
+            <a:schemeClr val="accent1"/>
+          </a:fillRef>
+          <a:effectRef idx="2">
+            <a:schemeClr val="accent1"/>
+          </a:effectRef>
+          <a:fontRef idx="minor">
+            <a:schemeClr val="lt1"/>
+          </a:fontRef>
+        </p:style>
+        <p:txBody>
+          <a:bodyPr rtlCol="0" anchor="ctr" lIns="0" rIns="0" tIns="0" bIns="0"/>
+          <a:lstStyle/>
+          <a:p>
+            <a:pPr algn="ctr"/>
+            <a:r>
+              <a:rPr sz="1500" b="1">
+                <a:solidFill>
+                  <a:srgbClr val="202122"/>
+                </a:solidFill>
+                <a:latin typeface="Calibri"/>
+              </a:rPr>
+              <a:t>2</a:t>
+            </a:r>
+          </a:p>
+        </p:txBody>
+      </p:sp>
+      <p:sp>
+        <p:nvSpPr>
+          <p:cNvPr id="12" name="TextBox 11"/>
+          <p:cNvSpPr txBox="1"/>
+          <p:nvPr/>
+        </p:nvSpPr>
+        <p:spPr>
+          <a:xfrm>
+            <a:off x="5161178" y="1801368"/>
+            <a:ext cx="2509418" cy="512064"/>
+          </a:xfrm>
+          <a:prstGeom prst="rect">
+            <a:avLst/>
+          </a:prstGeom>
+          <a:noFill/>
+        </p:spPr>
+        <p:txBody>
+          <a:bodyPr wrap="square" anchor="ctr" lIns="0" rIns="0" tIns="0" bIns="0"/>
+          <a:lstStyle/>
+          <a:p>
+            <a:pPr algn="l"/>
+            <a:r>
+              <a:rPr sz="1900" b="1" i="0">
+                <a:solidFill>
+                  <a:srgbClr val="03306E"/>
+                </a:solidFill>
+                <a:latin typeface="Calibri"/>
+              </a:rPr>
+              <a:t>Hacking techniques</a:t>
+            </a:r>
+          </a:p>
+        </p:txBody>
+      </p:sp>
+      <p:sp>
+        <p:nvSpPr>
+          <p:cNvPr id="13" name="TextBox 12"/>
+          <p:cNvSpPr txBox="1"/>
+          <p:nvPr/>
+        </p:nvSpPr>
+        <p:spPr>
+          <a:xfrm>
+            <a:off x="4566818" y="2468880"/>
+            <a:ext cx="3058058" cy="1143000"/>
+          </a:xfrm>
+          <a:prstGeom prst="rect">
+            <a:avLst/>
+          </a:prstGeom>
+          <a:noFill/>
+        </p:spPr>
+        <p:txBody>
+          <a:bodyPr wrap="square" anchor="t" lIns="0" rIns="0" tIns="0" bIns="0"/>
+          <a:lstStyle/>
+          <a:p>
+            <a:pPr algn="l"/>
+            <a:r>
+              <a:rPr sz="2000" b="0" i="0">
+                <a:solidFill>
+                  <a:srgbClr val="202122"/>
+                </a:solidFill>
+                <a:latin typeface="Calibri"/>
+              </a:rPr>
+              <a:t>Brute force, cross-site scripting, SQL injection, buffer overflow.</a:t>
+            </a:r>
+          </a:p>
+        </p:txBody>
+      </p:sp>
+      <p:sp>
+        <p:nvSpPr>
+          <p:cNvPr id="14" name="Rounded Rectangle 13"/>
+          <p:cNvSpPr/>
+          <p:nvPr/>
+        </p:nvSpPr>
+        <p:spPr>
+          <a:xfrm>
+            <a:off x="8127796" y="1600200"/>
+            <a:ext cx="3515258" cy="2148840"/>
+          </a:xfrm>
+          <a:prstGeom prst="roundRect">
+            <a:avLst>
+              <a:gd name="adj" fmla="val 6000"/>
+            </a:avLst>
+          </a:prstGeom>
+          <a:solidFill>
+            <a:srgbClr val="EAF3FF"/>
+          </a:solidFill>
+          <a:ln>
+            <a:noFill/>
+          </a:ln>
+          <a:effectLst/>
+        </p:spPr>
+        <p:style>
+          <a:lnRef idx="1">
+            <a:schemeClr val="accent1"/>
+          </a:lnRef>
+          <a:fillRef idx="3">
+            <a:schemeClr val="accent1"/>
+          </a:fillRef>
+          <a:effectRef idx="2">
+            <a:schemeClr val="accent1"/>
+          </a:effectRef>
+          <a:fontRef idx="minor">
+            <a:schemeClr val="lt1"/>
+          </a:fontRef>
+        </p:style>
+        <p:txBody>
+          <a:bodyPr rtlCol="0" anchor="ctr"/>
+          <a:lstStyle/>
+          <a:p/>
+        </p:txBody>
+      </p:sp>
+      <p:sp>
+        <p:nvSpPr>
+          <p:cNvPr id="15" name="Oval 14"/>
+          <p:cNvSpPr/>
+          <p:nvPr/>
+        </p:nvSpPr>
+        <p:spPr>
+          <a:xfrm>
+            <a:off x="8356396" y="1828800"/>
+            <a:ext cx="457200" cy="457200"/>
+          </a:xfrm>
+          <a:prstGeom prst="ellipse">
+            <a:avLst/>
+          </a:prstGeom>
+          <a:solidFill>
+            <a:srgbClr val="F2B705"/>
+          </a:solidFill>
+          <a:ln>
+            <a:noFill/>
+          </a:ln>
+          <a:effectLst/>
+        </p:spPr>
+        <p:style>
+          <a:lnRef idx="1">
+            <a:schemeClr val="accent1"/>
+          </a:lnRef>
+          <a:fillRef idx="3">
+            <a:schemeClr val="accent1"/>
+          </a:fillRef>
+          <a:effectRef idx="2">
+            <a:schemeClr val="accent1"/>
+          </a:effectRef>
+          <a:fontRef idx="minor">
+            <a:schemeClr val="lt1"/>
+          </a:fontRef>
+        </p:style>
+        <p:txBody>
+          <a:bodyPr rtlCol="0" anchor="ctr" lIns="0" rIns="0" tIns="0" bIns="0"/>
+          <a:lstStyle/>
+          <a:p>
+            <a:pPr algn="ctr"/>
+            <a:r>
+              <a:rPr sz="1500" b="1">
+                <a:solidFill>
+                  <a:srgbClr val="202122"/>
+                </a:solidFill>
+                <a:latin typeface="Calibri"/>
+              </a:rPr>
+              <a:t>3</a:t>
+            </a:r>
+          </a:p>
+        </p:txBody>
+      </p:sp>
+      <p:sp>
+        <p:nvSpPr>
+          <p:cNvPr id="16" name="TextBox 15"/>
+          <p:cNvSpPr txBox="1"/>
+          <p:nvPr/>
+        </p:nvSpPr>
+        <p:spPr>
+          <a:xfrm>
+            <a:off x="8950756" y="1801368"/>
+            <a:ext cx="2509418" cy="512064"/>
+          </a:xfrm>
+          <a:prstGeom prst="rect">
+            <a:avLst/>
+          </a:prstGeom>
+          <a:noFill/>
+        </p:spPr>
+        <p:txBody>
+          <a:bodyPr wrap="square" anchor="ctr" lIns="0" rIns="0" tIns="0" bIns="0"/>
+          <a:lstStyle/>
+          <a:p>
+            <a:pPr algn="l"/>
+            <a:r>
+              <a:rPr sz="1900" b="1" i="0">
+                <a:solidFill>
+                  <a:srgbClr val="03306E"/>
+                </a:solidFill>
+                <a:latin typeface="Calibri"/>
+              </a:rPr>
+              <a:t>Malware</a:t>
+            </a:r>
+          </a:p>
+        </p:txBody>
+      </p:sp>
+      <p:sp>
+        <p:nvSpPr>
+          <p:cNvPr id="17" name="TextBox 16"/>
+          <p:cNvSpPr txBox="1"/>
+          <p:nvPr/>
+        </p:nvSpPr>
+        <p:spPr>
+          <a:xfrm>
+            <a:off x="8356396" y="2468880"/>
+            <a:ext cx="3058058" cy="1143000"/>
+          </a:xfrm>
+          <a:prstGeom prst="rect">
+            <a:avLst/>
+          </a:prstGeom>
+          <a:noFill/>
+        </p:spPr>
+        <p:txBody>
+          <a:bodyPr wrap="square" anchor="t" lIns="0" rIns="0" tIns="0" bIns="0"/>
+          <a:lstStyle/>
+          <a:p>
+            <a:pPr algn="l"/>
+            <a:r>
+              <a:rPr sz="2000" b="0" i="0">
+                <a:solidFill>
+                  <a:srgbClr val="202122"/>
+                </a:solidFill>
+                <a:latin typeface="Calibri"/>
+              </a:rPr>
+              <a:t>Viruses, worms, keyloggers, ransomware, spyware, remote access trojans.</a:t>
+            </a:r>
+          </a:p>
+        </p:txBody>
+      </p:sp>
+      <p:sp>
+        <p:nvSpPr>
+          <p:cNvPr id="18" name="Rounded Rectangle 17"/>
+          <p:cNvSpPr/>
+          <p:nvPr/>
+        </p:nvSpPr>
+        <p:spPr>
+          <a:xfrm>
+            <a:off x="548640" y="4023360"/>
+            <a:ext cx="3515258" cy="2148840"/>
+          </a:xfrm>
+          <a:prstGeom prst="roundRect">
+            <a:avLst>
+              <a:gd name="adj" fmla="val 6000"/>
+            </a:avLst>
+          </a:prstGeom>
+          <a:solidFill>
+            <a:srgbClr val="EAF3FF"/>
+          </a:solidFill>
+          <a:ln>
+            <a:noFill/>
+          </a:ln>
+          <a:effectLst/>
+        </p:spPr>
+        <p:style>
+          <a:lnRef idx="1">
+            <a:schemeClr val="accent1"/>
+          </a:lnRef>
+          <a:fillRef idx="3">
+            <a:schemeClr val="accent1"/>
+          </a:fillRef>
+          <a:effectRef idx="2">
+            <a:schemeClr val="accent1"/>
+          </a:effectRef>
+          <a:fontRef idx="minor">
+            <a:schemeClr val="lt1"/>
+          </a:fontRef>
+        </p:style>
+        <p:txBody>
+          <a:bodyPr rtlCol="0" anchor="ctr"/>
+          <a:lstStyle/>
+          <a:p/>
+        </p:txBody>
+      </p:sp>
+      <p:sp>
+        <p:nvSpPr>
+          <p:cNvPr id="19" name="Oval 18"/>
+          <p:cNvSpPr/>
+          <p:nvPr/>
+        </p:nvSpPr>
+        <p:spPr>
+          <a:xfrm>
+            <a:off x="777240" y="4251960"/>
+            <a:ext cx="457200" cy="457200"/>
+          </a:xfrm>
+          <a:prstGeom prst="ellipse">
+            <a:avLst/>
+          </a:prstGeom>
+          <a:solidFill>
+            <a:srgbClr val="F2B705"/>
+          </a:solidFill>
+          <a:ln>
+            <a:noFill/>
+          </a:ln>
+          <a:effectLst/>
+        </p:spPr>
+        <p:style>
+          <a:lnRef idx="1">
+            <a:schemeClr val="accent1"/>
+          </a:lnRef>
+          <a:fillRef idx="3">
+            <a:schemeClr val="accent1"/>
+          </a:fillRef>
+          <a:effectRef idx="2">
+            <a:schemeClr val="accent1"/>
+          </a:effectRef>
+          <a:fontRef idx="minor">
+            <a:schemeClr val="lt1"/>
+          </a:fontRef>
+        </p:style>
+        <p:txBody>
+          <a:bodyPr rtlCol="0" anchor="ctr" lIns="0" rIns="0" tIns="0" bIns="0"/>
+          <a:lstStyle/>
+          <a:p>
+            <a:pPr algn="ctr"/>
+            <a:r>
+              <a:rPr sz="1500" b="1">
+                <a:solidFill>
+                  <a:srgbClr val="202122"/>
+                </a:solidFill>
+                <a:latin typeface="Calibri"/>
+              </a:rPr>
+              <a:t>4</a:t>
+            </a:r>
+          </a:p>
+        </p:txBody>
+      </p:sp>
+      <p:sp>
+        <p:nvSpPr>
+          <p:cNvPr id="20" name="TextBox 19"/>
+          <p:cNvSpPr txBox="1"/>
+          <p:nvPr/>
+        </p:nvSpPr>
+        <p:spPr>
+          <a:xfrm>
+            <a:off x="1371600" y="4224528"/>
+            <a:ext cx="2509418" cy="512064"/>
+          </a:xfrm>
+          <a:prstGeom prst="rect">
+            <a:avLst/>
+          </a:prstGeom>
+          <a:noFill/>
+        </p:spPr>
+        <p:txBody>
+          <a:bodyPr wrap="square" anchor="ctr" lIns="0" rIns="0" tIns="0" bIns="0"/>
+          <a:lstStyle/>
+          <a:p>
+            <a:pPr algn="l"/>
+            <a:r>
+              <a:rPr sz="1900" b="1" i="0">
+                <a:solidFill>
+                  <a:srgbClr val="03306E"/>
+                </a:solidFill>
+                <a:latin typeface="Calibri"/>
+              </a:rPr>
+              <a:t>Social engineering</a:t>
+            </a:r>
+          </a:p>
+        </p:txBody>
+      </p:sp>
+      <p:sp>
+        <p:nvSpPr>
+          <p:cNvPr id="21" name="TextBox 20"/>
+          <p:cNvSpPr txBox="1"/>
+          <p:nvPr/>
+        </p:nvSpPr>
+        <p:spPr>
+          <a:xfrm>
+            <a:off x="777240" y="4892040"/>
+            <a:ext cx="3058058" cy="1143000"/>
+          </a:xfrm>
+          <a:prstGeom prst="rect">
+            <a:avLst/>
+          </a:prstGeom>
+          <a:noFill/>
+        </p:spPr>
+        <p:txBody>
+          <a:bodyPr wrap="square" anchor="t" lIns="0" rIns="0" tIns="0" bIns="0"/>
+          <a:lstStyle/>
+          <a:p>
+            <a:pPr algn="l"/>
+            <a:r>
+              <a:rPr sz="1800" b="0" i="0">
+                <a:solidFill>
+                  <a:srgbClr val="202122"/>
+                </a:solidFill>
+                <a:latin typeface="Calibri"/>
+              </a:rPr>
+              <a:t>Phishing, spear phishing, smishing, vishing, pharming, watering holes, USB baiting.</a:t>
+            </a:r>
+          </a:p>
+        </p:txBody>
+      </p:sp>
+      <p:sp>
+        <p:nvSpPr>
+          <p:cNvPr id="22" name="Rounded Rectangle 21"/>
+          <p:cNvSpPr/>
+          <p:nvPr/>
+        </p:nvSpPr>
+        <p:spPr>
+          <a:xfrm>
+            <a:off x="4338218" y="4023360"/>
+            <a:ext cx="3515258" cy="2148840"/>
+          </a:xfrm>
+          <a:prstGeom prst="roundRect">
+            <a:avLst>
+              <a:gd name="adj" fmla="val 6000"/>
+            </a:avLst>
+          </a:prstGeom>
+          <a:solidFill>
+            <a:srgbClr val="EAF3FF"/>
+          </a:solidFill>
+          <a:ln>
+            <a:noFill/>
+          </a:ln>
+          <a:effectLst/>
+        </p:spPr>
+        <p:style>
+          <a:lnRef idx="1">
+            <a:schemeClr val="accent1"/>
+          </a:lnRef>
+          <a:fillRef idx="3">
+            <a:schemeClr val="accent1"/>
+          </a:fillRef>
+          <a:effectRef idx="2">
+            <a:schemeClr val="accent1"/>
+          </a:effectRef>
+          <a:fontRef idx="minor">
+            <a:schemeClr val="lt1"/>
+          </a:fontRef>
+        </p:style>
+        <p:txBody>
+          <a:bodyPr rtlCol="0" anchor="ctr"/>
+          <a:lstStyle/>
+          <a:p/>
+        </p:txBody>
+      </p:sp>
+      <p:sp>
+        <p:nvSpPr>
+          <p:cNvPr id="23" name="Oval 22"/>
+          <p:cNvSpPr/>
+          <p:nvPr/>
+        </p:nvSpPr>
+        <p:spPr>
+          <a:xfrm>
+            <a:off x="4566818" y="4251960"/>
+            <a:ext cx="457200" cy="457200"/>
+          </a:xfrm>
+          <a:prstGeom prst="ellipse">
+            <a:avLst/>
+          </a:prstGeom>
+          <a:solidFill>
+            <a:srgbClr val="F2B705"/>
+          </a:solidFill>
+          <a:ln>
+            <a:noFill/>
+          </a:ln>
+          <a:effectLst/>
+        </p:spPr>
+        <p:style>
+          <a:lnRef idx="1">
+            <a:schemeClr val="accent1"/>
+          </a:lnRef>
+          <a:fillRef idx="3">
+            <a:schemeClr val="accent1"/>
+          </a:fillRef>
+          <a:effectRef idx="2">
+            <a:schemeClr val="accent1"/>
+          </a:effectRef>
+          <a:fontRef idx="minor">
+            <a:schemeClr val="lt1"/>
+          </a:fontRef>
+        </p:style>
+        <p:txBody>
+          <a:bodyPr rtlCol="0" anchor="ctr" lIns="0" rIns="0" tIns="0" bIns="0"/>
+          <a:lstStyle/>
+          <a:p>
+            <a:pPr algn="ctr"/>
+            <a:r>
+              <a:rPr sz="1500" b="1">
+                <a:solidFill>
+                  <a:srgbClr val="202122"/>
+                </a:solidFill>
+                <a:latin typeface="Calibri"/>
+              </a:rPr>
+              <a:t>5</a:t>
+            </a:r>
+          </a:p>
+        </p:txBody>
+      </p:sp>
+      <p:sp>
+        <p:nvSpPr>
+          <p:cNvPr id="24" name="TextBox 23"/>
+          <p:cNvSpPr txBox="1"/>
+          <p:nvPr/>
+        </p:nvSpPr>
+        <p:spPr>
+          <a:xfrm>
+            <a:off x="5161178" y="4224528"/>
+            <a:ext cx="2509418" cy="512064"/>
+          </a:xfrm>
+          <a:prstGeom prst="rect">
+            <a:avLst/>
+          </a:prstGeom>
+          <a:noFill/>
+        </p:spPr>
+        <p:txBody>
+          <a:bodyPr wrap="square" anchor="ctr" lIns="0" rIns="0" tIns="0" bIns="0"/>
+          <a:lstStyle/>
+          <a:p>
+            <a:pPr algn="l"/>
+            <a:r>
+              <a:rPr sz="1900" b="1" i="0">
+                <a:solidFill>
+                  <a:srgbClr val="03306E"/>
+                </a:solidFill>
+                <a:latin typeface="Calibri"/>
+              </a:rPr>
+              <a:t>Insecure APIs</a:t>
+            </a:r>
+          </a:p>
+        </p:txBody>
+      </p:sp>
+      <p:sp>
+        <p:nvSpPr>
+          <p:cNvPr id="25" name="TextBox 24"/>
+          <p:cNvSpPr txBox="1"/>
+          <p:nvPr/>
+        </p:nvSpPr>
+        <p:spPr>
+          <a:xfrm>
+            <a:off x="4566818" y="4892040"/>
+            <a:ext cx="3058058" cy="1143000"/>
+          </a:xfrm>
+          <a:prstGeom prst="rect">
+            <a:avLst/>
+          </a:prstGeom>
+          <a:noFill/>
+        </p:spPr>
+        <p:txBody>
+          <a:bodyPr wrap="square" anchor="t" lIns="0" rIns="0" tIns="0" bIns="0"/>
+          <a:lstStyle/>
+          <a:p>
+            <a:pPr algn="l"/>
+            <a:r>
+              <a:rPr sz="2000" b="0" i="0">
+                <a:solidFill>
+                  <a:srgbClr val="202122"/>
+                </a:solidFill>
+                <a:latin typeface="Calibri"/>
+              </a:rPr>
+              <a:t>APIs without proper authentication or input checks.</a:t>
+            </a:r>
+          </a:p>
+        </p:txBody>
+      </p:sp>
+      <p:sp>
+        <p:nvSpPr>
+          <p:cNvPr id="26" name="Rounded Rectangle 25"/>
+          <p:cNvSpPr/>
+          <p:nvPr/>
+        </p:nvSpPr>
+        <p:spPr>
+          <a:xfrm>
+            <a:off x="8127796" y="4023360"/>
+            <a:ext cx="3515258" cy="2148840"/>
+          </a:xfrm>
+          <a:prstGeom prst="roundRect">
+            <a:avLst>
+              <a:gd name="adj" fmla="val 6000"/>
+            </a:avLst>
+          </a:prstGeom>
+          <a:solidFill>
+            <a:srgbClr val="EAF3FF"/>
+          </a:solidFill>
+          <a:ln>
+            <a:noFill/>
+          </a:ln>
+          <a:effectLst/>
+        </p:spPr>
+        <p:style>
+          <a:lnRef idx="1">
+            <a:schemeClr val="accent1"/>
+          </a:lnRef>
+          <a:fillRef idx="3">
+            <a:schemeClr val="accent1"/>
+          </a:fillRef>
+          <a:effectRef idx="2">
+            <a:schemeClr val="accent1"/>
+          </a:effectRef>
+          <a:fontRef idx="minor">
+            <a:schemeClr val="lt1"/>
+          </a:fontRef>
+        </p:style>
+        <p:txBody>
+          <a:bodyPr rtlCol="0" anchor="ctr"/>
+          <a:lstStyle/>
+          <a:p/>
+        </p:txBody>
+      </p:sp>
+      <p:sp>
+        <p:nvSpPr>
+          <p:cNvPr id="27" name="Oval 26"/>
+          <p:cNvSpPr/>
+          <p:nvPr/>
+        </p:nvSpPr>
+        <p:spPr>
+          <a:xfrm>
+            <a:off x="8356396" y="4251960"/>
+            <a:ext cx="457200" cy="457200"/>
+          </a:xfrm>
+          <a:prstGeom prst="ellipse">
+            <a:avLst/>
+          </a:prstGeom>
+          <a:solidFill>
+            <a:srgbClr val="F2B705"/>
+          </a:solidFill>
+          <a:ln>
+            <a:noFill/>
+          </a:ln>
+          <a:effectLst/>
+        </p:spPr>
+        <p:style>
+          <a:lnRef idx="1">
+            <a:schemeClr val="accent1"/>
+          </a:lnRef>
+          <a:fillRef idx="3">
+            <a:schemeClr val="accent1"/>
+          </a:fillRef>
+          <a:effectRef idx="2">
+            <a:schemeClr val="accent1"/>
+          </a:effectRef>
+          <a:fontRef idx="minor">
+            <a:schemeClr val="lt1"/>
+          </a:fontRef>
+        </p:style>
+        <p:txBody>
+          <a:bodyPr rtlCol="0" anchor="ctr" lIns="0" rIns="0" tIns="0" bIns="0"/>
+          <a:lstStyle/>
+          <a:p>
+            <a:pPr algn="ctr"/>
+            <a:r>
+              <a:rPr sz="1500" b="1">
+                <a:solidFill>
+                  <a:srgbClr val="202122"/>
+                </a:solidFill>
+                <a:latin typeface="Calibri"/>
+              </a:rPr>
+              <a:t>6</a:t>
+            </a:r>
+          </a:p>
+        </p:txBody>
+      </p:sp>
+      <p:sp>
+        <p:nvSpPr>
+          <p:cNvPr id="28" name="TextBox 27"/>
+          <p:cNvSpPr txBox="1"/>
+          <p:nvPr/>
+        </p:nvSpPr>
+        <p:spPr>
+          <a:xfrm>
+            <a:off x="8950756" y="4224528"/>
+            <a:ext cx="2509418" cy="512064"/>
+          </a:xfrm>
+          <a:prstGeom prst="rect">
+            <a:avLst/>
+          </a:prstGeom>
+          <a:noFill/>
+        </p:spPr>
+        <p:txBody>
+          <a:bodyPr wrap="square" anchor="ctr" lIns="0" rIns="0" tIns="0" bIns="0"/>
+          <a:lstStyle/>
+          <a:p>
+            <a:pPr algn="l"/>
+            <a:r>
+              <a:rPr sz="1900" b="1" i="0">
+                <a:solidFill>
+                  <a:srgbClr val="03306E"/>
+                </a:solidFill>
+                <a:latin typeface="Calibri"/>
+              </a:rPr>
+              <a:t>Interception</a:t>
+            </a:r>
+          </a:p>
+        </p:txBody>
+      </p:sp>
+      <p:sp>
+        <p:nvSpPr>
+          <p:cNvPr id="29" name="TextBox 28"/>
+          <p:cNvSpPr txBox="1"/>
+          <p:nvPr/>
+        </p:nvSpPr>
+        <p:spPr>
+          <a:xfrm>
+            <a:off x="8356396" y="4892040"/>
+            <a:ext cx="3058058" cy="1143000"/>
+          </a:xfrm>
+          <a:prstGeom prst="rect">
+            <a:avLst/>
+          </a:prstGeom>
+          <a:noFill/>
+        </p:spPr>
+        <p:txBody>
+          <a:bodyPr wrap="square" anchor="t" lIns="0" rIns="0" tIns="0" bIns="0"/>
+          <a:lstStyle/>
+          <a:p>
+            <a:pPr algn="l"/>
+            <a:r>
+              <a:rPr sz="2000" b="0" i="0">
+                <a:solidFill>
+                  <a:srgbClr val="202122"/>
+                </a:solidFill>
+                <a:latin typeface="Calibri"/>
+              </a:rPr>
+              <a:t>DNS attacks, man-in-the-middle attacks, open Wi-Fi.</a:t>
+            </a:r>
+          </a:p>
+        </p:txBody>
+      </p:sp>
+    </p:spTree>
+  </p:cSld>
+  <p:clrMapOvr>
+    <a:masterClrMapping/>
+  </p:clrMapOvr>
+</p:sld>
+</file>
+
+<file path=ppt/slides/slide6.xml><?xml version="1.0" encoding="utf-8"?>
+<p:sld xmlns:a="http://schemas.openxmlformats.org/drawingml/2006/main" xmlns:p="http://schemas.openxmlformats.org/presentationml/2006/main" xmlns:r="http://schemas.openxmlformats.org/officeDocument/2006/relationships">
+  <p:cSld>
+    <p:bg>
+      <p:bgPr>
+        <a:solidFill>
+          <a:srgbClr val="FFFFFF"/>
+        </a:solidFill>
+        <a:effectLst/>
+      </p:bgPr>
+    </p:bg>
+    <p:spTree>
+      <p:nvGrpSpPr>
+        <p:cNvPr id="1" name=""/>
+        <p:cNvGrpSpPr/>
+        <p:nvPr/>
+      </p:nvGrpSpPr>
+      <p:grpSpPr/>
+      <p:sp>
+        <p:nvSpPr>
+          <p:cNvPr id="2" name="TextBox 1"/>
+          <p:cNvSpPr txBox="1"/>
+          <p:nvPr/>
+        </p:nvSpPr>
+        <p:spPr>
+          <a:xfrm>
+            <a:off x="548640" y="320040"/>
+            <a:ext cx="11094415" cy="274320"/>
+          </a:xfrm>
+          <a:prstGeom prst="rect">
+            <a:avLst/>
+          </a:prstGeom>
+          <a:noFill/>
+        </p:spPr>
+        <p:txBody>
+          <a:bodyPr wrap="square" anchor="t" lIns="0" rIns="0" tIns="0" bIns="0"/>
+          <a:lstStyle/>
+          <a:p>
+            <a:pPr algn="l"/>
+            <a:r>
+              <a:rPr sz="1100" b="1" i="0">
+                <a:solidFill>
+                  <a:srgbClr val="54595D"/>
+                </a:solidFill>
+                <a:latin typeface="Calibri"/>
+              </a:rPr>
+              <a:t>CORE COMPONENT  ·  Core Paper 2</a:t>
+            </a:r>
+          </a:p>
+        </p:txBody>
+      </p:sp>
+      <p:sp>
+        <p:nvSpPr>
+          <p:cNvPr id="3" name="TextBox 2"/>
+          <p:cNvSpPr txBox="1"/>
+          <p:nvPr/>
+        </p:nvSpPr>
+        <p:spPr>
+          <a:xfrm>
+            <a:off x="548640" y="566928"/>
+            <a:ext cx="11094415" cy="822960"/>
+          </a:xfrm>
+          <a:prstGeom prst="rect">
+            <a:avLst/>
+          </a:prstGeom>
+          <a:noFill/>
+        </p:spPr>
+        <p:txBody>
+          <a:bodyPr wrap="square" anchor="ctr" lIns="0" rIns="0" tIns="0" bIns="0"/>
+          <a:lstStyle/>
+          <a:p>
+            <a:pPr algn="l"/>
+            <a:r>
+              <a:rPr sz="3200" b="1" i="0">
+                <a:solidFill>
+                  <a:srgbClr val="03306E"/>
+                </a:solidFill>
+                <a:latin typeface="Cambria"/>
+              </a:rPr>
+              <a:t>Quick check: Technical threats</a:t>
+            </a:r>
+          </a:p>
+        </p:txBody>
+      </p:sp>
+      <p:sp>
+        <p:nvSpPr>
+          <p:cNvPr id="4" name="TextBox 3"/>
+          <p:cNvSpPr txBox="1"/>
+          <p:nvPr/>
+        </p:nvSpPr>
+        <p:spPr>
+          <a:xfrm>
+            <a:off x="548640" y="6446520"/>
+            <a:ext cx="8229600" cy="274320"/>
+          </a:xfrm>
+          <a:prstGeom prst="rect">
+            <a:avLst/>
+          </a:prstGeom>
+          <a:noFill/>
+        </p:spPr>
+        <p:txBody>
+          <a:bodyPr wrap="square" anchor="t" lIns="0" rIns="0" tIns="0" bIns="0"/>
+          <a:lstStyle/>
+          <a:p>
+            <a:pPr algn="l"/>
+            <a:r>
+              <a:rPr sz="1000" b="0" i="0">
+                <a:solidFill>
+                  <a:srgbClr val="54595D"/>
+                </a:solidFill>
+                <a:latin typeface="Calibri"/>
+              </a:rPr>
+              <a:t>Digital Software Development T Level  ·  Security Threats and Vulnerabilities</a:t>
+            </a:r>
+          </a:p>
+        </p:txBody>
+      </p:sp>
+      <p:sp>
+        <p:nvSpPr>
+          <p:cNvPr id="5" name="TextBox 4"/>
+          <p:cNvSpPr txBox="1"/>
+          <p:nvPr/>
+        </p:nvSpPr>
+        <p:spPr>
+          <a:xfrm>
+            <a:off x="10728655" y="6446520"/>
+            <a:ext cx="914400" cy="274320"/>
+          </a:xfrm>
+          <a:prstGeom prst="rect">
+            <a:avLst/>
+          </a:prstGeom>
+          <a:noFill/>
+        </p:spPr>
+        <p:txBody>
+          <a:bodyPr wrap="square" anchor="t" lIns="0" rIns="0" tIns="0" bIns="0"/>
+          <a:lstStyle/>
+          <a:p>
+            <a:pPr algn="r"/>
+            <a:r>
+              <a:rPr sz="1000" b="0" i="0">
+                <a:solidFill>
+                  <a:srgbClr val="54595D"/>
+                </a:solidFill>
+                <a:latin typeface="Calibri"/>
+              </a:rPr>
+              <a:t>6</a:t>
+            </a:r>
+          </a:p>
+        </p:txBody>
+      </p:sp>
+      <p:sp>
+        <p:nvSpPr>
+          <p:cNvPr id="6" name="Oval 5"/>
+          <p:cNvSpPr/>
+          <p:nvPr/>
+        </p:nvSpPr>
+        <p:spPr>
+          <a:xfrm>
+            <a:off x="548640" y="1691640"/>
+            <a:ext cx="502920" cy="502920"/>
+          </a:xfrm>
+          <a:prstGeom prst="ellipse">
+            <a:avLst/>
+          </a:prstGeom>
+          <a:solidFill>
+            <a:srgbClr val="F2B705"/>
+          </a:solidFill>
+          <a:ln>
+            <a:noFill/>
+          </a:ln>
+          <a:effectLst/>
+        </p:spPr>
+        <p:style>
+          <a:lnRef idx="1">
+            <a:schemeClr val="accent1"/>
+          </a:lnRef>
+          <a:fillRef idx="3">
+            <a:schemeClr val="accent1"/>
+          </a:fillRef>
+          <a:effectRef idx="2">
+            <a:schemeClr val="accent1"/>
+          </a:effectRef>
+          <a:fontRef idx="minor">
+            <a:schemeClr val="lt1"/>
+          </a:fontRef>
+        </p:style>
+        <p:txBody>
+          <a:bodyPr rtlCol="0" anchor="ctr" lIns="0" rIns="0" tIns="0" bIns="0"/>
+          <a:lstStyle/>
+          <a:p>
+            <a:pPr algn="ctr"/>
+            <a:r>
+              <a:rPr sz="1600" b="1">
+                <a:solidFill>
+                  <a:srgbClr val="202122"/>
+                </a:solidFill>
+                <a:latin typeface="Calibri"/>
+              </a:rPr>
+              <a:t>1</a:t>
+            </a:r>
+          </a:p>
+        </p:txBody>
+      </p:sp>
+      <p:sp>
+        <p:nvSpPr>
+          <p:cNvPr id="7" name="TextBox 6"/>
+          <p:cNvSpPr txBox="1"/>
+          <p:nvPr/>
+        </p:nvSpPr>
+        <p:spPr>
+          <a:xfrm>
+            <a:off x="1371600" y="1645920"/>
+            <a:ext cx="10271455" cy="1188720"/>
+          </a:xfrm>
+          <a:prstGeom prst="rect">
+            <a:avLst/>
+          </a:prstGeom>
+          <a:noFill/>
+        </p:spPr>
+        <p:txBody>
+          <a:bodyPr wrap="square" anchor="t" lIns="0" rIns="0" tIns="0" bIns="0"/>
+          <a:lstStyle/>
+          <a:p>
+            <a:pPr algn="l"/>
+            <a:r>
+              <a:rPr sz="2400" b="0" i="0">
+                <a:solidFill>
+                  <a:srgbClr val="202122"/>
+                </a:solidFill>
+                <a:latin typeface="Calibri"/>
+              </a:rPr>
+              <a:t>What is SQL injection?</a:t>
+            </a:r>
+          </a:p>
+        </p:txBody>
+      </p:sp>
+      <p:sp>
+        <p:nvSpPr>
+          <p:cNvPr id="8" name="Oval 7"/>
+          <p:cNvSpPr/>
+          <p:nvPr/>
+        </p:nvSpPr>
+        <p:spPr>
+          <a:xfrm>
+            <a:off x="548640" y="3108960"/>
+            <a:ext cx="502920" cy="502920"/>
+          </a:xfrm>
+          <a:prstGeom prst="ellipse">
+            <a:avLst/>
+          </a:prstGeom>
+          <a:solidFill>
+            <a:srgbClr val="F2B705"/>
+          </a:solidFill>
+          <a:ln>
+            <a:noFill/>
+          </a:ln>
+          <a:effectLst/>
+        </p:spPr>
+        <p:style>
+          <a:lnRef idx="1">
+            <a:schemeClr val="accent1"/>
+          </a:lnRef>
+          <a:fillRef idx="3">
+            <a:schemeClr val="accent1"/>
+          </a:fillRef>
+          <a:effectRef idx="2">
+            <a:schemeClr val="accent1"/>
+          </a:effectRef>
+          <a:fontRef idx="minor">
+            <a:schemeClr val="lt1"/>
+          </a:fontRef>
+        </p:style>
+        <p:txBody>
+          <a:bodyPr rtlCol="0" anchor="ctr" lIns="0" rIns="0" tIns="0" bIns="0"/>
+          <a:lstStyle/>
+          <a:p>
+            <a:pPr algn="ctr"/>
+            <a:r>
+              <a:rPr sz="1600" b="1">
+                <a:solidFill>
+                  <a:srgbClr val="202122"/>
+                </a:solidFill>
+                <a:latin typeface="Calibri"/>
+              </a:rPr>
+              <a:t>2</a:t>
+            </a:r>
+          </a:p>
+        </p:txBody>
+      </p:sp>
+      <p:sp>
+        <p:nvSpPr>
+          <p:cNvPr id="9" name="TextBox 8"/>
+          <p:cNvSpPr txBox="1"/>
+          <p:nvPr/>
+        </p:nvSpPr>
+        <p:spPr>
+          <a:xfrm>
+            <a:off x="1371600" y="3063240"/>
+            <a:ext cx="10271455" cy="1188720"/>
+          </a:xfrm>
+          <a:prstGeom prst="rect">
+            <a:avLst/>
+          </a:prstGeom>
+          <a:noFill/>
+        </p:spPr>
+        <p:txBody>
+          <a:bodyPr wrap="square" anchor="t" lIns="0" rIns="0" tIns="0" bIns="0"/>
+          <a:lstStyle/>
+          <a:p>
+            <a:pPr algn="l"/>
+            <a:r>
+              <a:rPr sz="2400" b="0" i="0">
+                <a:solidFill>
+                  <a:srgbClr val="202122"/>
+                </a:solidFill>
+                <a:latin typeface="Calibri"/>
+              </a:rPr>
+              <a:t>What makes an API insecure?</a:t>
+            </a:r>
+          </a:p>
+        </p:txBody>
+      </p:sp>
+      <p:sp>
+        <p:nvSpPr>
+          <p:cNvPr id="10" name="Oval 9"/>
+          <p:cNvSpPr/>
+          <p:nvPr/>
+        </p:nvSpPr>
+        <p:spPr>
+          <a:xfrm>
+            <a:off x="548640" y="4526280"/>
+            <a:ext cx="502920" cy="502920"/>
+          </a:xfrm>
+          <a:prstGeom prst="ellipse">
+            <a:avLst/>
+          </a:prstGeom>
+          <a:solidFill>
+            <a:srgbClr val="F2B705"/>
+          </a:solidFill>
+          <a:ln>
+            <a:noFill/>
+          </a:ln>
+          <a:effectLst/>
+        </p:spPr>
+        <p:style>
+          <a:lnRef idx="1">
+            <a:schemeClr val="accent1"/>
+          </a:lnRef>
+          <a:fillRef idx="3">
+            <a:schemeClr val="accent1"/>
+          </a:fillRef>
+          <a:effectRef idx="2">
+            <a:schemeClr val="accent1"/>
+          </a:effectRef>
+          <a:fontRef idx="minor">
+            <a:schemeClr val="lt1"/>
+          </a:fontRef>
+        </p:style>
+        <p:txBody>
+          <a:bodyPr rtlCol="0" anchor="ctr" lIns="0" rIns="0" tIns="0" bIns="0"/>
+          <a:lstStyle/>
+          <a:p>
+            <a:pPr algn="ctr"/>
+            <a:r>
+              <a:rPr sz="1600" b="1">
+                <a:solidFill>
+                  <a:srgbClr val="202122"/>
+                </a:solidFill>
+                <a:latin typeface="Calibri"/>
+              </a:rPr>
+              <a:t>3</a:t>
+            </a:r>
+          </a:p>
+        </p:txBody>
+      </p:sp>
+      <p:sp>
+        <p:nvSpPr>
+          <p:cNvPr id="11" name="TextBox 10"/>
+          <p:cNvSpPr txBox="1"/>
+          <p:nvPr/>
+        </p:nvSpPr>
+        <p:spPr>
+          <a:xfrm>
+            <a:off x="1371600" y="4480560"/>
+            <a:ext cx="10271455" cy="1188720"/>
+          </a:xfrm>
+          <a:prstGeom prst="rect">
+            <a:avLst/>
+          </a:prstGeom>
+          <a:noFill/>
+        </p:spPr>
+        <p:txBody>
+          <a:bodyPr wrap="square" anchor="t" lIns="0" rIns="0" tIns="0" bIns="0"/>
+          <a:lstStyle/>
+          <a:p>
+            <a:pPr algn="l"/>
+            <a:r>
+              <a:rPr sz="2400" b="0" i="0">
+                <a:solidFill>
+                  <a:srgbClr val="202122"/>
+                </a:solidFill>
+                <a:latin typeface="Calibri"/>
+              </a:rPr>
+              <a:t>What is a man-in-the-middle attack?</a:t>
+            </a:r>
+          </a:p>
+        </p:txBody>
+      </p:sp>
+      <p:sp>
+        <p:nvSpPr>
+          <p:cNvPr id="12" name="TextBox 11"/>
+          <p:cNvSpPr txBox="1"/>
+          <p:nvPr/>
+        </p:nvSpPr>
+        <p:spPr>
+          <a:xfrm>
+            <a:off x="548640" y="5852160"/>
+            <a:ext cx="11094415" cy="365760"/>
+          </a:xfrm>
+          <a:prstGeom prst="rect">
+            <a:avLst/>
+          </a:prstGeom>
+          <a:noFill/>
+        </p:spPr>
+        <p:txBody>
+          <a:bodyPr wrap="square" anchor="t" lIns="0" rIns="0" tIns="0" bIns="0"/>
+          <a:lstStyle/>
+          <a:p>
+            <a:pPr algn="l"/>
+            <a:r>
+              <a:rPr sz="1300" b="0" i="1">
+                <a:solidFill>
+                  <a:srgbClr val="54595D"/>
+                </a:solidFill>
+                <a:latin typeface="Calibri"/>
+              </a:rPr>
+              <a:t>Answer on mini whiteboards or in your book. Answers are in the speaker notes.</a:t>
+            </a:r>
+          </a:p>
+        </p:txBody>
+      </p:sp>
+    </p:spTree>
+  </p:cSld>
+  <p:clrMapOvr>
+    <a:masterClrMapping/>
+  </p:clrMapOvr>
+</p:sld>
+</file>
+
+<file path=ppt/slides/slide7.xml><?xml version="1.0" encoding="utf-8"?>
+<p:sld xmlns:a="http://schemas.openxmlformats.org/drawingml/2006/main" xmlns:p="http://schemas.openxmlformats.org/presentationml/2006/main" xmlns:r="http://schemas.openxmlformats.org/officeDocument/2006/relationships">
+  <p:cSld>
+    <p:bg>
+      <p:bgPr>
+        <a:solidFill>
+          <a:srgbClr val="FFFFFF"/>
+        </a:solidFill>
+        <a:effectLst/>
+      </p:bgPr>
+    </p:bg>
+    <p:spTree>
+      <p:nvGrpSpPr>
+        <p:cNvPr id="1" name=""/>
+        <p:cNvGrpSpPr/>
+        <p:nvPr/>
+      </p:nvGrpSpPr>
+      <p:grpSpPr/>
+      <p:sp>
+        <p:nvSpPr>
+          <p:cNvPr id="2" name="TextBox 1"/>
+          <p:cNvSpPr txBox="1"/>
+          <p:nvPr/>
+        </p:nvSpPr>
+        <p:spPr>
+          <a:xfrm>
+            <a:off x="548640" y="320040"/>
+            <a:ext cx="11094415" cy="274320"/>
+          </a:xfrm>
+          <a:prstGeom prst="rect">
+            <a:avLst/>
+          </a:prstGeom>
+          <a:noFill/>
+        </p:spPr>
+        <p:txBody>
+          <a:bodyPr wrap="square" anchor="t" lIns="0" rIns="0" tIns="0" bIns="0"/>
+          <a:lstStyle/>
+          <a:p>
+            <a:pPr algn="l"/>
+            <a:r>
+              <a:rPr sz="1100" b="1" i="0">
+                <a:solidFill>
+                  <a:srgbClr val="54595D"/>
+                </a:solidFill>
+                <a:latin typeface="Calibri"/>
+              </a:rPr>
+              <a:t>CORE COMPONENT  ·  Core Paper 2</a:t>
+            </a:r>
+          </a:p>
+        </p:txBody>
+      </p:sp>
+      <p:sp>
+        <p:nvSpPr>
+          <p:cNvPr id="3" name="TextBox 2"/>
+          <p:cNvSpPr txBox="1"/>
+          <p:nvPr/>
+        </p:nvSpPr>
+        <p:spPr>
+          <a:xfrm>
+            <a:off x="548640" y="566928"/>
+            <a:ext cx="11094415" cy="822960"/>
+          </a:xfrm>
+          <a:prstGeom prst="rect">
+            <a:avLst/>
+          </a:prstGeom>
+          <a:noFill/>
+        </p:spPr>
+        <p:txBody>
+          <a:bodyPr wrap="square" anchor="ctr" lIns="0" rIns="0" tIns="0" bIns="0"/>
+          <a:lstStyle/>
+          <a:p>
+            <a:pPr algn="l"/>
+            <a:r>
+              <a:rPr sz="3200" b="1" i="0">
+                <a:solidFill>
+                  <a:srgbClr val="03306E"/>
+                </a:solidFill>
+                <a:latin typeface="Cambria"/>
+              </a:rPr>
+              <a:t>Developer defences</a:t>
+            </a:r>
+          </a:p>
+        </p:txBody>
+      </p:sp>
+      <p:sp>
+        <p:nvSpPr>
+          <p:cNvPr id="4" name="TextBox 3"/>
+          <p:cNvSpPr txBox="1"/>
+          <p:nvPr/>
+        </p:nvSpPr>
+        <p:spPr>
+          <a:xfrm>
+            <a:off x="548640" y="6446520"/>
+            <a:ext cx="8229600" cy="274320"/>
+          </a:xfrm>
+          <a:prstGeom prst="rect">
+            <a:avLst/>
+          </a:prstGeom>
+          <a:noFill/>
+        </p:spPr>
+        <p:txBody>
+          <a:bodyPr wrap="square" anchor="t" lIns="0" rIns="0" tIns="0" bIns="0"/>
+          <a:lstStyle/>
+          <a:p>
+            <a:pPr algn="l"/>
+            <a:r>
+              <a:rPr sz="1000" b="0" i="0">
+                <a:solidFill>
+                  <a:srgbClr val="54595D"/>
+                </a:solidFill>
+                <a:latin typeface="Calibri"/>
+              </a:rPr>
+              <a:t>Digital Software Development T Level  ·  Security Threats and Vulnerabilities</a:t>
+            </a:r>
+          </a:p>
+        </p:txBody>
+      </p:sp>
+      <p:sp>
+        <p:nvSpPr>
+          <p:cNvPr id="5" name="TextBox 4"/>
+          <p:cNvSpPr txBox="1"/>
+          <p:nvPr/>
+        </p:nvSpPr>
+        <p:spPr>
+          <a:xfrm>
+            <a:off x="10728655" y="6446520"/>
+            <a:ext cx="914400" cy="274320"/>
+          </a:xfrm>
+          <a:prstGeom prst="rect">
+            <a:avLst/>
+          </a:prstGeom>
+          <a:noFill/>
+        </p:spPr>
+        <p:txBody>
+          <a:bodyPr wrap="square" anchor="t" lIns="0" rIns="0" tIns="0" bIns="0"/>
+          <a:lstStyle/>
+          <a:p>
+            <a:pPr algn="r"/>
+            <a:r>
+              <a:rPr sz="1000" b="0" i="0">
+                <a:solidFill>
+                  <a:srgbClr val="54595D"/>
+                </a:solidFill>
+                <a:latin typeface="Calibri"/>
+              </a:rPr>
+              <a:t>7</a:t>
+            </a:r>
+          </a:p>
+        </p:txBody>
+      </p:sp>
+      <p:sp>
+        <p:nvSpPr>
+          <p:cNvPr id="6" name="TextBox 5"/>
+          <p:cNvSpPr txBox="1"/>
+          <p:nvPr/>
+        </p:nvSpPr>
+        <p:spPr>
+          <a:xfrm>
+            <a:off x="548640" y="1554480"/>
+            <a:ext cx="6720840" cy="4617720"/>
+          </a:xfrm>
+          <a:prstGeom prst="rect">
+            <a:avLst/>
+          </a:prstGeom>
+          <a:noFill/>
+        </p:spPr>
+        <p:txBody>
+          <a:bodyPr wrap="square" lIns="0" rIns="0" tIns="0" bIns="0">
+            <a:spAutoFit/>
+          </a:bodyPr>
+          <a:lstStyle/>
+          <a:p>
+            <a:pPr>
+              <a:spcAft>
+                <a:spcPts val="1320"/>
+              </a:spcAft>
+            </a:pPr>
+            <a:r>
+              <a:rPr sz="2200" b="0">
+                <a:solidFill>
+                  <a:srgbClr val="202122"/>
+                </a:solidFill>
+                <a:latin typeface="Calibri"/>
+              </a:rPr>
+              <a:t>Developers can prevent many attacks in their code.</a:t>
+            </a:r>
+          </a:p>
+          <a:p>
+            <a:pPr>
+              <a:spcAft>
+                <a:spcPts val="1320"/>
+              </a:spcAft>
+            </a:pPr>
+            <a:r>
+              <a:rPr sz="2200" b="0">
+                <a:solidFill>
+                  <a:srgbClr val="202122"/>
+                </a:solidFill>
+                <a:latin typeface="Calibri"/>
+              </a:rPr>
+              <a:t>Use parameterised queries so user input is never treated as SQL. Escape output and validate input to stop cross-site scripting. Check input lengths to prevent buffer overflows. Secure APIs with authentication, API keys, rate limits and input validation. Prevent brute force with account lockout, MFA and strong password rules.</a:t>
+            </a:r>
+          </a:p>
+          <a:p>
+            <a:pPr>
+              <a:spcAft>
+                <a:spcPts val="1320"/>
+              </a:spcAft>
+            </a:pPr>
+            <a:r>
+              <a:rPr sz="2200" b="0">
+                <a:solidFill>
+                  <a:srgbClr val="202122"/>
+                </a:solidFill>
+                <a:latin typeface="Calibri"/>
+              </a:rPr>
+              <a:t>Store passwords only as salted hashes, never in plain text.</a:t>
+            </a:r>
+          </a:p>
+        </p:txBody>
+      </p:sp>
+      <p:sp>
+        <p:nvSpPr>
+          <p:cNvPr id="7" name="Rounded Rectangle 6"/>
+          <p:cNvSpPr/>
+          <p:nvPr/>
+        </p:nvSpPr>
+        <p:spPr>
+          <a:xfrm>
+            <a:off x="7772400" y="1554480"/>
+            <a:ext cx="3867912" cy="4526280"/>
+          </a:xfrm>
+          <a:prstGeom prst="roundRect">
+            <a:avLst>
+              <a:gd name="adj" fmla="val 8000"/>
+            </a:avLst>
+          </a:prstGeom>
+          <a:solidFill>
+            <a:srgbClr val="03306E"/>
+          </a:solidFill>
+          <a:ln>
+            <a:noFill/>
+          </a:ln>
+          <a:effectLst/>
+        </p:spPr>
+        <p:style>
+          <a:lnRef idx="1">
+            <a:schemeClr val="accent1"/>
+          </a:lnRef>
+          <a:fillRef idx="3">
+            <a:schemeClr val="accent1"/>
+          </a:fillRef>
+          <a:effectRef idx="2">
+            <a:schemeClr val="accent1"/>
+          </a:effectRef>
+          <a:fontRef idx="minor">
+            <a:schemeClr val="lt1"/>
+          </a:fontRef>
+        </p:style>
+        <p:txBody>
+          <a:bodyPr rtlCol="0" anchor="ctr"/>
+          <a:lstStyle/>
+          <a:p/>
+        </p:txBody>
+      </p:sp>
+      <p:sp>
+        <p:nvSpPr>
+          <p:cNvPr id="8" name="Oval 7"/>
+          <p:cNvSpPr/>
+          <p:nvPr/>
+        </p:nvSpPr>
+        <p:spPr>
+          <a:xfrm>
+            <a:off x="8046720" y="1828800"/>
+            <a:ext cx="548640" cy="548640"/>
+          </a:xfrm>
+          <a:prstGeom prst="ellipse">
+            <a:avLst/>
+          </a:prstGeom>
+          <a:solidFill>
+            <a:srgbClr val="F2B705"/>
+          </a:solidFill>
+          <a:ln>
+            <a:noFill/>
+          </a:ln>
+          <a:effectLst/>
+        </p:spPr>
+        <p:style>
+          <a:lnRef idx="1">
+            <a:schemeClr val="accent1"/>
+          </a:lnRef>
+          <a:fillRef idx="3">
+            <a:schemeClr val="accent1"/>
+          </a:fillRef>
+          <a:effectRef idx="2">
+            <a:schemeClr val="accent1"/>
+          </a:effectRef>
+          <a:fontRef idx="minor">
+            <a:schemeClr val="lt1"/>
+          </a:fontRef>
+        </p:style>
+        <p:txBody>
+          <a:bodyPr rtlCol="0" anchor="ctr" lIns="0" rIns="0" tIns="0" bIns="0"/>
+          <a:lstStyle/>
+          <a:p>
+            <a:pPr algn="ctr"/>
+            <a:r>
+              <a:rPr sz="1300" b="1">
+                <a:solidFill>
+                  <a:srgbClr val="202122"/>
+                </a:solidFill>
+                <a:latin typeface="Calibri"/>
+              </a:rPr>
+              <a:t>e.g.</a:t>
+            </a:r>
+          </a:p>
+        </p:txBody>
+      </p:sp>
+      <p:sp>
+        <p:nvSpPr>
+          <p:cNvPr id="9" name="TextBox 8"/>
+          <p:cNvSpPr txBox="1"/>
+          <p:nvPr/>
+        </p:nvSpPr>
+        <p:spPr>
+          <a:xfrm>
+            <a:off x="8046720" y="2560320"/>
+            <a:ext cx="3291840" cy="365760"/>
+          </a:xfrm>
+          <a:prstGeom prst="rect">
+            <a:avLst/>
+          </a:prstGeom>
+          <a:noFill/>
+        </p:spPr>
+        <p:txBody>
+          <a:bodyPr wrap="square" anchor="t" lIns="0" rIns="0" tIns="0" bIns="0"/>
+          <a:lstStyle/>
+          <a:p>
+            <a:pPr algn="l"/>
+            <a:r>
+              <a:rPr sz="1300" b="1" i="0">
+                <a:solidFill>
+                  <a:srgbClr val="A9C8F0"/>
+                </a:solidFill>
+                <a:latin typeface="Calibri"/>
+              </a:rPr>
+              <a:t>EXAMPLE</a:t>
+            </a:r>
+          </a:p>
+        </p:txBody>
+      </p:sp>
+      <p:sp>
+        <p:nvSpPr>
+          <p:cNvPr id="10" name="TextBox 9"/>
+          <p:cNvSpPr txBox="1"/>
+          <p:nvPr/>
+        </p:nvSpPr>
+        <p:spPr>
+          <a:xfrm>
+            <a:off x="8046720" y="2971800"/>
+            <a:ext cx="3291840" cy="2971800"/>
+          </a:xfrm>
+          <a:prstGeom prst="rect">
+            <a:avLst/>
+          </a:prstGeom>
+          <a:noFill/>
+        </p:spPr>
+        <p:txBody>
+          <a:bodyPr wrap="square" anchor="t" lIns="0" rIns="0" tIns="0" bIns="0"/>
+          <a:lstStyle/>
+          <a:p>
+            <a:pPr algn="l"/>
+            <a:r>
+              <a:rPr sz="1900" b="0" i="0">
+                <a:solidFill>
+                  <a:srgbClr val="FFFFFF"/>
+                </a:solidFill>
+                <a:latin typeface="Cambria"/>
+              </a:rPr>
+              <a:t>cursor.execute('SELECT * FROM users WHERE name = ?', (name,)) keeps the input as data, so injection fails.</a:t>
+            </a:r>
+          </a:p>
+        </p:txBody>
+      </p:sp>
+    </p:spTree>
+  </p:cSld>
+  <p:clrMapOvr>
+    <a:masterClrMapping/>
+  </p:clrMapOvr>
+</p:sld>
+</file>
+
+<file path=ppt/slides/slide8.xml><?xml version="1.0" encoding="utf-8"?>
+<p:sld xmlns:a="http://schemas.openxmlformats.org/drawingml/2006/main" xmlns:p="http://schemas.openxmlformats.org/presentationml/2006/main" xmlns:r="http://schemas.openxmlformats.org/officeDocument/2006/relationships">
+  <p:cSld>
+    <p:bg>
+      <p:bgPr>
+        <a:solidFill>
+          <a:srgbClr val="FFFFFF"/>
+        </a:solidFill>
+        <a:effectLst/>
+      </p:bgPr>
+    </p:bg>
+    <p:spTree>
+      <p:nvGrpSpPr>
+        <p:cNvPr id="1" name=""/>
+        <p:cNvGrpSpPr/>
+        <p:nvPr/>
+      </p:nvGrpSpPr>
+      <p:grpSpPr/>
+      <p:sp>
+        <p:nvSpPr>
+          <p:cNvPr id="2" name="TextBox 1"/>
+          <p:cNvSpPr txBox="1"/>
+          <p:nvPr/>
+        </p:nvSpPr>
+        <p:spPr>
+          <a:xfrm>
+            <a:off x="548640" y="320040"/>
+            <a:ext cx="11094415" cy="274320"/>
+          </a:xfrm>
+          <a:prstGeom prst="rect">
+            <a:avLst/>
+          </a:prstGeom>
+          <a:noFill/>
+        </p:spPr>
+        <p:txBody>
+          <a:bodyPr wrap="square" anchor="t" lIns="0" rIns="0" tIns="0" bIns="0"/>
+          <a:lstStyle/>
+          <a:p>
+            <a:pPr algn="l"/>
+            <a:r>
+              <a:rPr sz="1100" b="1" i="0">
+                <a:solidFill>
+                  <a:srgbClr val="54595D"/>
+                </a:solidFill>
+                <a:latin typeface="Calibri"/>
+              </a:rPr>
+              <a:t>CORE COMPONENT  ·  Core Paper 2</a:t>
+            </a:r>
+          </a:p>
+        </p:txBody>
+      </p:sp>
+      <p:sp>
+        <p:nvSpPr>
+          <p:cNvPr id="3" name="TextBox 2"/>
+          <p:cNvSpPr txBox="1"/>
+          <p:nvPr/>
+        </p:nvSpPr>
+        <p:spPr>
+          <a:xfrm>
+            <a:off x="548640" y="566928"/>
+            <a:ext cx="11094415" cy="822960"/>
+          </a:xfrm>
+          <a:prstGeom prst="rect">
+            <a:avLst/>
+          </a:prstGeom>
+          <a:noFill/>
+        </p:spPr>
+        <p:txBody>
+          <a:bodyPr wrap="square" anchor="ctr" lIns="0" rIns="0" tIns="0" bIns="0"/>
+          <a:lstStyle/>
+          <a:p>
+            <a:pPr algn="l"/>
+            <a:r>
+              <a:rPr sz="3200" b="1" i="0">
+                <a:solidFill>
+                  <a:srgbClr val="03306E"/>
+                </a:solidFill>
+                <a:latin typeface="Cambria"/>
+              </a:rPr>
+              <a:t>Developer defences</a:t>
+            </a:r>
+          </a:p>
+        </p:txBody>
+      </p:sp>
+      <p:sp>
+        <p:nvSpPr>
+          <p:cNvPr id="4" name="TextBox 3"/>
+          <p:cNvSpPr txBox="1"/>
+          <p:nvPr/>
+        </p:nvSpPr>
+        <p:spPr>
+          <a:xfrm>
+            <a:off x="548640" y="6446520"/>
+            <a:ext cx="8229600" cy="274320"/>
+          </a:xfrm>
+          <a:prstGeom prst="rect">
+            <a:avLst/>
+          </a:prstGeom>
+          <a:noFill/>
+        </p:spPr>
+        <p:txBody>
+          <a:bodyPr wrap="square" anchor="t" lIns="0" rIns="0" tIns="0" bIns="0"/>
+          <a:lstStyle/>
+          <a:p>
+            <a:pPr algn="l"/>
+            <a:r>
+              <a:rPr sz="1000" b="0" i="0">
+                <a:solidFill>
+                  <a:srgbClr val="54595D"/>
+                </a:solidFill>
+                <a:latin typeface="Calibri"/>
+              </a:rPr>
+              <a:t>Digital Software Development T Level  ·  Security Threats and Vulnerabilities</a:t>
+            </a:r>
+          </a:p>
+        </p:txBody>
+      </p:sp>
+      <p:sp>
+        <p:nvSpPr>
+          <p:cNvPr id="5" name="TextBox 4"/>
+          <p:cNvSpPr txBox="1"/>
+          <p:nvPr/>
+        </p:nvSpPr>
+        <p:spPr>
+          <a:xfrm>
+            <a:off x="10728655" y="6446520"/>
+            <a:ext cx="914400" cy="274320"/>
+          </a:xfrm>
+          <a:prstGeom prst="rect">
+            <a:avLst/>
+          </a:prstGeom>
+          <a:noFill/>
+        </p:spPr>
+        <p:txBody>
+          <a:bodyPr wrap="square" anchor="t" lIns="0" rIns="0" tIns="0" bIns="0"/>
+          <a:lstStyle/>
+          <a:p>
+            <a:pPr algn="r"/>
+            <a:r>
+              <a:rPr sz="1000" b="0" i="0">
+                <a:solidFill>
+                  <a:srgbClr val="54595D"/>
+                </a:solidFill>
+                <a:latin typeface="Calibri"/>
+              </a:rPr>
+              <a:t>8</a:t>
             </a:r>
           </a:p>
         </p:txBody>
@@ -7433,1704 +12250,6 @@
 </p:sld>
 </file>
 
-<file path=ppt/slides/slide6.xml><?xml version="1.0" encoding="utf-8"?>
-<p:sld xmlns:a="http://schemas.openxmlformats.org/drawingml/2006/main" xmlns:p="http://schemas.openxmlformats.org/presentationml/2006/main" xmlns:r="http://schemas.openxmlformats.org/officeDocument/2006/relationships">
-  <p:cSld>
-    <p:bg>
-      <p:bgPr>
-        <a:solidFill>
-          <a:srgbClr val="FFFFFF"/>
-        </a:solidFill>
-        <a:effectLst/>
-      </p:bgPr>
-    </p:bg>
-    <p:spTree>
-      <p:nvGrpSpPr>
-        <p:cNvPr id="1" name=""/>
-        <p:cNvGrpSpPr/>
-        <p:nvPr/>
-      </p:nvGrpSpPr>
-      <p:grpSpPr/>
-      <p:sp>
-        <p:nvSpPr>
-          <p:cNvPr id="2" name="TextBox 1"/>
-          <p:cNvSpPr txBox="1"/>
-          <p:nvPr/>
-        </p:nvSpPr>
-        <p:spPr>
-          <a:xfrm>
-            <a:off x="548640" y="320040"/>
-            <a:ext cx="11094415" cy="274320"/>
-          </a:xfrm>
-          <a:prstGeom prst="rect">
-            <a:avLst/>
-          </a:prstGeom>
-          <a:noFill/>
-        </p:spPr>
-        <p:txBody>
-          <a:bodyPr wrap="square" anchor="t" lIns="0" rIns="0" tIns="0" bIns="0"/>
-          <a:lstStyle/>
-          <a:p>
-            <a:pPr algn="l"/>
-            <a:r>
-              <a:rPr sz="1100" b="1" i="0">
-                <a:solidFill>
-                  <a:srgbClr val="54595D"/>
-                </a:solidFill>
-                <a:latin typeface="Calibri"/>
-              </a:rPr>
-              <a:t>CORE COMPONENT  ·  Core Paper 2</a:t>
-            </a:r>
-          </a:p>
-        </p:txBody>
-      </p:sp>
-      <p:sp>
-        <p:nvSpPr>
-          <p:cNvPr id="3" name="TextBox 2"/>
-          <p:cNvSpPr txBox="1"/>
-          <p:nvPr/>
-        </p:nvSpPr>
-        <p:spPr>
-          <a:xfrm>
-            <a:off x="548640" y="566928"/>
-            <a:ext cx="11094415" cy="822960"/>
-          </a:xfrm>
-          <a:prstGeom prst="rect">
-            <a:avLst/>
-          </a:prstGeom>
-          <a:noFill/>
-        </p:spPr>
-        <p:txBody>
-          <a:bodyPr wrap="square" anchor="ctr" lIns="0" rIns="0" tIns="0" bIns="0"/>
-          <a:lstStyle/>
-          <a:p>
-            <a:pPr algn="l"/>
-            <a:r>
-              <a:rPr sz="3200" b="1" i="0">
-                <a:solidFill>
-                  <a:srgbClr val="03306E"/>
-                </a:solidFill>
-                <a:latin typeface="Cambria"/>
-              </a:rPr>
-              <a:t>Human and physical risks</a:t>
-            </a:r>
-          </a:p>
-        </p:txBody>
-      </p:sp>
-      <p:sp>
-        <p:nvSpPr>
-          <p:cNvPr id="4" name="TextBox 3"/>
-          <p:cNvSpPr txBox="1"/>
-          <p:nvPr/>
-        </p:nvSpPr>
-        <p:spPr>
-          <a:xfrm>
-            <a:off x="548640" y="6446520"/>
-            <a:ext cx="8229600" cy="274320"/>
-          </a:xfrm>
-          <a:prstGeom prst="rect">
-            <a:avLst/>
-          </a:prstGeom>
-          <a:noFill/>
-        </p:spPr>
-        <p:txBody>
-          <a:bodyPr wrap="square" anchor="t" lIns="0" rIns="0" tIns="0" bIns="0"/>
-          <a:lstStyle/>
-          <a:p>
-            <a:pPr algn="l"/>
-            <a:r>
-              <a:rPr sz="1000" b="0" i="0">
-                <a:solidFill>
-                  <a:srgbClr val="54595D"/>
-                </a:solidFill>
-                <a:latin typeface="Calibri"/>
-              </a:rPr>
-              <a:t>Digital Software Development T Level  ·  Security Threats and Vulnerabilities</a:t>
-            </a:r>
-          </a:p>
-        </p:txBody>
-      </p:sp>
-      <p:sp>
-        <p:nvSpPr>
-          <p:cNvPr id="5" name="TextBox 4"/>
-          <p:cNvSpPr txBox="1"/>
-          <p:nvPr/>
-        </p:nvSpPr>
-        <p:spPr>
-          <a:xfrm>
-            <a:off x="10728655" y="6446520"/>
-            <a:ext cx="914400" cy="274320"/>
-          </a:xfrm>
-          <a:prstGeom prst="rect">
-            <a:avLst/>
-          </a:prstGeom>
-          <a:noFill/>
-        </p:spPr>
-        <p:txBody>
-          <a:bodyPr wrap="square" anchor="t" lIns="0" rIns="0" tIns="0" bIns="0"/>
-          <a:lstStyle/>
-          <a:p>
-            <a:pPr algn="r"/>
-            <a:r>
-              <a:rPr sz="1000" b="0" i="0">
-                <a:solidFill>
-                  <a:srgbClr val="54595D"/>
-                </a:solidFill>
-                <a:latin typeface="Calibri"/>
-              </a:rPr>
-              <a:t>6</a:t>
-            </a:r>
-          </a:p>
-        </p:txBody>
-      </p:sp>
-      <p:sp>
-        <p:nvSpPr>
-          <p:cNvPr id="6" name="Rounded Rectangle 5"/>
-          <p:cNvSpPr/>
-          <p:nvPr/>
-        </p:nvSpPr>
-        <p:spPr>
-          <a:xfrm>
-            <a:off x="548640" y="1600200"/>
-            <a:ext cx="5364327" cy="640080"/>
-          </a:xfrm>
-          <a:prstGeom prst="roundRect">
-            <a:avLst>
-              <a:gd name="adj" fmla="val 15000"/>
-            </a:avLst>
-          </a:prstGeom>
-          <a:solidFill>
-            <a:srgbClr val="03306E"/>
-          </a:solidFill>
-          <a:ln>
-            <a:noFill/>
-          </a:ln>
-          <a:effectLst/>
-        </p:spPr>
-        <p:style>
-          <a:lnRef idx="1">
-            <a:schemeClr val="accent1"/>
-          </a:lnRef>
-          <a:fillRef idx="3">
-            <a:schemeClr val="accent1"/>
-          </a:fillRef>
-          <a:effectRef idx="2">
-            <a:schemeClr val="accent1"/>
-          </a:effectRef>
-          <a:fontRef idx="minor">
-            <a:schemeClr val="lt1"/>
-          </a:fontRef>
-        </p:style>
-        <p:txBody>
-          <a:bodyPr rtlCol="0" anchor="ctr"/>
-          <a:lstStyle/>
-          <a:p/>
-        </p:txBody>
-      </p:sp>
-      <p:sp>
-        <p:nvSpPr>
-          <p:cNvPr id="7" name="TextBox 6"/>
-          <p:cNvSpPr txBox="1"/>
-          <p:nvPr/>
-        </p:nvSpPr>
-        <p:spPr>
-          <a:xfrm>
-            <a:off x="777240" y="1600200"/>
-            <a:ext cx="4907127" cy="640080"/>
-          </a:xfrm>
-          <a:prstGeom prst="rect">
-            <a:avLst/>
-          </a:prstGeom>
-          <a:noFill/>
-        </p:spPr>
-        <p:txBody>
-          <a:bodyPr wrap="square" anchor="ctr" lIns="0" rIns="0" tIns="0" bIns="0"/>
-          <a:lstStyle/>
-          <a:p>
-            <a:pPr algn="l"/>
-            <a:r>
-              <a:rPr sz="2000" b="1" i="0">
-                <a:solidFill>
-                  <a:srgbClr val="FFFFFF"/>
-                </a:solidFill>
-                <a:latin typeface="Calibri"/>
-              </a:rPr>
-              <a:t>Human threats</a:t>
-            </a:r>
-          </a:p>
-        </p:txBody>
-      </p:sp>
-      <p:sp>
-        <p:nvSpPr>
-          <p:cNvPr id="8" name="Rounded Rectangle 7"/>
-          <p:cNvSpPr/>
-          <p:nvPr/>
-        </p:nvSpPr>
-        <p:spPr>
-          <a:xfrm>
-            <a:off x="548640" y="2377440"/>
-            <a:ext cx="5364327" cy="3794760"/>
-          </a:xfrm>
-          <a:prstGeom prst="roundRect">
-            <a:avLst>
-              <a:gd name="adj" fmla="val 4000"/>
-            </a:avLst>
-          </a:prstGeom>
-          <a:solidFill>
-            <a:srgbClr val="EAF3FF"/>
-          </a:solidFill>
-          <a:ln>
-            <a:noFill/>
-          </a:ln>
-          <a:effectLst/>
-        </p:spPr>
-        <p:style>
-          <a:lnRef idx="1">
-            <a:schemeClr val="accent1"/>
-          </a:lnRef>
-          <a:fillRef idx="3">
-            <a:schemeClr val="accent1"/>
-          </a:fillRef>
-          <a:effectRef idx="2">
-            <a:schemeClr val="accent1"/>
-          </a:effectRef>
-          <a:fontRef idx="minor">
-            <a:schemeClr val="lt1"/>
-          </a:fontRef>
-        </p:style>
-        <p:txBody>
-          <a:bodyPr rtlCol="0" anchor="ctr"/>
-          <a:lstStyle/>
-          <a:p/>
-        </p:txBody>
-      </p:sp>
-      <p:sp>
-        <p:nvSpPr>
-          <p:cNvPr id="9" name="TextBox 8"/>
-          <p:cNvSpPr txBox="1"/>
-          <p:nvPr/>
-        </p:nvSpPr>
-        <p:spPr>
-          <a:xfrm>
-            <a:off x="822959" y="2606040"/>
-            <a:ext cx="4815687" cy="3337560"/>
-          </a:xfrm>
-          <a:prstGeom prst="rect">
-            <a:avLst/>
-          </a:prstGeom>
-          <a:noFill/>
-        </p:spPr>
-        <p:txBody>
-          <a:bodyPr wrap="square" lIns="0" rIns="0" tIns="0" bIns="0">
-            <a:spAutoFit/>
-          </a:bodyPr>
-          <a:lstStyle/>
-          <a:p>
-            <a:pPr marL="274320" indent="-274320">
-              <a:spcAft>
-                <a:spcPts val="990"/>
-              </a:spcAft>
-              <a:buClr>
-                <a:srgbClr val="0645AD"/>
-              </a:buClr>
-              <a:buFont typeface="Arial"/>
-              <a:buChar char="•"/>
-            </a:pPr>
-            <a:r>
-              <a:rPr sz="2200" b="1">
-                <a:solidFill>
-                  <a:srgbClr val="202122"/>
-                </a:solidFill>
-                <a:latin typeface="Calibri"/>
-              </a:rPr>
-              <a:t>Human error:</a:t>
-            </a:r>
-            <a:r>
-              <a:rPr sz="2200" b="0">
-                <a:solidFill>
-                  <a:srgbClr val="202122"/>
-                </a:solidFill>
-                <a:latin typeface="Calibri"/>
-              </a:rPr>
-              <a:t> confirmation boxes, training</a:t>
-            </a:r>
-          </a:p>
-          <a:p>
-            <a:pPr marL="274320" indent="-274320">
-              <a:spcAft>
-                <a:spcPts val="990"/>
-              </a:spcAft>
-              <a:buClr>
-                <a:srgbClr val="0645AD"/>
-              </a:buClr>
-              <a:buFont typeface="Arial"/>
-              <a:buChar char="•"/>
-            </a:pPr>
-            <a:r>
-              <a:rPr sz="2200" b="1">
-                <a:solidFill>
-                  <a:srgbClr val="202122"/>
-                </a:solidFill>
-                <a:latin typeface="Calibri"/>
-              </a:rPr>
-              <a:t>Malicious employees:</a:t>
-            </a:r>
-            <a:r>
-              <a:rPr sz="2200" b="0">
-                <a:solidFill>
-                  <a:srgbClr val="202122"/>
-                </a:solidFill>
-                <a:latin typeface="Calibri"/>
-              </a:rPr>
-              <a:t> remove access fast</a:t>
-            </a:r>
-          </a:p>
-          <a:p>
-            <a:pPr marL="274320" indent="-274320">
-              <a:spcAft>
-                <a:spcPts val="990"/>
-              </a:spcAft>
-              <a:buClr>
-                <a:srgbClr val="0645AD"/>
-              </a:buClr>
-              <a:buFont typeface="Arial"/>
-              <a:buChar char="•"/>
-            </a:pPr>
-            <a:r>
-              <a:rPr sz="2200" b="1">
-                <a:solidFill>
-                  <a:srgbClr val="202122"/>
-                </a:solidFill>
-                <a:latin typeface="Calibri"/>
-              </a:rPr>
-              <a:t>Disguised criminals:</a:t>
-            </a:r>
-            <a:r>
-              <a:rPr sz="2200" b="0">
-                <a:solidFill>
-                  <a:srgbClr val="202122"/>
-                </a:solidFill>
-                <a:latin typeface="Calibri"/>
-              </a:rPr>
-              <a:t> ID checks, escorts</a:t>
-            </a:r>
-          </a:p>
-          <a:p>
-            <a:pPr marL="274320" indent="-274320">
-              <a:spcAft>
-                <a:spcPts val="990"/>
-              </a:spcAft>
-              <a:buClr>
-                <a:srgbClr val="0645AD"/>
-              </a:buClr>
-              <a:buFont typeface="Arial"/>
-              <a:buChar char="•"/>
-            </a:pPr>
-            <a:r>
-              <a:rPr sz="2200" b="1">
-                <a:solidFill>
-                  <a:srgbClr val="202122"/>
-                </a:solidFill>
-                <a:latin typeface="Calibri"/>
-              </a:rPr>
-              <a:t>Poor cyber hygiene:</a:t>
-            </a:r>
-            <a:r>
-              <a:rPr sz="2200" b="0">
-                <a:solidFill>
-                  <a:srgbClr val="202122"/>
-                </a:solidFill>
-                <a:latin typeface="Calibri"/>
-              </a:rPr>
-              <a:t> lock screens, password managers</a:t>
-            </a:r>
-          </a:p>
-        </p:txBody>
-      </p:sp>
-      <p:sp>
-        <p:nvSpPr>
-          <p:cNvPr id="10" name="Rounded Rectangle 9"/>
-          <p:cNvSpPr/>
-          <p:nvPr/>
-        </p:nvSpPr>
-        <p:spPr>
-          <a:xfrm>
-            <a:off x="6278727" y="1600200"/>
-            <a:ext cx="5364327" cy="640080"/>
-          </a:xfrm>
-          <a:prstGeom prst="roundRect">
-            <a:avLst>
-              <a:gd name="adj" fmla="val 15000"/>
-            </a:avLst>
-          </a:prstGeom>
-          <a:solidFill>
-            <a:srgbClr val="0645AD"/>
-          </a:solidFill>
-          <a:ln>
-            <a:noFill/>
-          </a:ln>
-          <a:effectLst/>
-        </p:spPr>
-        <p:style>
-          <a:lnRef idx="1">
-            <a:schemeClr val="accent1"/>
-          </a:lnRef>
-          <a:fillRef idx="3">
-            <a:schemeClr val="accent1"/>
-          </a:fillRef>
-          <a:effectRef idx="2">
-            <a:schemeClr val="accent1"/>
-          </a:effectRef>
-          <a:fontRef idx="minor">
-            <a:schemeClr val="lt1"/>
-          </a:fontRef>
-        </p:style>
-        <p:txBody>
-          <a:bodyPr rtlCol="0" anchor="ctr"/>
-          <a:lstStyle/>
-          <a:p/>
-        </p:txBody>
-      </p:sp>
-      <p:sp>
-        <p:nvSpPr>
-          <p:cNvPr id="11" name="TextBox 10"/>
-          <p:cNvSpPr txBox="1"/>
-          <p:nvPr/>
-        </p:nvSpPr>
-        <p:spPr>
-          <a:xfrm>
-            <a:off x="6507327" y="1600200"/>
-            <a:ext cx="4907127" cy="640080"/>
-          </a:xfrm>
-          <a:prstGeom prst="rect">
-            <a:avLst/>
-          </a:prstGeom>
-          <a:noFill/>
-        </p:spPr>
-        <p:txBody>
-          <a:bodyPr wrap="square" anchor="ctr" lIns="0" rIns="0" tIns="0" bIns="0"/>
-          <a:lstStyle/>
-          <a:p>
-            <a:pPr algn="l"/>
-            <a:r>
-              <a:rPr sz="2000" b="1" i="0">
-                <a:solidFill>
-                  <a:srgbClr val="FFFFFF"/>
-                </a:solidFill>
-                <a:latin typeface="Calibri"/>
-              </a:rPr>
-              <a:t>Vulnerabilities</a:t>
-            </a:r>
-          </a:p>
-        </p:txBody>
-      </p:sp>
-      <p:sp>
-        <p:nvSpPr>
-          <p:cNvPr id="12" name="Rounded Rectangle 11"/>
-          <p:cNvSpPr/>
-          <p:nvPr/>
-        </p:nvSpPr>
-        <p:spPr>
-          <a:xfrm>
-            <a:off x="6278727" y="2377440"/>
-            <a:ext cx="5364327" cy="3794760"/>
-          </a:xfrm>
-          <a:prstGeom prst="roundRect">
-            <a:avLst>
-              <a:gd name="adj" fmla="val 4000"/>
-            </a:avLst>
-          </a:prstGeom>
-          <a:solidFill>
-            <a:srgbClr val="EAF3FF"/>
-          </a:solidFill>
-          <a:ln>
-            <a:noFill/>
-          </a:ln>
-          <a:effectLst/>
-        </p:spPr>
-        <p:style>
-          <a:lnRef idx="1">
-            <a:schemeClr val="accent1"/>
-          </a:lnRef>
-          <a:fillRef idx="3">
-            <a:schemeClr val="accent1"/>
-          </a:fillRef>
-          <a:effectRef idx="2">
-            <a:schemeClr val="accent1"/>
-          </a:effectRef>
-          <a:fontRef idx="minor">
-            <a:schemeClr val="lt1"/>
-          </a:fontRef>
-        </p:style>
-        <p:txBody>
-          <a:bodyPr rtlCol="0" anchor="ctr"/>
-          <a:lstStyle/>
-          <a:p/>
-        </p:txBody>
-      </p:sp>
-      <p:sp>
-        <p:nvSpPr>
-          <p:cNvPr id="13" name="TextBox 12"/>
-          <p:cNvSpPr txBox="1"/>
-          <p:nvPr/>
-        </p:nvSpPr>
-        <p:spPr>
-          <a:xfrm>
-            <a:off x="6553047" y="2606040"/>
-            <a:ext cx="4815687" cy="3337560"/>
-          </a:xfrm>
-          <a:prstGeom prst="rect">
-            <a:avLst/>
-          </a:prstGeom>
-          <a:noFill/>
-        </p:spPr>
-        <p:txBody>
-          <a:bodyPr wrap="square" lIns="0" rIns="0" tIns="0" bIns="0">
-            <a:spAutoFit/>
-          </a:bodyPr>
-          <a:lstStyle/>
-          <a:p>
-            <a:pPr marL="274320" indent="-274320">
-              <a:spcAft>
-                <a:spcPts val="990"/>
-              </a:spcAft>
-              <a:buClr>
-                <a:srgbClr val="0645AD"/>
-              </a:buClr>
-              <a:buFont typeface="Arial"/>
-              <a:buChar char="•"/>
-            </a:pPr>
-            <a:r>
-              <a:rPr sz="2200" b="0">
-                <a:solidFill>
-                  <a:srgbClr val="202122"/>
-                </a:solidFill>
-                <a:latin typeface="Calibri"/>
-              </a:rPr>
-              <a:t>Weak encryption, poor password policy, no MFA</a:t>
-            </a:r>
-          </a:p>
-          <a:p>
-            <a:pPr marL="274320" indent="-274320">
-              <a:spcAft>
-                <a:spcPts val="990"/>
-              </a:spcAft>
-              <a:buClr>
-                <a:srgbClr val="0645AD"/>
-              </a:buClr>
-              <a:buFont typeface="Arial"/>
-              <a:buChar char="•"/>
-            </a:pPr>
-            <a:r>
-              <a:rPr sz="2200" b="0">
-                <a:solidFill>
-                  <a:srgbClr val="202122"/>
-                </a:solidFill>
-                <a:latin typeface="Calibri"/>
-              </a:rPr>
-              <a:t>Out-of-date software and firmware, zero-days</a:t>
-            </a:r>
-          </a:p>
-          <a:p>
-            <a:pPr marL="274320" indent="-274320">
-              <a:spcAft>
-                <a:spcPts val="990"/>
-              </a:spcAft>
-              <a:buClr>
-                <a:srgbClr val="0645AD"/>
-              </a:buClr>
-              <a:buFont typeface="Arial"/>
-              <a:buChar char="•"/>
-            </a:pPr>
-            <a:r>
-              <a:rPr sz="2200" b="0">
-                <a:solidFill>
-                  <a:srgbClr val="202122"/>
-                </a:solidFill>
-                <a:latin typeface="Calibri"/>
-              </a:rPr>
-              <a:t>Poor physical access control, shoulder surfing</a:t>
-            </a:r>
-          </a:p>
-          <a:p>
-            <a:pPr marL="274320" indent="-274320">
-              <a:spcAft>
-                <a:spcPts val="990"/>
-              </a:spcAft>
-              <a:buClr>
-                <a:srgbClr val="0645AD"/>
-              </a:buClr>
-              <a:buFont typeface="Arial"/>
-              <a:buChar char="•"/>
-            </a:pPr>
-            <a:r>
-              <a:rPr sz="2200" b="0">
-                <a:solidFill>
-                  <a:srgbClr val="202122"/>
-                </a:solidFill>
-                <a:latin typeface="Calibri"/>
-              </a:rPr>
-              <a:t>Natural disasters</a:t>
-            </a:r>
-          </a:p>
-        </p:txBody>
-      </p:sp>
-    </p:spTree>
-  </p:cSld>
-  <p:clrMapOvr>
-    <a:masterClrMapping/>
-  </p:clrMapOvr>
-</p:sld>
-</file>
-
-<file path=ppt/slides/slide7.xml><?xml version="1.0" encoding="utf-8"?>
-<p:sld xmlns:a="http://schemas.openxmlformats.org/drawingml/2006/main" xmlns:p="http://schemas.openxmlformats.org/presentationml/2006/main" xmlns:r="http://schemas.openxmlformats.org/officeDocument/2006/relationships">
-  <p:cSld>
-    <p:bg>
-      <p:bgPr>
-        <a:solidFill>
-          <a:srgbClr val="FFFFFF"/>
-        </a:solidFill>
-        <a:effectLst/>
-      </p:bgPr>
-    </p:bg>
-    <p:spTree>
-      <p:nvGrpSpPr>
-        <p:cNvPr id="1" name=""/>
-        <p:cNvGrpSpPr/>
-        <p:nvPr/>
-      </p:nvGrpSpPr>
-      <p:grpSpPr/>
-      <p:sp>
-        <p:nvSpPr>
-          <p:cNvPr id="2" name="TextBox 1"/>
-          <p:cNvSpPr txBox="1"/>
-          <p:nvPr/>
-        </p:nvSpPr>
-        <p:spPr>
-          <a:xfrm>
-            <a:off x="548640" y="320040"/>
-            <a:ext cx="11094415" cy="274320"/>
-          </a:xfrm>
-          <a:prstGeom prst="rect">
-            <a:avLst/>
-          </a:prstGeom>
-          <a:noFill/>
-        </p:spPr>
-        <p:txBody>
-          <a:bodyPr wrap="square" anchor="t" lIns="0" rIns="0" tIns="0" bIns="0"/>
-          <a:lstStyle/>
-          <a:p>
-            <a:pPr algn="l"/>
-            <a:r>
-              <a:rPr sz="1100" b="1" i="0">
-                <a:solidFill>
-                  <a:srgbClr val="54595D"/>
-                </a:solidFill>
-                <a:latin typeface="Calibri"/>
-              </a:rPr>
-              <a:t>CORE COMPONENT  ·  Core Paper 2</a:t>
-            </a:r>
-          </a:p>
-        </p:txBody>
-      </p:sp>
-      <p:sp>
-        <p:nvSpPr>
-          <p:cNvPr id="3" name="TextBox 2"/>
-          <p:cNvSpPr txBox="1"/>
-          <p:nvPr/>
-        </p:nvSpPr>
-        <p:spPr>
-          <a:xfrm>
-            <a:off x="548640" y="566928"/>
-            <a:ext cx="11094415" cy="822960"/>
-          </a:xfrm>
-          <a:prstGeom prst="rect">
-            <a:avLst/>
-          </a:prstGeom>
-          <a:noFill/>
-        </p:spPr>
-        <p:txBody>
-          <a:bodyPr wrap="square" anchor="ctr" lIns="0" rIns="0" tIns="0" bIns="0"/>
-          <a:lstStyle/>
-          <a:p>
-            <a:pPr algn="l"/>
-            <a:r>
-              <a:rPr sz="3200" b="1" i="0">
-                <a:solidFill>
-                  <a:srgbClr val="03306E"/>
-                </a:solidFill>
-                <a:latin typeface="Cambria"/>
-              </a:rPr>
-              <a:t>Check your understanding</a:t>
-            </a:r>
-          </a:p>
-        </p:txBody>
-      </p:sp>
-      <p:sp>
-        <p:nvSpPr>
-          <p:cNvPr id="4" name="TextBox 3"/>
-          <p:cNvSpPr txBox="1"/>
-          <p:nvPr/>
-        </p:nvSpPr>
-        <p:spPr>
-          <a:xfrm>
-            <a:off x="548640" y="6446520"/>
-            <a:ext cx="8229600" cy="274320"/>
-          </a:xfrm>
-          <a:prstGeom prst="rect">
-            <a:avLst/>
-          </a:prstGeom>
-          <a:noFill/>
-        </p:spPr>
-        <p:txBody>
-          <a:bodyPr wrap="square" anchor="t" lIns="0" rIns="0" tIns="0" bIns="0"/>
-          <a:lstStyle/>
-          <a:p>
-            <a:pPr algn="l"/>
-            <a:r>
-              <a:rPr sz="1000" b="0" i="0">
-                <a:solidFill>
-                  <a:srgbClr val="54595D"/>
-                </a:solidFill>
-                <a:latin typeface="Calibri"/>
-              </a:rPr>
-              <a:t>Digital Software Development T Level  ·  Security Threats and Vulnerabilities</a:t>
-            </a:r>
-          </a:p>
-        </p:txBody>
-      </p:sp>
-      <p:sp>
-        <p:nvSpPr>
-          <p:cNvPr id="5" name="TextBox 4"/>
-          <p:cNvSpPr txBox="1"/>
-          <p:nvPr/>
-        </p:nvSpPr>
-        <p:spPr>
-          <a:xfrm>
-            <a:off x="10728655" y="6446520"/>
-            <a:ext cx="914400" cy="274320"/>
-          </a:xfrm>
-          <a:prstGeom prst="rect">
-            <a:avLst/>
-          </a:prstGeom>
-          <a:noFill/>
-        </p:spPr>
-        <p:txBody>
-          <a:bodyPr wrap="square" anchor="t" lIns="0" rIns="0" tIns="0" bIns="0"/>
-          <a:lstStyle/>
-          <a:p>
-            <a:pPr algn="r"/>
-            <a:r>
-              <a:rPr sz="1000" b="0" i="0">
-                <a:solidFill>
-                  <a:srgbClr val="54595D"/>
-                </a:solidFill>
-                <a:latin typeface="Calibri"/>
-              </a:rPr>
-              <a:t>7</a:t>
-            </a:r>
-          </a:p>
-        </p:txBody>
-      </p:sp>
-      <p:sp>
-        <p:nvSpPr>
-          <p:cNvPr id="6" name="Oval 5"/>
-          <p:cNvSpPr/>
-          <p:nvPr/>
-        </p:nvSpPr>
-        <p:spPr>
-          <a:xfrm>
-            <a:off x="548640" y="1618488"/>
-            <a:ext cx="411480" cy="411480"/>
-          </a:xfrm>
-          <a:prstGeom prst="ellipse">
-            <a:avLst/>
-          </a:prstGeom>
-          <a:solidFill>
-            <a:srgbClr val="F2B705"/>
-          </a:solidFill>
-          <a:ln>
-            <a:noFill/>
-          </a:ln>
-          <a:effectLst/>
-        </p:spPr>
-        <p:style>
-          <a:lnRef idx="1">
-            <a:schemeClr val="accent1"/>
-          </a:lnRef>
-          <a:fillRef idx="3">
-            <a:schemeClr val="accent1"/>
-          </a:fillRef>
-          <a:effectRef idx="2">
-            <a:schemeClr val="accent1"/>
-          </a:effectRef>
-          <a:fontRef idx="minor">
-            <a:schemeClr val="lt1"/>
-          </a:fontRef>
-        </p:style>
-        <p:txBody>
-          <a:bodyPr rtlCol="0" anchor="ctr" lIns="0" rIns="0" tIns="0" bIns="0"/>
-          <a:lstStyle/>
-          <a:p>
-            <a:pPr algn="ctr"/>
-            <a:r>
-              <a:rPr sz="1400" b="1">
-                <a:solidFill>
-                  <a:srgbClr val="202122"/>
-                </a:solidFill>
-                <a:latin typeface="Calibri"/>
-              </a:rPr>
-              <a:t>1</a:t>
-            </a:r>
-          </a:p>
-        </p:txBody>
-      </p:sp>
-      <p:sp>
-        <p:nvSpPr>
-          <p:cNvPr id="7" name="TextBox 6"/>
-          <p:cNvSpPr txBox="1"/>
-          <p:nvPr/>
-        </p:nvSpPr>
-        <p:spPr>
-          <a:xfrm>
-            <a:off x="1234440" y="1600200"/>
-            <a:ext cx="10408615" cy="1030986"/>
-          </a:xfrm>
-          <a:prstGeom prst="rect">
-            <a:avLst/>
-          </a:prstGeom>
-          <a:noFill/>
-        </p:spPr>
-        <p:txBody>
-          <a:bodyPr wrap="square" anchor="t" lIns="0" rIns="0" tIns="0" bIns="0"/>
-          <a:lstStyle/>
-          <a:p>
-            <a:pPr algn="l"/>
-            <a:r>
-              <a:rPr sz="2200" b="0" i="0">
-                <a:solidFill>
-                  <a:srgbClr val="202122"/>
-                </a:solidFill>
-                <a:latin typeface="Calibri"/>
-              </a:rPr>
-              <a:t>How do you prevent SQL injection?</a:t>
-            </a:r>
-          </a:p>
-        </p:txBody>
-      </p:sp>
-      <p:sp>
-        <p:nvSpPr>
-          <p:cNvPr id="8" name="Oval 7"/>
-          <p:cNvSpPr/>
-          <p:nvPr/>
-        </p:nvSpPr>
-        <p:spPr>
-          <a:xfrm>
-            <a:off x="548640" y="2814066"/>
-            <a:ext cx="411480" cy="411480"/>
-          </a:xfrm>
-          <a:prstGeom prst="ellipse">
-            <a:avLst/>
-          </a:prstGeom>
-          <a:solidFill>
-            <a:srgbClr val="F2B705"/>
-          </a:solidFill>
-          <a:ln>
-            <a:noFill/>
-          </a:ln>
-          <a:effectLst/>
-        </p:spPr>
-        <p:style>
-          <a:lnRef idx="1">
-            <a:schemeClr val="accent1"/>
-          </a:lnRef>
-          <a:fillRef idx="3">
-            <a:schemeClr val="accent1"/>
-          </a:fillRef>
-          <a:effectRef idx="2">
-            <a:schemeClr val="accent1"/>
-          </a:effectRef>
-          <a:fontRef idx="minor">
-            <a:schemeClr val="lt1"/>
-          </a:fontRef>
-        </p:style>
-        <p:txBody>
-          <a:bodyPr rtlCol="0" anchor="ctr" lIns="0" rIns="0" tIns="0" bIns="0"/>
-          <a:lstStyle/>
-          <a:p>
-            <a:pPr algn="ctr"/>
-            <a:r>
-              <a:rPr sz="1400" b="1">
-                <a:solidFill>
-                  <a:srgbClr val="202122"/>
-                </a:solidFill>
-                <a:latin typeface="Calibri"/>
-              </a:rPr>
-              <a:t>2</a:t>
-            </a:r>
-          </a:p>
-        </p:txBody>
-      </p:sp>
-      <p:sp>
-        <p:nvSpPr>
-          <p:cNvPr id="9" name="TextBox 8"/>
-          <p:cNvSpPr txBox="1"/>
-          <p:nvPr/>
-        </p:nvSpPr>
-        <p:spPr>
-          <a:xfrm>
-            <a:off x="1234440" y="2795778"/>
-            <a:ext cx="10408615" cy="1030986"/>
-          </a:xfrm>
-          <a:prstGeom prst="rect">
-            <a:avLst/>
-          </a:prstGeom>
-          <a:noFill/>
-        </p:spPr>
-        <p:txBody>
-          <a:bodyPr wrap="square" anchor="t" lIns="0" rIns="0" tIns="0" bIns="0"/>
-          <a:lstStyle/>
-          <a:p>
-            <a:pPr algn="l"/>
-            <a:r>
-              <a:rPr sz="2200" b="0" i="0">
-                <a:solidFill>
-                  <a:srgbClr val="202122"/>
-                </a:solidFill>
-                <a:latin typeface="Calibri"/>
-              </a:rPr>
-              <a:t>What is spear phishing?</a:t>
-            </a:r>
-          </a:p>
-        </p:txBody>
-      </p:sp>
-      <p:sp>
-        <p:nvSpPr>
-          <p:cNvPr id="10" name="Oval 9"/>
-          <p:cNvSpPr/>
-          <p:nvPr/>
-        </p:nvSpPr>
-        <p:spPr>
-          <a:xfrm>
-            <a:off x="548640" y="4009644"/>
-            <a:ext cx="411480" cy="411480"/>
-          </a:xfrm>
-          <a:prstGeom prst="ellipse">
-            <a:avLst/>
-          </a:prstGeom>
-          <a:solidFill>
-            <a:srgbClr val="F2B705"/>
-          </a:solidFill>
-          <a:ln>
-            <a:noFill/>
-          </a:ln>
-          <a:effectLst/>
-        </p:spPr>
-        <p:style>
-          <a:lnRef idx="1">
-            <a:schemeClr val="accent1"/>
-          </a:lnRef>
-          <a:fillRef idx="3">
-            <a:schemeClr val="accent1"/>
-          </a:fillRef>
-          <a:effectRef idx="2">
-            <a:schemeClr val="accent1"/>
-          </a:effectRef>
-          <a:fontRef idx="minor">
-            <a:schemeClr val="lt1"/>
-          </a:fontRef>
-        </p:style>
-        <p:txBody>
-          <a:bodyPr rtlCol="0" anchor="ctr" lIns="0" rIns="0" tIns="0" bIns="0"/>
-          <a:lstStyle/>
-          <a:p>
-            <a:pPr algn="ctr"/>
-            <a:r>
-              <a:rPr sz="1400" b="1">
-                <a:solidFill>
-                  <a:srgbClr val="202122"/>
-                </a:solidFill>
-                <a:latin typeface="Calibri"/>
-              </a:rPr>
-              <a:t>3</a:t>
-            </a:r>
-          </a:p>
-        </p:txBody>
-      </p:sp>
-      <p:sp>
-        <p:nvSpPr>
-          <p:cNvPr id="11" name="TextBox 10"/>
-          <p:cNvSpPr txBox="1"/>
-          <p:nvPr/>
-        </p:nvSpPr>
-        <p:spPr>
-          <a:xfrm>
-            <a:off x="1234440" y="3991356"/>
-            <a:ext cx="10408615" cy="1030986"/>
-          </a:xfrm>
-          <a:prstGeom prst="rect">
-            <a:avLst/>
-          </a:prstGeom>
-          <a:noFill/>
-        </p:spPr>
-        <p:txBody>
-          <a:bodyPr wrap="square" anchor="t" lIns="0" rIns="0" tIns="0" bIns="0"/>
-          <a:lstStyle/>
-          <a:p>
-            <a:pPr algn="l"/>
-            <a:r>
-              <a:rPr sz="2200" b="0" i="0">
-                <a:solidFill>
-                  <a:srgbClr val="202122"/>
-                </a:solidFill>
-                <a:latin typeface="Calibri"/>
-              </a:rPr>
-              <a:t>What makes an API insecure?</a:t>
-            </a:r>
-          </a:p>
-        </p:txBody>
-      </p:sp>
-      <p:sp>
-        <p:nvSpPr>
-          <p:cNvPr id="12" name="Oval 11"/>
-          <p:cNvSpPr/>
-          <p:nvPr/>
-        </p:nvSpPr>
-        <p:spPr>
-          <a:xfrm>
-            <a:off x="548640" y="5205221"/>
-            <a:ext cx="411480" cy="411480"/>
-          </a:xfrm>
-          <a:prstGeom prst="ellipse">
-            <a:avLst/>
-          </a:prstGeom>
-          <a:solidFill>
-            <a:srgbClr val="F2B705"/>
-          </a:solidFill>
-          <a:ln>
-            <a:noFill/>
-          </a:ln>
-          <a:effectLst/>
-        </p:spPr>
-        <p:style>
-          <a:lnRef idx="1">
-            <a:schemeClr val="accent1"/>
-          </a:lnRef>
-          <a:fillRef idx="3">
-            <a:schemeClr val="accent1"/>
-          </a:fillRef>
-          <a:effectRef idx="2">
-            <a:schemeClr val="accent1"/>
-          </a:effectRef>
-          <a:fontRef idx="minor">
-            <a:schemeClr val="lt1"/>
-          </a:fontRef>
-        </p:style>
-        <p:txBody>
-          <a:bodyPr rtlCol="0" anchor="ctr" lIns="0" rIns="0" tIns="0" bIns="0"/>
-          <a:lstStyle/>
-          <a:p>
-            <a:pPr algn="ctr"/>
-            <a:r>
-              <a:rPr sz="1400" b="1">
-                <a:solidFill>
-                  <a:srgbClr val="202122"/>
-                </a:solidFill>
-                <a:latin typeface="Calibri"/>
-              </a:rPr>
-              <a:t>4</a:t>
-            </a:r>
-          </a:p>
-        </p:txBody>
-      </p:sp>
-      <p:sp>
-        <p:nvSpPr>
-          <p:cNvPr id="13" name="TextBox 12"/>
-          <p:cNvSpPr txBox="1"/>
-          <p:nvPr/>
-        </p:nvSpPr>
-        <p:spPr>
-          <a:xfrm>
-            <a:off x="1234440" y="5186933"/>
-            <a:ext cx="10408615" cy="1030986"/>
-          </a:xfrm>
-          <a:prstGeom prst="rect">
-            <a:avLst/>
-          </a:prstGeom>
-          <a:noFill/>
-        </p:spPr>
-        <p:txBody>
-          <a:bodyPr wrap="square" anchor="t" lIns="0" rIns="0" tIns="0" bIns="0"/>
-          <a:lstStyle/>
-          <a:p>
-            <a:pPr algn="l"/>
-            <a:r>
-              <a:rPr sz="2200" b="0" i="0">
-                <a:solidFill>
-                  <a:srgbClr val="202122"/>
-                </a:solidFill>
-                <a:latin typeface="Calibri"/>
-              </a:rPr>
-              <a:t>What is a zero-day?</a:t>
-            </a:r>
-          </a:p>
-        </p:txBody>
-      </p:sp>
-    </p:spTree>
-  </p:cSld>
-  <p:clrMapOvr>
-    <a:masterClrMapping/>
-  </p:clrMapOvr>
-</p:sld>
-</file>
-
-<file path=ppt/slides/slide8.xml><?xml version="1.0" encoding="utf-8"?>
-<p:sld xmlns:a="http://schemas.openxmlformats.org/drawingml/2006/main" xmlns:p="http://schemas.openxmlformats.org/presentationml/2006/main" xmlns:r="http://schemas.openxmlformats.org/officeDocument/2006/relationships">
-  <p:cSld>
-    <p:bg>
-      <p:bgPr>
-        <a:solidFill>
-          <a:srgbClr val="FFFFFF"/>
-        </a:solidFill>
-        <a:effectLst/>
-      </p:bgPr>
-    </p:bg>
-    <p:spTree>
-      <p:nvGrpSpPr>
-        <p:cNvPr id="1" name=""/>
-        <p:cNvGrpSpPr/>
-        <p:nvPr/>
-      </p:nvGrpSpPr>
-      <p:grpSpPr/>
-      <p:sp>
-        <p:nvSpPr>
-          <p:cNvPr id="2" name="TextBox 1"/>
-          <p:cNvSpPr txBox="1"/>
-          <p:nvPr/>
-        </p:nvSpPr>
-        <p:spPr>
-          <a:xfrm>
-            <a:off x="548640" y="320040"/>
-            <a:ext cx="11094415" cy="274320"/>
-          </a:xfrm>
-          <a:prstGeom prst="rect">
-            <a:avLst/>
-          </a:prstGeom>
-          <a:noFill/>
-        </p:spPr>
-        <p:txBody>
-          <a:bodyPr wrap="square" anchor="t" lIns="0" rIns="0" tIns="0" bIns="0"/>
-          <a:lstStyle/>
-          <a:p>
-            <a:pPr algn="l"/>
-            <a:r>
-              <a:rPr sz="1100" b="1" i="0">
-                <a:solidFill>
-                  <a:srgbClr val="54595D"/>
-                </a:solidFill>
-                <a:latin typeface="Calibri"/>
-              </a:rPr>
-              <a:t>CORE COMPONENT  ·  Core Paper 2</a:t>
-            </a:r>
-          </a:p>
-        </p:txBody>
-      </p:sp>
-      <p:sp>
-        <p:nvSpPr>
-          <p:cNvPr id="3" name="TextBox 2"/>
-          <p:cNvSpPr txBox="1"/>
-          <p:nvPr/>
-        </p:nvSpPr>
-        <p:spPr>
-          <a:xfrm>
-            <a:off x="548640" y="566928"/>
-            <a:ext cx="11094415" cy="822960"/>
-          </a:xfrm>
-          <a:prstGeom prst="rect">
-            <a:avLst/>
-          </a:prstGeom>
-          <a:noFill/>
-        </p:spPr>
-        <p:txBody>
-          <a:bodyPr wrap="square" anchor="ctr" lIns="0" rIns="0" tIns="0" bIns="0"/>
-          <a:lstStyle/>
-          <a:p>
-            <a:pPr algn="l"/>
-            <a:r>
-              <a:rPr sz="3200" b="1" i="0">
-                <a:solidFill>
-                  <a:srgbClr val="03306E"/>
-                </a:solidFill>
-                <a:latin typeface="Cambria"/>
-              </a:rPr>
-              <a:t>Answers</a:t>
-            </a:r>
-          </a:p>
-        </p:txBody>
-      </p:sp>
-      <p:sp>
-        <p:nvSpPr>
-          <p:cNvPr id="4" name="TextBox 3"/>
-          <p:cNvSpPr txBox="1"/>
-          <p:nvPr/>
-        </p:nvSpPr>
-        <p:spPr>
-          <a:xfrm>
-            <a:off x="548640" y="6446520"/>
-            <a:ext cx="8229600" cy="274320"/>
-          </a:xfrm>
-          <a:prstGeom prst="rect">
-            <a:avLst/>
-          </a:prstGeom>
-          <a:noFill/>
-        </p:spPr>
-        <p:txBody>
-          <a:bodyPr wrap="square" anchor="t" lIns="0" rIns="0" tIns="0" bIns="0"/>
-          <a:lstStyle/>
-          <a:p>
-            <a:pPr algn="l"/>
-            <a:r>
-              <a:rPr sz="1000" b="0" i="0">
-                <a:solidFill>
-                  <a:srgbClr val="54595D"/>
-                </a:solidFill>
-                <a:latin typeface="Calibri"/>
-              </a:rPr>
-              <a:t>Digital Software Development T Level  ·  Security Threats and Vulnerabilities</a:t>
-            </a:r>
-          </a:p>
-        </p:txBody>
-      </p:sp>
-      <p:sp>
-        <p:nvSpPr>
-          <p:cNvPr id="5" name="TextBox 4"/>
-          <p:cNvSpPr txBox="1"/>
-          <p:nvPr/>
-        </p:nvSpPr>
-        <p:spPr>
-          <a:xfrm>
-            <a:off x="10728655" y="6446520"/>
-            <a:ext cx="914400" cy="274320"/>
-          </a:xfrm>
-          <a:prstGeom prst="rect">
-            <a:avLst/>
-          </a:prstGeom>
-          <a:noFill/>
-        </p:spPr>
-        <p:txBody>
-          <a:bodyPr wrap="square" anchor="t" lIns="0" rIns="0" tIns="0" bIns="0"/>
-          <a:lstStyle/>
-          <a:p>
-            <a:pPr algn="r"/>
-            <a:r>
-              <a:rPr sz="1000" b="0" i="0">
-                <a:solidFill>
-                  <a:srgbClr val="54595D"/>
-                </a:solidFill>
-                <a:latin typeface="Calibri"/>
-              </a:rPr>
-              <a:t>8</a:t>
-            </a:r>
-          </a:p>
-        </p:txBody>
-      </p:sp>
-      <p:sp>
-        <p:nvSpPr>
-          <p:cNvPr id="6" name="Oval 5"/>
-          <p:cNvSpPr/>
-          <p:nvPr/>
-        </p:nvSpPr>
-        <p:spPr>
-          <a:xfrm>
-            <a:off x="548640" y="1618488"/>
-            <a:ext cx="411480" cy="411480"/>
-          </a:xfrm>
-          <a:prstGeom prst="ellipse">
-            <a:avLst/>
-          </a:prstGeom>
-          <a:solidFill>
-            <a:srgbClr val="F2B705"/>
-          </a:solidFill>
-          <a:ln>
-            <a:noFill/>
-          </a:ln>
-          <a:effectLst/>
-        </p:spPr>
-        <p:style>
-          <a:lnRef idx="1">
-            <a:schemeClr val="accent1"/>
-          </a:lnRef>
-          <a:fillRef idx="3">
-            <a:schemeClr val="accent1"/>
-          </a:fillRef>
-          <a:effectRef idx="2">
-            <a:schemeClr val="accent1"/>
-          </a:effectRef>
-          <a:fontRef idx="minor">
-            <a:schemeClr val="lt1"/>
-          </a:fontRef>
-        </p:style>
-        <p:txBody>
-          <a:bodyPr rtlCol="0" anchor="ctr" lIns="0" rIns="0" tIns="0" bIns="0"/>
-          <a:lstStyle/>
-          <a:p>
-            <a:pPr algn="ctr"/>
-            <a:r>
-              <a:rPr sz="1400" b="1">
-                <a:solidFill>
-                  <a:srgbClr val="202122"/>
-                </a:solidFill>
-                <a:latin typeface="Calibri"/>
-              </a:rPr>
-              <a:t>1</a:t>
-            </a:r>
-          </a:p>
-        </p:txBody>
-      </p:sp>
-      <p:sp>
-        <p:nvSpPr>
-          <p:cNvPr id="7" name="TextBox 6"/>
-          <p:cNvSpPr txBox="1"/>
-          <p:nvPr/>
-        </p:nvSpPr>
-        <p:spPr>
-          <a:xfrm>
-            <a:off x="1234440" y="1600200"/>
-            <a:ext cx="10408615" cy="1030986"/>
-          </a:xfrm>
-          <a:prstGeom prst="rect">
-            <a:avLst/>
-          </a:prstGeom>
-          <a:noFill/>
-        </p:spPr>
-        <p:txBody>
-          <a:bodyPr wrap="square" anchor="t" lIns="0" rIns="0" tIns="0" bIns="0"/>
-          <a:lstStyle/>
-          <a:p>
-            <a:pPr algn="l"/>
-            <a:r>
-              <a:rPr sz="1800" b="0" i="0">
-                <a:solidFill>
-                  <a:srgbClr val="54595D"/>
-                </a:solidFill>
-                <a:latin typeface="Calibri"/>
-              </a:rPr>
-              <a:t>How do you prevent SQL injection?</a:t>
-            </a:r>
-          </a:p>
-          <a:p>
-            <a:r>
-              <a:rPr sz="1800" b="1">
-                <a:solidFill>
-                  <a:srgbClr val="03306E"/>
-                </a:solidFill>
-                <a:latin typeface="Calibri"/>
-              </a:rPr>
-              <a:t>Use parameterised queries instead of building SQL from user input.</a:t>
-            </a:r>
-          </a:p>
-        </p:txBody>
-      </p:sp>
-      <p:sp>
-        <p:nvSpPr>
-          <p:cNvPr id="8" name="Oval 7"/>
-          <p:cNvSpPr/>
-          <p:nvPr/>
-        </p:nvSpPr>
-        <p:spPr>
-          <a:xfrm>
-            <a:off x="548640" y="2814066"/>
-            <a:ext cx="411480" cy="411480"/>
-          </a:xfrm>
-          <a:prstGeom prst="ellipse">
-            <a:avLst/>
-          </a:prstGeom>
-          <a:solidFill>
-            <a:srgbClr val="F2B705"/>
-          </a:solidFill>
-          <a:ln>
-            <a:noFill/>
-          </a:ln>
-          <a:effectLst/>
-        </p:spPr>
-        <p:style>
-          <a:lnRef idx="1">
-            <a:schemeClr val="accent1"/>
-          </a:lnRef>
-          <a:fillRef idx="3">
-            <a:schemeClr val="accent1"/>
-          </a:fillRef>
-          <a:effectRef idx="2">
-            <a:schemeClr val="accent1"/>
-          </a:effectRef>
-          <a:fontRef idx="minor">
-            <a:schemeClr val="lt1"/>
-          </a:fontRef>
-        </p:style>
-        <p:txBody>
-          <a:bodyPr rtlCol="0" anchor="ctr" lIns="0" rIns="0" tIns="0" bIns="0"/>
-          <a:lstStyle/>
-          <a:p>
-            <a:pPr algn="ctr"/>
-            <a:r>
-              <a:rPr sz="1400" b="1">
-                <a:solidFill>
-                  <a:srgbClr val="202122"/>
-                </a:solidFill>
-                <a:latin typeface="Calibri"/>
-              </a:rPr>
-              <a:t>2</a:t>
-            </a:r>
-          </a:p>
-        </p:txBody>
-      </p:sp>
-      <p:sp>
-        <p:nvSpPr>
-          <p:cNvPr id="9" name="TextBox 8"/>
-          <p:cNvSpPr txBox="1"/>
-          <p:nvPr/>
-        </p:nvSpPr>
-        <p:spPr>
-          <a:xfrm>
-            <a:off x="1234440" y="2795778"/>
-            <a:ext cx="10408615" cy="1030986"/>
-          </a:xfrm>
-          <a:prstGeom prst="rect">
-            <a:avLst/>
-          </a:prstGeom>
-          <a:noFill/>
-        </p:spPr>
-        <p:txBody>
-          <a:bodyPr wrap="square" anchor="t" lIns="0" rIns="0" tIns="0" bIns="0"/>
-          <a:lstStyle/>
-          <a:p>
-            <a:pPr algn="l"/>
-            <a:r>
-              <a:rPr sz="1800" b="0" i="0">
-                <a:solidFill>
-                  <a:srgbClr val="54595D"/>
-                </a:solidFill>
-                <a:latin typeface="Calibri"/>
-              </a:rPr>
-              <a:t>What is spear phishing?</a:t>
-            </a:r>
-          </a:p>
-          <a:p>
-            <a:r>
-              <a:rPr sz="1800" b="1">
-                <a:solidFill>
-                  <a:srgbClr val="03306E"/>
-                </a:solidFill>
-                <a:latin typeface="Calibri"/>
-              </a:rPr>
-              <a:t>A phishing attack targeted at a specific person or organisation.</a:t>
-            </a:r>
-          </a:p>
-        </p:txBody>
-      </p:sp>
-      <p:sp>
-        <p:nvSpPr>
-          <p:cNvPr id="10" name="Oval 9"/>
-          <p:cNvSpPr/>
-          <p:nvPr/>
-        </p:nvSpPr>
-        <p:spPr>
-          <a:xfrm>
-            <a:off x="548640" y="4009644"/>
-            <a:ext cx="411480" cy="411480"/>
-          </a:xfrm>
-          <a:prstGeom prst="ellipse">
-            <a:avLst/>
-          </a:prstGeom>
-          <a:solidFill>
-            <a:srgbClr val="F2B705"/>
-          </a:solidFill>
-          <a:ln>
-            <a:noFill/>
-          </a:ln>
-          <a:effectLst/>
-        </p:spPr>
-        <p:style>
-          <a:lnRef idx="1">
-            <a:schemeClr val="accent1"/>
-          </a:lnRef>
-          <a:fillRef idx="3">
-            <a:schemeClr val="accent1"/>
-          </a:fillRef>
-          <a:effectRef idx="2">
-            <a:schemeClr val="accent1"/>
-          </a:effectRef>
-          <a:fontRef idx="minor">
-            <a:schemeClr val="lt1"/>
-          </a:fontRef>
-        </p:style>
-        <p:txBody>
-          <a:bodyPr rtlCol="0" anchor="ctr" lIns="0" rIns="0" tIns="0" bIns="0"/>
-          <a:lstStyle/>
-          <a:p>
-            <a:pPr algn="ctr"/>
-            <a:r>
-              <a:rPr sz="1400" b="1">
-                <a:solidFill>
-                  <a:srgbClr val="202122"/>
-                </a:solidFill>
-                <a:latin typeface="Calibri"/>
-              </a:rPr>
-              <a:t>3</a:t>
-            </a:r>
-          </a:p>
-        </p:txBody>
-      </p:sp>
-      <p:sp>
-        <p:nvSpPr>
-          <p:cNvPr id="11" name="TextBox 10"/>
-          <p:cNvSpPr txBox="1"/>
-          <p:nvPr/>
-        </p:nvSpPr>
-        <p:spPr>
-          <a:xfrm>
-            <a:off x="1234440" y="3991356"/>
-            <a:ext cx="10408615" cy="1030986"/>
-          </a:xfrm>
-          <a:prstGeom prst="rect">
-            <a:avLst/>
-          </a:prstGeom>
-          <a:noFill/>
-        </p:spPr>
-        <p:txBody>
-          <a:bodyPr wrap="square" anchor="t" lIns="0" rIns="0" tIns="0" bIns="0"/>
-          <a:lstStyle/>
-          <a:p>
-            <a:pPr algn="l"/>
-            <a:r>
-              <a:rPr sz="1800" b="0" i="0">
-                <a:solidFill>
-                  <a:srgbClr val="54595D"/>
-                </a:solidFill>
-                <a:latin typeface="Calibri"/>
-              </a:rPr>
-              <a:t>What makes an API insecure?</a:t>
-            </a:r>
-          </a:p>
-          <a:p>
-            <a:r>
-              <a:rPr sz="1800" b="1">
-                <a:solidFill>
-                  <a:srgbClr val="03306E"/>
-                </a:solidFill>
-                <a:latin typeface="Calibri"/>
-              </a:rPr>
-              <a:t>Weak or no authentication or input validation.</a:t>
-            </a:r>
-          </a:p>
-        </p:txBody>
-      </p:sp>
-      <p:sp>
-        <p:nvSpPr>
-          <p:cNvPr id="12" name="Oval 11"/>
-          <p:cNvSpPr/>
-          <p:nvPr/>
-        </p:nvSpPr>
-        <p:spPr>
-          <a:xfrm>
-            <a:off x="548640" y="5205221"/>
-            <a:ext cx="411480" cy="411480"/>
-          </a:xfrm>
-          <a:prstGeom prst="ellipse">
-            <a:avLst/>
-          </a:prstGeom>
-          <a:solidFill>
-            <a:srgbClr val="F2B705"/>
-          </a:solidFill>
-          <a:ln>
-            <a:noFill/>
-          </a:ln>
-          <a:effectLst/>
-        </p:spPr>
-        <p:style>
-          <a:lnRef idx="1">
-            <a:schemeClr val="accent1"/>
-          </a:lnRef>
-          <a:fillRef idx="3">
-            <a:schemeClr val="accent1"/>
-          </a:fillRef>
-          <a:effectRef idx="2">
-            <a:schemeClr val="accent1"/>
-          </a:effectRef>
-          <a:fontRef idx="minor">
-            <a:schemeClr val="lt1"/>
-          </a:fontRef>
-        </p:style>
-        <p:txBody>
-          <a:bodyPr rtlCol="0" anchor="ctr" lIns="0" rIns="0" tIns="0" bIns="0"/>
-          <a:lstStyle/>
-          <a:p>
-            <a:pPr algn="ctr"/>
-            <a:r>
-              <a:rPr sz="1400" b="1">
-                <a:solidFill>
-                  <a:srgbClr val="202122"/>
-                </a:solidFill>
-                <a:latin typeface="Calibri"/>
-              </a:rPr>
-              <a:t>4</a:t>
-            </a:r>
-          </a:p>
-        </p:txBody>
-      </p:sp>
-      <p:sp>
-        <p:nvSpPr>
-          <p:cNvPr id="13" name="TextBox 12"/>
-          <p:cNvSpPr txBox="1"/>
-          <p:nvPr/>
-        </p:nvSpPr>
-        <p:spPr>
-          <a:xfrm>
-            <a:off x="1234440" y="5186933"/>
-            <a:ext cx="10408615" cy="1030986"/>
-          </a:xfrm>
-          <a:prstGeom prst="rect">
-            <a:avLst/>
-          </a:prstGeom>
-          <a:noFill/>
-        </p:spPr>
-        <p:txBody>
-          <a:bodyPr wrap="square" anchor="t" lIns="0" rIns="0" tIns="0" bIns="0"/>
-          <a:lstStyle/>
-          <a:p>
-            <a:pPr algn="l"/>
-            <a:r>
-              <a:rPr sz="1800" b="0" i="0">
-                <a:solidFill>
-                  <a:srgbClr val="54595D"/>
-                </a:solidFill>
-                <a:latin typeface="Calibri"/>
-              </a:rPr>
-              <a:t>What is a zero-day?</a:t>
-            </a:r>
-          </a:p>
-          <a:p>
-            <a:r>
-              <a:rPr sz="1800" b="1">
-                <a:solidFill>
-                  <a:srgbClr val="03306E"/>
-                </a:solidFill>
-                <a:latin typeface="Calibri"/>
-              </a:rPr>
-              <a:t>A flaw exploited before a patch exists.</a:t>
-            </a:r>
-          </a:p>
-        </p:txBody>
-      </p:sp>
-    </p:spTree>
-  </p:cSld>
-  <p:clrMapOvr>
-    <a:masterClrMapping/>
-  </p:clrMapOvr>
-</p:sld>
-</file>
-
 <file path=ppt/slides/slide9.xml><?xml version="1.0" encoding="utf-8"?>
 <p:sld xmlns:a="http://schemas.openxmlformats.org/drawingml/2006/main" xmlns:p="http://schemas.openxmlformats.org/presentationml/2006/main" xmlns:r="http://schemas.openxmlformats.org/officeDocument/2006/relationships">
   <p:cSld>
@@ -9210,7 +12329,7 @@
                 </a:solidFill>
                 <a:latin typeface="Cambria"/>
               </a:rPr>
-              <a:t>Activity: Secure the login</a:t>
+              <a:t>Quick check: Developer defences</a:t>
             </a:r>
           </a:p>
         </p:txBody>
@@ -9283,19 +12402,17 @@
       </p:sp>
       <p:sp>
         <p:nvSpPr>
-          <p:cNvPr id="6" name="Rounded Rectangle 5"/>
+          <p:cNvPr id="6" name="Oval 5"/>
           <p:cNvSpPr/>
           <p:nvPr/>
         </p:nvSpPr>
         <p:spPr>
           <a:xfrm>
-            <a:off x="548640" y="1508760"/>
-            <a:ext cx="2011680" cy="457200"/>
-          </a:xfrm>
-          <a:prstGeom prst="roundRect">
-            <a:avLst>
-              <a:gd name="adj" fmla="val 50000"/>
-            </a:avLst>
+            <a:off x="548640" y="1691640"/>
+            <a:ext cx="502920" cy="502920"/>
+          </a:xfrm>
+          <a:prstGeom prst="ellipse">
+            <a:avLst/>
           </a:prstGeom>
           <a:solidFill>
             <a:srgbClr val="F2B705"/>
@@ -9320,9 +12437,20 @@
           </a:fontRef>
         </p:style>
         <p:txBody>
-          <a:bodyPr rtlCol="0" anchor="ctr"/>
-          <a:lstStyle/>
-          <a:p/>
+          <a:bodyPr rtlCol="0" anchor="ctr" lIns="0" rIns="0" tIns="0" bIns="0"/>
+          <a:lstStyle/>
+          <a:p>
+            <a:pPr algn="ctr"/>
+            <a:r>
+              <a:rPr sz="1600" b="1">
+                <a:solidFill>
+                  <a:srgbClr val="202122"/>
+                </a:solidFill>
+                <a:latin typeface="Calibri"/>
+              </a:rPr>
+              <a:t>1</a:t>
+            </a:r>
+          </a:p>
         </p:txBody>
       </p:sp>
       <p:sp>
@@ -9333,80 +12461,47 @@
         </p:nvSpPr>
         <p:spPr>
           <a:xfrm>
-            <a:off x="548640" y="1508760"/>
-            <a:ext cx="2011680" cy="457200"/>
-          </a:xfrm>
-          <a:prstGeom prst="rect">
-            <a:avLst/>
-          </a:prstGeom>
-          <a:noFill/>
-        </p:spPr>
-        <p:txBody>
-          <a:bodyPr wrap="square" anchor="ctr" lIns="0" rIns="0" tIns="0" bIns="0"/>
-          <a:lstStyle/>
-          <a:p>
-            <a:pPr algn="ctr"/>
-            <a:r>
-              <a:rPr sz="1400" b="1" i="0">
+            <a:off x="1371600" y="1645920"/>
+            <a:ext cx="10271455" cy="1188720"/>
+          </a:xfrm>
+          <a:prstGeom prst="rect">
+            <a:avLst/>
+          </a:prstGeom>
+          <a:noFill/>
+        </p:spPr>
+        <p:txBody>
+          <a:bodyPr wrap="square" anchor="t" lIns="0" rIns="0" tIns="0" bIns="0"/>
+          <a:lstStyle/>
+          <a:p>
+            <a:pPr algn="l"/>
+            <a:r>
+              <a:rPr sz="2400" b="0" i="0">
                 <a:solidFill>
                   <a:srgbClr val="202122"/>
                 </a:solidFill>
                 <a:latin typeface="Calibri"/>
               </a:rPr>
-              <a:t>30 minutes</a:t>
-            </a:r>
-          </a:p>
-        </p:txBody>
-      </p:sp>
-      <p:sp>
-        <p:nvSpPr>
-          <p:cNvPr id="8" name="TextBox 7"/>
-          <p:cNvSpPr txBox="1"/>
-          <p:nvPr/>
-        </p:nvSpPr>
-        <p:spPr>
-          <a:xfrm>
-            <a:off x="2743200" y="1508760"/>
-            <a:ext cx="4754880" cy="457200"/>
-          </a:xfrm>
-          <a:prstGeom prst="rect">
-            <a:avLst/>
-          </a:prstGeom>
-          <a:noFill/>
-        </p:spPr>
-        <p:txBody>
-          <a:bodyPr wrap="square" anchor="ctr" lIns="0" rIns="0" tIns="0" bIns="0"/>
-          <a:lstStyle/>
-          <a:p>
-            <a:pPr algn="l"/>
-            <a:r>
-              <a:rPr sz="1400" b="0" i="1">
-                <a:solidFill>
-                  <a:srgbClr val="54595D"/>
-                </a:solidFill>
-                <a:latin typeface="Calibri"/>
-              </a:rPr>
-              <a:t>Pairs</a:t>
-            </a:r>
-          </a:p>
-        </p:txBody>
-      </p:sp>
-      <p:sp>
-        <p:nvSpPr>
-          <p:cNvPr id="9" name="Oval 8"/>
+              <a:t>How do you prevent SQL injection?</a:t>
+            </a:r>
+          </a:p>
+        </p:txBody>
+      </p:sp>
+      <p:sp>
+        <p:nvSpPr>
+          <p:cNvPr id="8" name="Oval 7"/>
           <p:cNvSpPr/>
           <p:nvPr/>
         </p:nvSpPr>
         <p:spPr>
           <a:xfrm>
-            <a:off x="548640" y="2482596"/>
-            <a:ext cx="384048" cy="384048"/>
+            <a:off x="548640" y="3108960"/>
+            <a:ext cx="502920" cy="502920"/>
           </a:xfrm>
           <a:prstGeom prst="ellipse">
             <a:avLst/>
           </a:prstGeom>
           <a:solidFill>
-            <a:srgbClr val="0645AD"/>
+            <a:srgbClr val="F2B705"/>
           </a:solidFill>
           <a:ln>
             <a:noFill/>
@@ -9433,66 +12528,66 @@
           <a:p>
             <a:pPr algn="ctr"/>
             <a:r>
-              <a:rPr sz="1300" b="1">
-                <a:solidFill>
-                  <a:srgbClr val="FFFFFF"/>
-                </a:solidFill>
-                <a:latin typeface="Calibri"/>
-              </a:rPr>
-              <a:t>1</a:t>
-            </a:r>
-          </a:p>
-        </p:txBody>
-      </p:sp>
-      <p:sp>
-        <p:nvSpPr>
-          <p:cNvPr id="10" name="TextBox 9"/>
+              <a:rPr sz="1600" b="1">
+                <a:solidFill>
+                  <a:srgbClr val="202122"/>
+                </a:solidFill>
+                <a:latin typeface="Calibri"/>
+              </a:rPr>
+              <a:t>2</a:t>
+            </a:r>
+          </a:p>
+        </p:txBody>
+      </p:sp>
+      <p:sp>
+        <p:nvSpPr>
+          <p:cNvPr id="9" name="TextBox 8"/>
           <p:cNvSpPr txBox="1"/>
           <p:nvPr/>
         </p:nvSpPr>
         <p:spPr>
           <a:xfrm>
-            <a:off x="1143000" y="2240280"/>
-            <a:ext cx="5943600" cy="868680"/>
-          </a:xfrm>
-          <a:prstGeom prst="rect">
-            <a:avLst/>
-          </a:prstGeom>
-          <a:noFill/>
-        </p:spPr>
-        <p:txBody>
-          <a:bodyPr wrap="square" anchor="ctr" lIns="0" rIns="0" tIns="0" bIns="0"/>
+            <a:off x="1371600" y="3063240"/>
+            <a:ext cx="10271455" cy="1188720"/>
+          </a:xfrm>
+          <a:prstGeom prst="rect">
+            <a:avLst/>
+          </a:prstGeom>
+          <a:noFill/>
+        </p:spPr>
+        <p:txBody>
+          <a:bodyPr wrap="square" anchor="t" lIns="0" rIns="0" tIns="0" bIns="0"/>
           <a:lstStyle/>
           <a:p>
             <a:pPr algn="l"/>
             <a:r>
-              <a:rPr sz="1700" b="0" i="0">
+              <a:rPr sz="2400" b="0" i="0">
                 <a:solidFill>
                   <a:srgbClr val="202122"/>
                 </a:solidFill>
                 <a:latin typeface="Calibri"/>
               </a:rPr>
-              <a:t>Review the vulnerable login code from your teacher.</a:t>
-            </a:r>
-          </a:p>
-        </p:txBody>
-      </p:sp>
-      <p:sp>
-        <p:nvSpPr>
-          <p:cNvPr id="11" name="Oval 10"/>
+              <a:t>How should passwords be stored?</a:t>
+            </a:r>
+          </a:p>
+        </p:txBody>
+      </p:sp>
+      <p:sp>
+        <p:nvSpPr>
+          <p:cNvPr id="10" name="Oval 9"/>
           <p:cNvSpPr/>
           <p:nvPr/>
         </p:nvSpPr>
         <p:spPr>
           <a:xfrm>
-            <a:off x="548640" y="3461004"/>
-            <a:ext cx="384048" cy="384048"/>
+            <a:off x="548640" y="4526280"/>
+            <a:ext cx="502920" cy="502920"/>
           </a:xfrm>
           <a:prstGeom prst="ellipse">
             <a:avLst/>
           </a:prstGeom>
           <a:solidFill>
-            <a:srgbClr val="0645AD"/>
+            <a:srgbClr val="F2B705"/>
           </a:solidFill>
           <a:ln>
             <a:noFill/>
@@ -9519,13 +12614,46 @@
           <a:p>
             <a:pPr algn="ctr"/>
             <a:r>
-              <a:rPr sz="1300" b="1">
-                <a:solidFill>
-                  <a:srgbClr val="FFFFFF"/>
-                </a:solidFill>
-                <a:latin typeface="Calibri"/>
-              </a:rPr>
-              <a:t>2</a:t>
+              <a:rPr sz="1600" b="1">
+                <a:solidFill>
+                  <a:srgbClr val="202122"/>
+                </a:solidFill>
+                <a:latin typeface="Calibri"/>
+              </a:rPr>
+              <a:t>3</a:t>
+            </a:r>
+          </a:p>
+        </p:txBody>
+      </p:sp>
+      <p:sp>
+        <p:nvSpPr>
+          <p:cNvPr id="11" name="TextBox 10"/>
+          <p:cNvSpPr txBox="1"/>
+          <p:nvPr/>
+        </p:nvSpPr>
+        <p:spPr>
+          <a:xfrm>
+            <a:off x="1371600" y="4480560"/>
+            <a:ext cx="10271455" cy="1188720"/>
+          </a:xfrm>
+          <a:prstGeom prst="rect">
+            <a:avLst/>
+          </a:prstGeom>
+          <a:noFill/>
+        </p:spPr>
+        <p:txBody>
+          <a:bodyPr wrap="square" anchor="t" lIns="0" rIns="0" tIns="0" bIns="0"/>
+          <a:lstStyle/>
+          <a:p>
+            <a:pPr algn="l"/>
+            <a:r>
+              <a:rPr sz="2400" b="0" i="0">
+                <a:solidFill>
+                  <a:srgbClr val="202122"/>
+                </a:solidFill>
+                <a:latin typeface="Calibri"/>
+              </a:rPr>
+              <a:t>Name two ways to secure an API.</a:t>
             </a:r>
           </a:p>
         </p:txBody>
@@ -9538,362 +12666,27 @@
         </p:nvSpPr>
         <p:spPr>
           <a:xfrm>
-            <a:off x="1143000" y="3218688"/>
-            <a:ext cx="5943600" cy="868680"/>
-          </a:xfrm>
-          <a:prstGeom prst="rect">
-            <a:avLst/>
-          </a:prstGeom>
-          <a:noFill/>
-        </p:spPr>
-        <p:txBody>
-          <a:bodyPr wrap="square" anchor="ctr" lIns="0" rIns="0" tIns="0" bIns="0"/>
+            <a:off x="548640" y="5852160"/>
+            <a:ext cx="11094415" cy="365760"/>
+          </a:xfrm>
+          <a:prstGeom prst="rect">
+            <a:avLst/>
+          </a:prstGeom>
+          <a:noFill/>
+        </p:spPr>
+        <p:txBody>
+          <a:bodyPr wrap="square" anchor="t" lIns="0" rIns="0" tIns="0" bIns="0"/>
           <a:lstStyle/>
           <a:p>
             <a:pPr algn="l"/>
             <a:r>
-              <a:rPr sz="1700" b="0" i="0">
-                <a:solidFill>
-                  <a:srgbClr val="202122"/>
-                </a:solidFill>
-                <a:latin typeface="Calibri"/>
-              </a:rPr>
-              <a:t>Identify every security weakness.</a:t>
-            </a:r>
-          </a:p>
-        </p:txBody>
-      </p:sp>
-      <p:sp>
-        <p:nvSpPr>
-          <p:cNvPr id="13" name="Oval 12"/>
-          <p:cNvSpPr/>
-          <p:nvPr/>
-        </p:nvSpPr>
-        <p:spPr>
-          <a:xfrm>
-            <a:off x="548640" y="4439412"/>
-            <a:ext cx="384048" cy="384048"/>
-          </a:xfrm>
-          <a:prstGeom prst="ellipse">
-            <a:avLst/>
-          </a:prstGeom>
-          <a:solidFill>
-            <a:srgbClr val="0645AD"/>
-          </a:solidFill>
-          <a:ln>
-            <a:noFill/>
-          </a:ln>
-          <a:effectLst/>
-        </p:spPr>
-        <p:style>
-          <a:lnRef idx="1">
-            <a:schemeClr val="accent1"/>
-          </a:lnRef>
-          <a:fillRef idx="3">
-            <a:schemeClr val="accent1"/>
-          </a:fillRef>
-          <a:effectRef idx="2">
-            <a:schemeClr val="accent1"/>
-          </a:effectRef>
-          <a:fontRef idx="minor">
-            <a:schemeClr val="lt1"/>
-          </a:fontRef>
-        </p:style>
-        <p:txBody>
-          <a:bodyPr rtlCol="0" anchor="ctr" lIns="0" rIns="0" tIns="0" bIns="0"/>
-          <a:lstStyle/>
-          <a:p>
-            <a:pPr algn="ctr"/>
-            <a:r>
-              <a:rPr sz="1300" b="1">
-                <a:solidFill>
-                  <a:srgbClr val="FFFFFF"/>
-                </a:solidFill>
-                <a:latin typeface="Calibri"/>
-              </a:rPr>
-              <a:t>3</a:t>
-            </a:r>
-          </a:p>
-        </p:txBody>
-      </p:sp>
-      <p:sp>
-        <p:nvSpPr>
-          <p:cNvPr id="14" name="TextBox 13"/>
-          <p:cNvSpPr txBox="1"/>
-          <p:nvPr/>
-        </p:nvSpPr>
-        <p:spPr>
-          <a:xfrm>
-            <a:off x="1143000" y="4197096"/>
-            <a:ext cx="5943600" cy="868680"/>
-          </a:xfrm>
-          <a:prstGeom prst="rect">
-            <a:avLst/>
-          </a:prstGeom>
-          <a:noFill/>
-        </p:spPr>
-        <p:txBody>
-          <a:bodyPr wrap="square" anchor="ctr" lIns="0" rIns="0" tIns="0" bIns="0"/>
-          <a:lstStyle/>
-          <a:p>
-            <a:pPr algn="l"/>
-            <a:r>
-              <a:rPr sz="1700" b="0" i="0">
-                <a:solidFill>
-                  <a:srgbClr val="202122"/>
-                </a:solidFill>
-                <a:latin typeface="Calibri"/>
-              </a:rPr>
-              <a:t>Rewrite it using parameterised queries, hashing and lockout.</a:t>
-            </a:r>
-          </a:p>
-        </p:txBody>
-      </p:sp>
-      <p:sp>
-        <p:nvSpPr>
-          <p:cNvPr id="15" name="Oval 14"/>
-          <p:cNvSpPr/>
-          <p:nvPr/>
-        </p:nvSpPr>
-        <p:spPr>
-          <a:xfrm>
-            <a:off x="548640" y="5417820"/>
-            <a:ext cx="384048" cy="384048"/>
-          </a:xfrm>
-          <a:prstGeom prst="ellipse">
-            <a:avLst/>
-          </a:prstGeom>
-          <a:solidFill>
-            <a:srgbClr val="0645AD"/>
-          </a:solidFill>
-          <a:ln>
-            <a:noFill/>
-          </a:ln>
-          <a:effectLst/>
-        </p:spPr>
-        <p:style>
-          <a:lnRef idx="1">
-            <a:schemeClr val="accent1"/>
-          </a:lnRef>
-          <a:fillRef idx="3">
-            <a:schemeClr val="accent1"/>
-          </a:fillRef>
-          <a:effectRef idx="2">
-            <a:schemeClr val="accent1"/>
-          </a:effectRef>
-          <a:fontRef idx="minor">
-            <a:schemeClr val="lt1"/>
-          </a:fontRef>
-        </p:style>
-        <p:txBody>
-          <a:bodyPr rtlCol="0" anchor="ctr" lIns="0" rIns="0" tIns="0" bIns="0"/>
-          <a:lstStyle/>
-          <a:p>
-            <a:pPr algn="ctr"/>
-            <a:r>
-              <a:rPr sz="1300" b="1">
-                <a:solidFill>
-                  <a:srgbClr val="FFFFFF"/>
-                </a:solidFill>
-                <a:latin typeface="Calibri"/>
-              </a:rPr>
-              <a:t>4</a:t>
-            </a:r>
-          </a:p>
-        </p:txBody>
-      </p:sp>
-      <p:sp>
-        <p:nvSpPr>
-          <p:cNvPr id="16" name="TextBox 15"/>
-          <p:cNvSpPr txBox="1"/>
-          <p:nvPr/>
-        </p:nvSpPr>
-        <p:spPr>
-          <a:xfrm>
-            <a:off x="1143000" y="5175504"/>
-            <a:ext cx="5943600" cy="868680"/>
-          </a:xfrm>
-          <a:prstGeom prst="rect">
-            <a:avLst/>
-          </a:prstGeom>
-          <a:noFill/>
-        </p:spPr>
-        <p:txBody>
-          <a:bodyPr wrap="square" anchor="ctr" lIns="0" rIns="0" tIns="0" bIns="0"/>
-          <a:lstStyle/>
-          <a:p>
-            <a:pPr algn="l"/>
-            <a:r>
-              <a:rPr sz="1700" b="0" i="0">
-                <a:solidFill>
-                  <a:srgbClr val="202122"/>
-                </a:solidFill>
-                <a:latin typeface="Calibri"/>
-              </a:rPr>
-              <a:t>Explain each fix in one sentence.</a:t>
-            </a:r>
-          </a:p>
-        </p:txBody>
-      </p:sp>
-      <p:sp>
-        <p:nvSpPr>
-          <p:cNvPr id="17" name="Rounded Rectangle 16"/>
-          <p:cNvSpPr/>
-          <p:nvPr/>
-        </p:nvSpPr>
-        <p:spPr>
-          <a:xfrm>
-            <a:off x="7772400" y="1508760"/>
-            <a:ext cx="3867912" cy="4572000"/>
-          </a:xfrm>
-          <a:prstGeom prst="roundRect">
-            <a:avLst>
-              <a:gd name="adj" fmla="val 8000"/>
-            </a:avLst>
-          </a:prstGeom>
-          <a:solidFill>
-            <a:srgbClr val="EAF3FF"/>
-          </a:solidFill>
-          <a:ln>
-            <a:noFill/>
-          </a:ln>
-          <a:effectLst/>
-        </p:spPr>
-        <p:style>
-          <a:lnRef idx="1">
-            <a:schemeClr val="accent1"/>
-          </a:lnRef>
-          <a:fillRef idx="3">
-            <a:schemeClr val="accent1"/>
-          </a:fillRef>
-          <a:effectRef idx="2">
-            <a:schemeClr val="accent1"/>
-          </a:effectRef>
-          <a:fontRef idx="minor">
-            <a:schemeClr val="lt1"/>
-          </a:fontRef>
-        </p:style>
-        <p:txBody>
-          <a:bodyPr rtlCol="0" anchor="ctr"/>
-          <a:lstStyle/>
-          <a:p/>
-        </p:txBody>
-      </p:sp>
-      <p:sp>
-        <p:nvSpPr>
-          <p:cNvPr id="18" name="TextBox 17"/>
-          <p:cNvSpPr txBox="1"/>
-          <p:nvPr/>
-        </p:nvSpPr>
-        <p:spPr>
-          <a:xfrm>
-            <a:off x="8046720" y="1737360"/>
-            <a:ext cx="3291840" cy="365760"/>
-          </a:xfrm>
-          <a:prstGeom prst="rect">
-            <a:avLst/>
-          </a:prstGeom>
-          <a:noFill/>
-        </p:spPr>
-        <p:txBody>
-          <a:bodyPr wrap="square" anchor="t" lIns="0" rIns="0" tIns="0" bIns="0"/>
-          <a:lstStyle/>
-          <a:p>
-            <a:pPr algn="l"/>
-            <a:r>
-              <a:rPr sz="1300" b="1" i="0">
-                <a:solidFill>
-                  <a:srgbClr val="0645AD"/>
-                </a:solidFill>
-                <a:latin typeface="Calibri"/>
-              </a:rPr>
-              <a:t>SUCCESS CRITERIA</a:t>
-            </a:r>
-          </a:p>
-        </p:txBody>
-      </p:sp>
-      <p:sp>
-        <p:nvSpPr>
-          <p:cNvPr id="19" name="TextBox 18"/>
-          <p:cNvSpPr txBox="1"/>
-          <p:nvPr/>
-        </p:nvSpPr>
-        <p:spPr>
-          <a:xfrm>
-            <a:off x="8046720" y="2240280"/>
-            <a:ext cx="3337560" cy="3657600"/>
-          </a:xfrm>
-          <a:prstGeom prst="rect">
-            <a:avLst/>
-          </a:prstGeom>
-          <a:noFill/>
-        </p:spPr>
-        <p:txBody>
-          <a:bodyPr wrap="square" lIns="0" rIns="0" tIns="0" bIns="0">
-            <a:spAutoFit/>
-          </a:bodyPr>
-          <a:lstStyle/>
-          <a:p>
-            <a:pPr marL="274320" indent="-274320">
-              <a:spcAft>
-                <a:spcPts val="810"/>
-              </a:spcAft>
-              <a:buClr>
-                <a:srgbClr val="0645AD"/>
-              </a:buClr>
-              <a:buFont typeface="Arial"/>
-              <a:buChar char="•"/>
-            </a:pPr>
-            <a:r>
-              <a:rPr sz="1800" b="0">
-                <a:solidFill>
-                  <a:srgbClr val="202122"/>
-                </a:solidFill>
-                <a:latin typeface="Calibri"/>
-              </a:rPr>
-              <a:t>SQL injection fixed</a:t>
-            </a:r>
-          </a:p>
-          <a:p>
-            <a:pPr marL="274320" indent="-274320">
-              <a:spcAft>
-                <a:spcPts val="810"/>
-              </a:spcAft>
-              <a:buClr>
-                <a:srgbClr val="0645AD"/>
-              </a:buClr>
-              <a:buFont typeface="Arial"/>
-              <a:buChar char="•"/>
-            </a:pPr>
-            <a:r>
-              <a:rPr sz="1800" b="0">
-                <a:solidFill>
-                  <a:srgbClr val="202122"/>
-                </a:solidFill>
-                <a:latin typeface="Calibri"/>
-              </a:rPr>
-              <a:t>Passwords never stored in plain text</a:t>
-            </a:r>
-          </a:p>
-          <a:p>
-            <a:pPr marL="274320" indent="-274320">
-              <a:spcAft>
-                <a:spcPts val="810"/>
-              </a:spcAft>
-              <a:buClr>
-                <a:srgbClr val="0645AD"/>
-              </a:buClr>
-              <a:buFont typeface="Arial"/>
-              <a:buChar char="•"/>
-            </a:pPr>
-            <a:r>
-              <a:rPr sz="1800" b="0">
-                <a:solidFill>
-                  <a:srgbClr val="202122"/>
-                </a:solidFill>
-                <a:latin typeface="Calibri"/>
-              </a:rPr>
-              <a:t>Lockout after repeated failures</a:t>
+              <a:rPr sz="1300" b="0" i="1">
+                <a:solidFill>
+                  <a:srgbClr val="54595D"/>
+                </a:solidFill>
+                <a:latin typeface="Calibri"/>
+              </a:rPr>
+              <a:t>Answer on mini whiteboards or in your book. Answers are in the speaker notes.</a:t>
             </a:r>
           </a:p>
         </p:txBody>
